--- a/output/wordlabs-kaleido-3day.pptx
+++ b/output/wordlabs-kaleido-3day.pptx
@@ -4240,7 +4240,7 @@
                 <a:ea typeface="Calibri" pitchFamily="34" charset="-122"/>
                 <a:cs typeface="Calibri" pitchFamily="34" charset="-120"/>
               </a:rPr>
-              <a:t>"beautiful, shifting coloured forms"</a:t>
+              <a:t>"beautiful, varied, shifting forms"</a:t>
             </a:r>
             <a:endParaRPr lang="en-US" sz="2200" dirty="0"/>
           </a:p>
@@ -5288,7 +5288,7 @@
                 <a:ea typeface="Calibri" pitchFamily="34" charset="-122"/>
                 <a:cs typeface="Calibri" pitchFamily="34" charset="-120"/>
               </a:rPr>
-              <a:t>Word Labs  •  wordlabs.app  •  Root: 'kaleido' = beautiful, shifting coloured forms</a:t>
+              <a:t>Word Labs  •  wordlabs.app  •  Root: 'kaleido' = beautiful, varied, shifting forms</a:t>
             </a:r>
             <a:endParaRPr lang="en-US" sz="800" dirty="0"/>
           </a:p>
@@ -5928,7 +5928,7 @@
                 <a:ea typeface="Calibri" pitchFamily="34" charset="-122"/>
                 <a:cs typeface="Calibri" pitchFamily="34" charset="-120"/>
               </a:rPr>
-              <a:t>Word Labs  •  wordlabs.app  •  Root: 'kaleido' = beautiful, shifting coloured forms</a:t>
+              <a:t>Word Labs  •  wordlabs.app  •  Root: 'kaleido' = beautiful, varied, shifting forms</a:t>
             </a:r>
             <a:endParaRPr lang="en-US" sz="800" dirty="0"/>
           </a:p>
@@ -6071,7 +6071,7 @@
                 <a:ea typeface="Calibri" pitchFamily="34" charset="-122"/>
                 <a:cs typeface="Calibri" pitchFamily="34" charset="-120"/>
               </a:rPr>
-              <a:t> produced a </a:t>
+              <a:t> on the shelf creates </a:t>
             </a:r>
             <a:pPr algn="l" indent="0" marL="0">
               <a:buNone/>
@@ -6102,7 +6102,7 @@
                 <a:ea typeface="Calibri" pitchFamily="34" charset="-122"/>
                 <a:cs typeface="Calibri" pitchFamily="34" charset="-120"/>
               </a:rPr>
-              <a:t> display that left the whole class speechless!</a:t>
+              <a:t> patterns that dazzle everyone who looks through it!</a:t>
             </a:r>
             <a:endParaRPr lang="en-US" sz="1800" dirty="0"/>
           </a:p>
@@ -6716,7 +6716,7 @@
                 <a:ea typeface="Calibri" pitchFamily="34" charset="-122"/>
                 <a:cs typeface="Calibri" pitchFamily="34" charset="-120"/>
               </a:rPr>
-              <a:t>Word Labs  •  wordlabs.app  •  Root: 'kaleido' = beautiful, shifting coloured forms</a:t>
+              <a:t>Word Labs  •  wordlabs.app  •  Root: 'kaleido' = beautiful, varied, shifting forms</a:t>
             </a:r>
             <a:endParaRPr lang="en-US" sz="800" dirty="0"/>
           </a:p>
@@ -7543,7 +7543,7 @@
                 <a:ea typeface="Calibri" pitchFamily="34" charset="-122"/>
                 <a:cs typeface="Calibri" pitchFamily="34" charset="-120"/>
               </a:rPr>
-              <a:t>Word Labs  •  wordlabs.app  •  Root: 'kaleido' = beautiful, shifting coloured forms</a:t>
+              <a:t>Word Labs  •  wordlabs.app  •  Root: 'kaleido' = beautiful, varied, shifting forms</a:t>
             </a:r>
             <a:endParaRPr lang="en-US" sz="800" dirty="0"/>
           </a:p>
@@ -7860,7 +7860,7 @@
                 <a:ea typeface="Calibri" pitchFamily="34" charset="-122"/>
                 <a:cs typeface="Calibri" pitchFamily="34" charset="-120"/>
               </a:rPr>
-              <a:t>beautiful shifting form</a:t>
+              <a:t>beautiful, varied forms</a:t>
             </a:r>
             <a:endParaRPr lang="en-US" sz="850" dirty="0"/>
           </a:p>
@@ -7972,7 +7972,7 @@
                 <a:ea typeface="Calibri" pitchFamily="34" charset="-122"/>
                 <a:cs typeface="Calibri" pitchFamily="34" charset="-120"/>
               </a:rPr>
-              <a:t>instrument for looking/viewing</a:t>
+              <a:t>instrument for viewing/observing</a:t>
             </a:r>
             <a:endParaRPr lang="en-US" sz="850" dirty="0"/>
           </a:p>
@@ -8528,7 +8528,7 @@
                 <a:ea typeface="Calibri" pitchFamily="34" charset="-122"/>
                 <a:cs typeface="Calibri" pitchFamily="34" charset="-120"/>
               </a:rPr>
-              <a:t>Word Labs  •  wordlabs.app  •  Root: 'kaleido' = beautiful, shifting coloured forms</a:t>
+              <a:t>Word Labs  •  wordlabs.app  •  Root: 'kaleido' = beautiful, varied, shifting forms</a:t>
             </a:r>
             <a:endParaRPr lang="en-US" sz="800" dirty="0"/>
           </a:p>
@@ -8845,7 +8845,7 @@
                 <a:ea typeface="Calibri" pitchFamily="34" charset="-122"/>
                 <a:cs typeface="Calibri" pitchFamily="34" charset="-120"/>
               </a:rPr>
-              <a:t>beautiful shifting form</a:t>
+              <a:t>beautiful, varied forms</a:t>
             </a:r>
             <a:endParaRPr lang="en-US" sz="850" dirty="0"/>
           </a:p>
@@ -8957,7 +8957,7 @@
                 <a:ea typeface="Calibri" pitchFamily="34" charset="-122"/>
                 <a:cs typeface="Calibri" pitchFamily="34" charset="-120"/>
               </a:rPr>
-              <a:t>instrument for looking/viewing</a:t>
+              <a:t>instrument for viewing/observing</a:t>
             </a:r>
             <a:endParaRPr lang="en-US" sz="850" dirty="0"/>
           </a:p>
@@ -9855,7 +9855,7 @@
                 <a:ea typeface="Calibri" pitchFamily="34" charset="-122"/>
                 <a:cs typeface="Calibri" pitchFamily="34" charset="-120"/>
               </a:rPr>
-              <a:t>Word Labs  •  wordlabs.app  •  Root: 'kaleido' = beautiful, shifting coloured forms</a:t>
+              <a:t>Word Labs  •  wordlabs.app  •  Root: 'kaleido' = beautiful, varied, shifting forms</a:t>
             </a:r>
             <a:endParaRPr lang="en-US" sz="800" dirty="0"/>
           </a:p>
@@ -10172,7 +10172,7 @@
                 <a:ea typeface="Calibri" pitchFamily="34" charset="-122"/>
                 <a:cs typeface="Calibri" pitchFamily="34" charset="-120"/>
               </a:rPr>
-              <a:t>beautiful shifting form</a:t>
+              <a:t>beautiful, varied forms</a:t>
             </a:r>
             <a:endParaRPr lang="en-US" sz="850" dirty="0"/>
           </a:p>
@@ -10284,7 +10284,7 @@
                 <a:ea typeface="Calibri" pitchFamily="34" charset="-122"/>
                 <a:cs typeface="Calibri" pitchFamily="34" charset="-120"/>
               </a:rPr>
-              <a:t>instrument for looking/viewing</a:t>
+              <a:t>instrument for viewing/observing</a:t>
             </a:r>
             <a:endParaRPr lang="en-US" sz="850" dirty="0"/>
           </a:p>
@@ -11776,7 +11776,7 @@
                 <a:ea typeface="Calibri" pitchFamily="34" charset="-122"/>
                 <a:cs typeface="Calibri" pitchFamily="34" charset="-120"/>
               </a:rPr>
-              <a:t>Word Labs  •  wordlabs.app  •  Root: 'kaleido' = beautiful, shifting coloured forms</a:t>
+              <a:t>Word Labs  •  wordlabs.app  •  Root: 'kaleido' = beautiful, varied, shifting forms</a:t>
             </a:r>
             <a:endParaRPr lang="en-US" sz="800" dirty="0"/>
           </a:p>
@@ -12603,7 +12603,7 @@
                 <a:ea typeface="Calibri" pitchFamily="34" charset="-122"/>
                 <a:cs typeface="Calibri" pitchFamily="34" charset="-120"/>
               </a:rPr>
-              <a:t>Word Labs  •  wordlabs.app  •  Root: 'kaleido' = beautiful, shifting coloured forms</a:t>
+              <a:t>Word Labs  •  wordlabs.app  •  Root: 'kaleido' = beautiful, varied, shifting forms</a:t>
             </a:r>
             <a:endParaRPr lang="en-US" sz="800" dirty="0"/>
           </a:p>
@@ -12920,7 +12920,7 @@
                 <a:ea typeface="Calibri" pitchFamily="34" charset="-122"/>
                 <a:cs typeface="Calibri" pitchFamily="34" charset="-120"/>
               </a:rPr>
-              <a:t>beautiful shifting form</a:t>
+              <a:t>beautiful, varied forms</a:t>
             </a:r>
             <a:endParaRPr lang="en-US" sz="850" dirty="0"/>
           </a:p>
@@ -13032,7 +13032,7 @@
                 <a:ea typeface="Calibri" pitchFamily="34" charset="-122"/>
                 <a:cs typeface="Calibri" pitchFamily="34" charset="-120"/>
               </a:rPr>
-              <a:t>look/view</a:t>
+              <a:t>viewing/observing</a:t>
             </a:r>
             <a:endParaRPr lang="en-US" sz="850" dirty="0"/>
           </a:p>
@@ -13700,7 +13700,7 @@
                 <a:ea typeface="Calibri" pitchFamily="34" charset="-122"/>
                 <a:cs typeface="Calibri" pitchFamily="34" charset="-120"/>
               </a:rPr>
-              <a:t>Word Labs  •  wordlabs.app  •  Root: 'kaleido' = beautiful, shifting coloured forms</a:t>
+              <a:t>Word Labs  •  wordlabs.app  •  Root: 'kaleido' = beautiful, varied, shifting forms</a:t>
             </a:r>
             <a:endParaRPr lang="en-US" sz="800" dirty="0"/>
           </a:p>
@@ -14017,7 +14017,7 @@
                 <a:ea typeface="Calibri" pitchFamily="34" charset="-122"/>
                 <a:cs typeface="Calibri" pitchFamily="34" charset="-120"/>
               </a:rPr>
-              <a:t>beautiful shifting form</a:t>
+              <a:t>beautiful, varied forms</a:t>
             </a:r>
             <a:endParaRPr lang="en-US" sz="850" dirty="0"/>
           </a:p>
@@ -14129,7 +14129,7 @@
                 <a:ea typeface="Calibri" pitchFamily="34" charset="-122"/>
                 <a:cs typeface="Calibri" pitchFamily="34" charset="-120"/>
               </a:rPr>
-              <a:t>look/view</a:t>
+              <a:t>viewing/observing</a:t>
             </a:r>
             <a:endParaRPr lang="en-US" sz="850" dirty="0"/>
           </a:p>
@@ -15153,7 +15153,7 @@
                 <a:ea typeface="Calibri" pitchFamily="34" charset="-122"/>
                 <a:cs typeface="Calibri" pitchFamily="34" charset="-120"/>
               </a:rPr>
-              <a:t>Root 'kaleido' — beautiful, shifting coloured forms</a:t>
+              <a:t>Root 'kaleido' — beautiful, varied, shifting forms</a:t>
             </a:r>
             <a:endParaRPr lang="en-US" sz="1600" dirty="0"/>
           </a:p>
@@ -15509,7 +15509,7 @@
                 <a:ea typeface="Calibri" pitchFamily="34" charset="-122"/>
                 <a:cs typeface="Calibri" pitchFamily="34" charset="-120"/>
               </a:rPr>
-              <a:t>Word Labs  •  wordlabs.app  •  Root: 'kaleido' = beautiful, shifting coloured forms</a:t>
+              <a:t>Word Labs  •  wordlabs.app  •  Root: 'kaleido' = beautiful, varied, shifting forms</a:t>
             </a:r>
             <a:endParaRPr lang="en-US" sz="800" dirty="0"/>
           </a:p>
@@ -15826,7 +15826,7 @@
                 <a:ea typeface="Calibri" pitchFamily="34" charset="-122"/>
                 <a:cs typeface="Calibri" pitchFamily="34" charset="-120"/>
               </a:rPr>
-              <a:t>beautiful shifting form</a:t>
+              <a:t>beautiful, varied forms</a:t>
             </a:r>
             <a:endParaRPr lang="en-US" sz="850" dirty="0"/>
           </a:p>
@@ -15938,7 +15938,7 @@
                 <a:ea typeface="Calibri" pitchFamily="34" charset="-122"/>
                 <a:cs typeface="Calibri" pitchFamily="34" charset="-120"/>
               </a:rPr>
-              <a:t>look/view</a:t>
+              <a:t>viewing/observing</a:t>
             </a:r>
             <a:endParaRPr lang="en-US" sz="850" dirty="0"/>
           </a:p>
@@ -18100,7 +18100,7 @@
                 <a:ea typeface="Calibri" pitchFamily="34" charset="-122"/>
                 <a:cs typeface="Calibri" pitchFamily="34" charset="-120"/>
               </a:rPr>
-              <a:t>Word Labs  •  wordlabs.app  •  Root: 'kaleido' = beautiful, shifting coloured forms</a:t>
+              <a:t>Word Labs  •  wordlabs.app  •  Root: 'kaleido' = beautiful, varied, shifting forms</a:t>
             </a:r>
             <a:endParaRPr lang="en-US" sz="800" dirty="0"/>
           </a:p>
@@ -18740,7 +18740,7 @@
                 <a:ea typeface="Calibri" pitchFamily="34" charset="-122"/>
                 <a:cs typeface="Calibri" pitchFamily="34" charset="-120"/>
               </a:rPr>
-              <a:t>Word Labs  •  wordlabs.app  •  Root: 'kaleido' = beautiful, shifting coloured forms</a:t>
+              <a:t>Word Labs  •  wordlabs.app  •  Root: 'kaleido' = beautiful, varied, shifting forms</a:t>
             </a:r>
             <a:endParaRPr lang="en-US" sz="800" dirty="0"/>
           </a:p>
@@ -18852,7 +18852,7 @@
                 <a:ea typeface="Calibri" pitchFamily="34" charset="-122"/>
                 <a:cs typeface="Calibri" pitchFamily="34" charset="-120"/>
               </a:rPr>
-              <a:t>The </a:t>
+              <a:t>She described the </a:t>
             </a:r>
             <a:pPr algn="l" indent="0" marL="0">
               <a:buNone/>
@@ -18869,7 +18869,7 @@
                 <a:ea typeface="Calibri" pitchFamily="34" charset="-122"/>
                 <a:cs typeface="Calibri" pitchFamily="34" charset="-120"/>
               </a:rPr>
-              <a:t>kaleidoscope</a:t>
+              <a:t>kaleidoscopy</a:t>
             </a:r>
             <a:pPr algn="l" indent="0" marL="0">
               <a:buNone/>
@@ -18883,7 +18883,7 @@
                 <a:ea typeface="Calibri" pitchFamily="34" charset="-122"/>
                 <a:cs typeface="Calibri" pitchFamily="34" charset="-120"/>
               </a:rPr>
-              <a:t>, with its </a:t>
+              <a:t> exhibit as </a:t>
             </a:r>
             <a:pPr algn="l" indent="0" marL="0">
               <a:buNone/>
@@ -18900,7 +18900,7 @@
                 <a:ea typeface="Calibri" pitchFamily="34" charset="-122"/>
                 <a:cs typeface="Calibri" pitchFamily="34" charset="-120"/>
               </a:rPr>
-              <a:t>kaleidoscopic</a:t>
+              <a:t>kaleidoscopically</a:t>
             </a:r>
             <a:pPr algn="l" indent="0" marL="0">
               <a:buNone/>
@@ -18914,7 +18914,7 @@
                 <a:ea typeface="Calibri" pitchFamily="34" charset="-122"/>
                 <a:cs typeface="Calibri" pitchFamily="34" charset="-120"/>
               </a:rPr>
-              <a:t> colours, inspired Maya to paint a </a:t>
+              <a:t> stunning; every </a:t>
             </a:r>
             <a:pPr algn="l" indent="0" marL="0">
               <a:buNone/>
@@ -18931,7 +18931,7 @@
                 <a:ea typeface="Calibri" pitchFamily="34" charset="-122"/>
                 <a:cs typeface="Calibri" pitchFamily="34" charset="-120"/>
               </a:rPr>
-              <a:t>kaleidoscape</a:t>
+              <a:t>kaleidograph</a:t>
             </a:r>
             <a:pPr algn="l" indent="0" marL="0">
               <a:buNone/>
@@ -18945,7 +18945,7 @@
                 <a:ea typeface="Calibri" pitchFamily="34" charset="-122"/>
                 <a:cs typeface="Calibri" pitchFamily="34" charset="-120"/>
               </a:rPr>
-              <a:t> of the garden.</a:t>
+              <a:t> on the wall glowed with shifting colour.</a:t>
             </a:r>
             <a:endParaRPr lang="en-US" sz="1800" dirty="0"/>
           </a:p>
@@ -19100,7 +19100,7 @@
                 <a:ea typeface="Trebuchet MS" pitchFamily="34" charset="-122"/>
                 <a:cs typeface="Trebuchet MS" pitchFamily="34" charset="-120"/>
               </a:rPr>
-              <a:t>kaleidoscope</a:t>
+              <a:t>kaleidoscopy</a:t>
             </a:r>
             <a:endParaRPr lang="en-US" sz="1400" dirty="0"/>
           </a:p>
@@ -19228,7 +19228,7 @@
                 <a:ea typeface="Trebuchet MS" pitchFamily="34" charset="-122"/>
                 <a:cs typeface="Trebuchet MS" pitchFamily="34" charset="-120"/>
               </a:rPr>
-              <a:t>kaleidoscopic</a:t>
+              <a:t>kaleidoscopically</a:t>
             </a:r>
             <a:endParaRPr lang="en-US" sz="1400" dirty="0"/>
           </a:p>
@@ -19356,7 +19356,7 @@
                 <a:ea typeface="Trebuchet MS" pitchFamily="34" charset="-122"/>
                 <a:cs typeface="Trebuchet MS" pitchFamily="34" charset="-120"/>
               </a:rPr>
-              <a:t>kaleidoscape</a:t>
+              <a:t>kaleidograph</a:t>
             </a:r>
             <a:endParaRPr lang="en-US" sz="1400" dirty="0"/>
           </a:p>
@@ -19687,7 +19687,7 @@
                 <a:ea typeface="Calibri" pitchFamily="34" charset="-122"/>
                 <a:cs typeface="Calibri" pitchFamily="34" charset="-120"/>
               </a:rPr>
-              <a:t>Word Labs  •  wordlabs.app  •  Root: 'kaleido' = beautiful, shifting coloured forms</a:t>
+              <a:t>Word Labs  •  wordlabs.app  •  Root: 'kaleido' = beautiful, varied, shifting forms</a:t>
             </a:r>
             <a:endParaRPr lang="en-US" sz="800" dirty="0"/>
           </a:p>
@@ -19826,7 +19826,7 @@
                 <a:ea typeface="Trebuchet MS" pitchFamily="34" charset="-122"/>
                 <a:cs typeface="Trebuchet MS" pitchFamily="34" charset="-120"/>
               </a:rPr>
-              <a:t>kaleidoscope</a:t>
+              <a:t>kaleidoscopy</a:t>
             </a:r>
             <a:endParaRPr lang="en-US" sz="2800" dirty="0"/>
           </a:p>
@@ -20514,7 +20514,7 @@
                 <a:ea typeface="Calibri" pitchFamily="34" charset="-122"/>
                 <a:cs typeface="Calibri" pitchFamily="34" charset="-120"/>
               </a:rPr>
-              <a:t>Word Labs  •  wordlabs.app  •  Root: 'kaleido' = beautiful, shifting coloured forms</a:t>
+              <a:t>Word Labs  •  wordlabs.app  •  Root: 'kaleido' = beautiful, varied, shifting forms</a:t>
             </a:r>
             <a:endParaRPr lang="en-US" sz="800" dirty="0"/>
           </a:p>
@@ -20653,7 +20653,7 @@
                 <a:ea typeface="Trebuchet MS" pitchFamily="34" charset="-122"/>
                 <a:cs typeface="Trebuchet MS" pitchFamily="34" charset="-120"/>
               </a:rPr>
-              <a:t>kaleidoscope</a:t>
+              <a:t>kaleidoscopy</a:t>
             </a:r>
             <a:endParaRPr lang="en-US" sz="2800" dirty="0"/>
           </a:p>
@@ -20733,7 +20733,7 @@
         </p:nvSpPr>
         <p:spPr>
           <a:xfrm>
-            <a:off x="2938272" y="2258568"/>
+            <a:off x="2221992" y="2258568"/>
             <a:ext cx="1828800" cy="292608"/>
           </a:xfrm>
           <a:prstGeom prst="rect">
@@ -20767,7 +20767,7 @@
         </p:nvSpPr>
         <p:spPr>
           <a:xfrm>
-            <a:off x="2938272" y="2258568"/>
+            <a:off x="2221992" y="2258568"/>
             <a:ext cx="1828800" cy="292608"/>
           </a:xfrm>
           <a:prstGeom prst="rect">
@@ -20806,7 +20806,7 @@
         </p:nvSpPr>
         <p:spPr>
           <a:xfrm>
-            <a:off x="2938272" y="2569464"/>
+            <a:off x="2221992" y="2569464"/>
             <a:ext cx="1828800" cy="201168"/>
           </a:xfrm>
           <a:prstGeom prst="rect">
@@ -20831,7 +20831,7 @@
                 <a:ea typeface="Calibri" pitchFamily="34" charset="-122"/>
                 <a:cs typeface="Calibri" pitchFamily="34" charset="-120"/>
               </a:rPr>
-              <a:t>beautiful shifting form</a:t>
+              <a:t>beautiful, varied forms</a:t>
             </a:r>
             <a:endParaRPr lang="en-US" sz="850" dirty="0"/>
           </a:p>
@@ -20845,7 +20845,7 @@
         </p:nvSpPr>
         <p:spPr>
           <a:xfrm>
-            <a:off x="5803392" y="2258568"/>
+            <a:off x="4370832" y="2258568"/>
             <a:ext cx="1828800" cy="292608"/>
           </a:xfrm>
           <a:prstGeom prst="rect">
@@ -20879,7 +20879,7 @@
         </p:nvSpPr>
         <p:spPr>
           <a:xfrm>
-            <a:off x="5803392" y="2258568"/>
+            <a:off x="4370832" y="2258568"/>
             <a:ext cx="1828800" cy="292608"/>
           </a:xfrm>
           <a:prstGeom prst="rect">
@@ -20904,7 +20904,7 @@
                 <a:ea typeface="Trebuchet MS" pitchFamily="34" charset="-122"/>
                 <a:cs typeface="Trebuchet MS" pitchFamily="34" charset="-120"/>
               </a:rPr>
-              <a:t>scope</a:t>
+              <a:t>scop</a:t>
             </a:r>
             <a:endParaRPr lang="en-US" sz="1300" dirty="0"/>
           </a:p>
@@ -20918,7 +20918,7 @@
         </p:nvSpPr>
         <p:spPr>
           <a:xfrm>
-            <a:off x="5803392" y="2569464"/>
+            <a:off x="4370832" y="2569464"/>
             <a:ext cx="1828800" cy="201168"/>
           </a:xfrm>
           <a:prstGeom prst="rect">
@@ -20943,7 +20943,7 @@
                 <a:ea typeface="Calibri" pitchFamily="34" charset="-122"/>
                 <a:cs typeface="Calibri" pitchFamily="34" charset="-120"/>
               </a:rPr>
-              <a:t>instrument for looking/viewing</a:t>
+              <a:t>viewing/observing</a:t>
             </a:r>
             <a:endParaRPr lang="en-US" sz="850" dirty="0"/>
           </a:p>
@@ -20952,6 +20952,118 @@
       <p:sp>
         <p:nvSpPr>
           <p:cNvPr id="22" name="Shape 20"/>
+          <p:cNvSpPr/>
+          <p:nvPr/>
+        </p:nvSpPr>
+        <p:spPr>
+          <a:xfrm>
+            <a:off x="6519672" y="2258568"/>
+            <a:ext cx="1828800" cy="292608"/>
+          </a:xfrm>
+          <a:prstGeom prst="rect">
+            <a:avLst>
+              <a:gd name="adj" fmla="val 25000"/>
+            </a:avLst>
+          </a:prstGeom>
+          <a:solidFill>
+            <a:srgbClr val="FCE7F3"/>
+          </a:solidFill>
+          <a:ln w="19050">
+            <a:solidFill>
+              <a:srgbClr val="DB2777"/>
+            </a:solidFill>
+            <a:prstDash val="solid"/>
+          </a:ln>
+          <a:effectLst>
+            <a:outerShdw sx="100000" sy="100000" kx="0" ky="0" algn="bl" rotWithShape="0" blurRad="101600" dist="38100" dir="8100000">
+              <a:srgbClr val="000000">
+                <a:alpha val="12000"/>
+              </a:srgbClr>
+            </a:outerShdw>
+          </a:effectLst>
+        </p:spPr>
+      </p:sp>
+      <p:sp>
+        <p:nvSpPr>
+          <p:cNvPr id="23" name="Text 21"/>
+          <p:cNvSpPr/>
+          <p:nvPr/>
+        </p:nvSpPr>
+        <p:spPr>
+          <a:xfrm>
+            <a:off x="6519672" y="2258568"/>
+            <a:ext cx="1828800" cy="292608"/>
+          </a:xfrm>
+          <a:prstGeom prst="rect">
+            <a:avLst/>
+          </a:prstGeom>
+          <a:noFill/>
+          <a:ln/>
+        </p:spPr>
+        <p:txBody>
+          <a:bodyPr wrap="square" lIns="0" tIns="0" rIns="0" bIns="0" rtlCol="0" anchor="ctr"/>
+          <a:lstStyle/>
+          <a:p>
+            <a:pPr algn="ctr" indent="0" marL="0">
+              <a:buNone/>
+            </a:pPr>
+            <a:r>
+              <a:rPr lang="en-US" sz="1300" b="1" dirty="0">
+                <a:solidFill>
+                  <a:srgbClr val="9D174D"/>
+                </a:solidFill>
+                <a:latin typeface="Trebuchet MS" pitchFamily="34" charset="0"/>
+                <a:ea typeface="Trebuchet MS" pitchFamily="34" charset="-122"/>
+                <a:cs typeface="Trebuchet MS" pitchFamily="34" charset="-120"/>
+              </a:rPr>
+              <a:t>y</a:t>
+            </a:r>
+            <a:endParaRPr lang="en-US" sz="1300" dirty="0"/>
+          </a:p>
+        </p:txBody>
+      </p:sp>
+      <p:sp>
+        <p:nvSpPr>
+          <p:cNvPr id="24" name="Text 22"/>
+          <p:cNvSpPr/>
+          <p:nvPr/>
+        </p:nvSpPr>
+        <p:spPr>
+          <a:xfrm>
+            <a:off x="6519672" y="2569464"/>
+            <a:ext cx="1828800" cy="201168"/>
+          </a:xfrm>
+          <a:prstGeom prst="rect">
+            <a:avLst/>
+          </a:prstGeom>
+          <a:noFill/>
+          <a:ln/>
+        </p:spPr>
+        <p:txBody>
+          <a:bodyPr wrap="square" lIns="0" tIns="0" rIns="0" bIns="0" rtlCol="0" anchor="t"/>
+          <a:lstStyle/>
+          <a:p>
+            <a:pPr algn="ctr" indent="0" marL="0">
+              <a:buNone/>
+            </a:pPr>
+            <a:r>
+              <a:rPr lang="en-US" sz="850" dirty="0">
+                <a:solidFill>
+                  <a:srgbClr val="475569"/>
+                </a:solidFill>
+                <a:latin typeface="Calibri" pitchFamily="34" charset="0"/>
+                <a:ea typeface="Calibri" pitchFamily="34" charset="-122"/>
+                <a:cs typeface="Calibri" pitchFamily="34" charset="-120"/>
+              </a:rPr>
+              <a:t>state of; practice of</a:t>
+            </a:r>
+            <a:endParaRPr lang="en-US" sz="850" dirty="0"/>
+          </a:p>
+        </p:txBody>
+      </p:sp>
+      <p:sp>
+        <p:nvSpPr>
+          <p:cNvPr id="25" name="Shape 23"/>
           <p:cNvSpPr/>
           <p:nvPr/>
         </p:nvSpPr>
@@ -20978,7 +21090,7 @@
       </p:sp>
       <p:sp>
         <p:nvSpPr>
-          <p:cNvPr id="23" name="Text 21"/>
+          <p:cNvPr id="26" name="Text 24"/>
           <p:cNvSpPr/>
           <p:nvPr/>
         </p:nvSpPr>
@@ -21017,7 +21129,7 @@
       </p:sp>
       <p:sp>
         <p:nvSpPr>
-          <p:cNvPr id="24" name="Shape 22"/>
+          <p:cNvPr id="27" name="Shape 25"/>
           <p:cNvSpPr/>
           <p:nvPr/>
         </p:nvSpPr>
@@ -21044,7 +21156,7 @@
       </p:sp>
       <p:sp>
         <p:nvSpPr>
-          <p:cNvPr id="25" name="Text 23"/>
+          <p:cNvPr id="28" name="Text 26"/>
           <p:cNvSpPr/>
           <p:nvPr/>
         </p:nvSpPr>
@@ -21083,7 +21195,7 @@
       </p:sp>
       <p:sp>
         <p:nvSpPr>
-          <p:cNvPr id="26" name="Shape 24"/>
+          <p:cNvPr id="29" name="Shape 27"/>
           <p:cNvSpPr/>
           <p:nvPr/>
         </p:nvSpPr>
@@ -21110,7 +21222,7 @@
       </p:sp>
       <p:sp>
         <p:nvSpPr>
-          <p:cNvPr id="27" name="Text 25"/>
+          <p:cNvPr id="30" name="Text 28"/>
           <p:cNvSpPr/>
           <p:nvPr/>
         </p:nvSpPr>
@@ -21149,7 +21261,7 @@
       </p:sp>
       <p:sp>
         <p:nvSpPr>
-          <p:cNvPr id="28" name="Shape 26"/>
+          <p:cNvPr id="31" name="Shape 29"/>
           <p:cNvSpPr/>
           <p:nvPr/>
         </p:nvSpPr>
@@ -21176,7 +21288,7 @@
       </p:sp>
       <p:sp>
         <p:nvSpPr>
-          <p:cNvPr id="29" name="Text 27"/>
+          <p:cNvPr id="32" name="Text 30"/>
           <p:cNvSpPr/>
           <p:nvPr/>
         </p:nvSpPr>
@@ -21499,7 +21611,7 @@
                 <a:ea typeface="Calibri" pitchFamily="34" charset="-122"/>
                 <a:cs typeface="Calibri" pitchFamily="34" charset="-120"/>
               </a:rPr>
-              <a:t>Word Labs  •  wordlabs.app  •  Root: 'kaleido' = beautiful, shifting coloured forms</a:t>
+              <a:t>Word Labs  •  wordlabs.app  •  Root: 'kaleido' = beautiful, varied, shifting forms</a:t>
             </a:r>
             <a:endParaRPr lang="en-US" sz="800" dirty="0"/>
           </a:p>
@@ -21638,7 +21750,7 @@
                 <a:ea typeface="Trebuchet MS" pitchFamily="34" charset="-122"/>
                 <a:cs typeface="Trebuchet MS" pitchFamily="34" charset="-120"/>
               </a:rPr>
-              <a:t>kaleidoscope</a:t>
+              <a:t>kaleidoscopy</a:t>
             </a:r>
             <a:endParaRPr lang="en-US" sz="2800" dirty="0"/>
           </a:p>
@@ -21718,7 +21830,7 @@
         </p:nvSpPr>
         <p:spPr>
           <a:xfrm>
-            <a:off x="2938272" y="2258568"/>
+            <a:off x="2221992" y="2258568"/>
             <a:ext cx="1828800" cy="292608"/>
           </a:xfrm>
           <a:prstGeom prst="rect">
@@ -21752,7 +21864,7 @@
         </p:nvSpPr>
         <p:spPr>
           <a:xfrm>
-            <a:off x="2938272" y="2258568"/>
+            <a:off x="2221992" y="2258568"/>
             <a:ext cx="1828800" cy="292608"/>
           </a:xfrm>
           <a:prstGeom prst="rect">
@@ -21791,7 +21903,7 @@
         </p:nvSpPr>
         <p:spPr>
           <a:xfrm>
-            <a:off x="2938272" y="2569464"/>
+            <a:off x="2221992" y="2569464"/>
             <a:ext cx="1828800" cy="201168"/>
           </a:xfrm>
           <a:prstGeom prst="rect">
@@ -21816,7 +21928,7 @@
                 <a:ea typeface="Calibri" pitchFamily="34" charset="-122"/>
                 <a:cs typeface="Calibri" pitchFamily="34" charset="-120"/>
               </a:rPr>
-              <a:t>beautiful shifting form</a:t>
+              <a:t>beautiful, varied forms</a:t>
             </a:r>
             <a:endParaRPr lang="en-US" sz="850" dirty="0"/>
           </a:p>
@@ -21830,7 +21942,7 @@
         </p:nvSpPr>
         <p:spPr>
           <a:xfrm>
-            <a:off x="5803392" y="2258568"/>
+            <a:off x="4370832" y="2258568"/>
             <a:ext cx="1828800" cy="292608"/>
           </a:xfrm>
           <a:prstGeom prst="rect">
@@ -21864,7 +21976,7 @@
         </p:nvSpPr>
         <p:spPr>
           <a:xfrm>
-            <a:off x="5803392" y="2258568"/>
+            <a:off x="4370832" y="2258568"/>
             <a:ext cx="1828800" cy="292608"/>
           </a:xfrm>
           <a:prstGeom prst="rect">
@@ -21889,7 +22001,7 @@
                 <a:ea typeface="Trebuchet MS" pitchFamily="34" charset="-122"/>
                 <a:cs typeface="Trebuchet MS" pitchFamily="34" charset="-120"/>
               </a:rPr>
-              <a:t>scope</a:t>
+              <a:t>scop</a:t>
             </a:r>
             <a:endParaRPr lang="en-US" sz="1300" dirty="0"/>
           </a:p>
@@ -21903,7 +22015,7 @@
         </p:nvSpPr>
         <p:spPr>
           <a:xfrm>
-            <a:off x="5803392" y="2569464"/>
+            <a:off x="4370832" y="2569464"/>
             <a:ext cx="1828800" cy="201168"/>
           </a:xfrm>
           <a:prstGeom prst="rect">
@@ -21928,7 +22040,7 @@
                 <a:ea typeface="Calibri" pitchFamily="34" charset="-122"/>
                 <a:cs typeface="Calibri" pitchFamily="34" charset="-120"/>
               </a:rPr>
-              <a:t>instrument for looking/viewing</a:t>
+              <a:t>viewing/observing</a:t>
             </a:r>
             <a:endParaRPr lang="en-US" sz="850" dirty="0"/>
           </a:p>
@@ -21937,6 +22049,118 @@
       <p:sp>
         <p:nvSpPr>
           <p:cNvPr id="22" name="Shape 20"/>
+          <p:cNvSpPr/>
+          <p:nvPr/>
+        </p:nvSpPr>
+        <p:spPr>
+          <a:xfrm>
+            <a:off x="6519672" y="2258568"/>
+            <a:ext cx="1828800" cy="292608"/>
+          </a:xfrm>
+          <a:prstGeom prst="rect">
+            <a:avLst>
+              <a:gd name="adj" fmla="val 25000"/>
+            </a:avLst>
+          </a:prstGeom>
+          <a:solidFill>
+            <a:srgbClr val="FCE7F3"/>
+          </a:solidFill>
+          <a:ln w="19050">
+            <a:solidFill>
+              <a:srgbClr val="DB2777"/>
+            </a:solidFill>
+            <a:prstDash val="solid"/>
+          </a:ln>
+          <a:effectLst>
+            <a:outerShdw sx="100000" sy="100000" kx="0" ky="0" algn="bl" rotWithShape="0" blurRad="101600" dist="38100" dir="8100000">
+              <a:srgbClr val="000000">
+                <a:alpha val="12000"/>
+              </a:srgbClr>
+            </a:outerShdw>
+          </a:effectLst>
+        </p:spPr>
+      </p:sp>
+      <p:sp>
+        <p:nvSpPr>
+          <p:cNvPr id="23" name="Text 21"/>
+          <p:cNvSpPr/>
+          <p:nvPr/>
+        </p:nvSpPr>
+        <p:spPr>
+          <a:xfrm>
+            <a:off x="6519672" y="2258568"/>
+            <a:ext cx="1828800" cy="292608"/>
+          </a:xfrm>
+          <a:prstGeom prst="rect">
+            <a:avLst/>
+          </a:prstGeom>
+          <a:noFill/>
+          <a:ln/>
+        </p:spPr>
+        <p:txBody>
+          <a:bodyPr wrap="square" lIns="0" tIns="0" rIns="0" bIns="0" rtlCol="0" anchor="ctr"/>
+          <a:lstStyle/>
+          <a:p>
+            <a:pPr algn="ctr" indent="0" marL="0">
+              <a:buNone/>
+            </a:pPr>
+            <a:r>
+              <a:rPr lang="en-US" sz="1300" b="1" dirty="0">
+                <a:solidFill>
+                  <a:srgbClr val="9D174D"/>
+                </a:solidFill>
+                <a:latin typeface="Trebuchet MS" pitchFamily="34" charset="0"/>
+                <a:ea typeface="Trebuchet MS" pitchFamily="34" charset="-122"/>
+                <a:cs typeface="Trebuchet MS" pitchFamily="34" charset="-120"/>
+              </a:rPr>
+              <a:t>y</a:t>
+            </a:r>
+            <a:endParaRPr lang="en-US" sz="1300" dirty="0"/>
+          </a:p>
+        </p:txBody>
+      </p:sp>
+      <p:sp>
+        <p:nvSpPr>
+          <p:cNvPr id="24" name="Text 22"/>
+          <p:cNvSpPr/>
+          <p:nvPr/>
+        </p:nvSpPr>
+        <p:spPr>
+          <a:xfrm>
+            <a:off x="6519672" y="2569464"/>
+            <a:ext cx="1828800" cy="201168"/>
+          </a:xfrm>
+          <a:prstGeom prst="rect">
+            <a:avLst/>
+          </a:prstGeom>
+          <a:noFill/>
+          <a:ln/>
+        </p:spPr>
+        <p:txBody>
+          <a:bodyPr wrap="square" lIns="0" tIns="0" rIns="0" bIns="0" rtlCol="0" anchor="t"/>
+          <a:lstStyle/>
+          <a:p>
+            <a:pPr algn="ctr" indent="0" marL="0">
+              <a:buNone/>
+            </a:pPr>
+            <a:r>
+              <a:rPr lang="en-US" sz="850" dirty="0">
+                <a:solidFill>
+                  <a:srgbClr val="475569"/>
+                </a:solidFill>
+                <a:latin typeface="Calibri" pitchFamily="34" charset="0"/>
+                <a:ea typeface="Calibri" pitchFamily="34" charset="-122"/>
+                <a:cs typeface="Calibri" pitchFamily="34" charset="-120"/>
+              </a:rPr>
+              <a:t>state of; practice of</a:t>
+            </a:r>
+            <a:endParaRPr lang="en-US" sz="850" dirty="0"/>
+          </a:p>
+        </p:txBody>
+      </p:sp>
+      <p:sp>
+        <p:nvSpPr>
+          <p:cNvPr id="25" name="Shape 23"/>
           <p:cNvSpPr/>
           <p:nvPr/>
         </p:nvSpPr>
@@ -21963,7 +22187,7 @@
       </p:sp>
       <p:sp>
         <p:nvSpPr>
-          <p:cNvPr id="23" name="Text 21"/>
+          <p:cNvPr id="26" name="Text 24"/>
           <p:cNvSpPr/>
           <p:nvPr/>
         </p:nvSpPr>
@@ -22002,7 +22226,7 @@
       </p:sp>
       <p:sp>
         <p:nvSpPr>
-          <p:cNvPr id="24" name="Shape 22"/>
+          <p:cNvPr id="27" name="Shape 25"/>
           <p:cNvSpPr/>
           <p:nvPr/>
         </p:nvSpPr>
@@ -22029,14 +22253,14 @@
       </p:sp>
       <p:sp>
         <p:nvSpPr>
-          <p:cNvPr id="25" name="Shape 23"/>
-          <p:cNvSpPr/>
-          <p:nvPr/>
-        </p:nvSpPr>
-        <p:spPr>
-          <a:xfrm>
-            <a:off x="1975104" y="3364992"/>
-            <a:ext cx="1554480" cy="475488"/>
+          <p:cNvPr id="28" name="Shape 26"/>
+          <p:cNvSpPr/>
+          <p:nvPr/>
+        </p:nvSpPr>
+        <p:spPr>
+          <a:xfrm>
+            <a:off x="1978152" y="3364992"/>
+            <a:ext cx="1225296" cy="475488"/>
           </a:xfrm>
           <a:prstGeom prst="rect">
             <a:avLst>
@@ -22056,14 +22280,14 @@
       </p:sp>
       <p:sp>
         <p:nvSpPr>
-          <p:cNvPr id="26" name="Text 24"/>
-          <p:cNvSpPr/>
-          <p:nvPr/>
-        </p:nvSpPr>
-        <p:spPr>
-          <a:xfrm>
-            <a:off x="1975104" y="3364992"/>
-            <a:ext cx="1554480" cy="475488"/>
+          <p:cNvPr id="29" name="Text 27"/>
+          <p:cNvSpPr/>
+          <p:nvPr/>
+        </p:nvSpPr>
+        <p:spPr>
+          <a:xfrm>
+            <a:off x="1978152" y="3364992"/>
+            <a:ext cx="1225296" cy="475488"/>
           </a:xfrm>
           <a:prstGeom prst="rect">
             <a:avLst/>
@@ -22095,14 +22319,14 @@
       </p:sp>
       <p:sp>
         <p:nvSpPr>
-          <p:cNvPr id="27" name="Text 25"/>
-          <p:cNvSpPr/>
-          <p:nvPr/>
-        </p:nvSpPr>
-        <p:spPr>
-          <a:xfrm>
-            <a:off x="3529584" y="3364992"/>
-            <a:ext cx="73152" cy="475488"/>
+          <p:cNvPr id="30" name="Text 28"/>
+          <p:cNvSpPr/>
+          <p:nvPr/>
+        </p:nvSpPr>
+        <p:spPr>
+          <a:xfrm>
+            <a:off x="3203448" y="3364992"/>
+            <a:ext cx="76200" cy="475488"/>
           </a:xfrm>
           <a:prstGeom prst="rect">
             <a:avLst/>
@@ -22134,14 +22358,14 @@
       </p:sp>
       <p:sp>
         <p:nvSpPr>
-          <p:cNvPr id="28" name="Shape 26"/>
-          <p:cNvSpPr/>
-          <p:nvPr/>
-        </p:nvSpPr>
-        <p:spPr>
-          <a:xfrm>
-            <a:off x="3602736" y="3364992"/>
-            <a:ext cx="1554480" cy="475488"/>
+          <p:cNvPr id="31" name="Shape 29"/>
+          <p:cNvSpPr/>
+          <p:nvPr/>
+        </p:nvSpPr>
+        <p:spPr>
+          <a:xfrm>
+            <a:off x="3279648" y="3364992"/>
+            <a:ext cx="1225296" cy="475488"/>
           </a:xfrm>
           <a:prstGeom prst="rect">
             <a:avLst>
@@ -22161,14 +22385,14 @@
       </p:sp>
       <p:sp>
         <p:nvSpPr>
-          <p:cNvPr id="29" name="Text 27"/>
-          <p:cNvSpPr/>
-          <p:nvPr/>
-        </p:nvSpPr>
-        <p:spPr>
-          <a:xfrm>
-            <a:off x="3602736" y="3364992"/>
-            <a:ext cx="1554480" cy="475488"/>
+          <p:cNvPr id="32" name="Text 30"/>
+          <p:cNvSpPr/>
+          <p:nvPr/>
+        </p:nvSpPr>
+        <p:spPr>
+          <a:xfrm>
+            <a:off x="3279648" y="3364992"/>
+            <a:ext cx="1225296" cy="475488"/>
           </a:xfrm>
           <a:prstGeom prst="rect">
             <a:avLst/>
@@ -22200,14 +22424,14 @@
       </p:sp>
       <p:sp>
         <p:nvSpPr>
-          <p:cNvPr id="30" name="Text 28"/>
-          <p:cNvSpPr/>
-          <p:nvPr/>
-        </p:nvSpPr>
-        <p:spPr>
-          <a:xfrm>
-            <a:off x="5157216" y="3364992"/>
-            <a:ext cx="73152" cy="475488"/>
+          <p:cNvPr id="33" name="Text 31"/>
+          <p:cNvSpPr/>
+          <p:nvPr/>
+        </p:nvSpPr>
+        <p:spPr>
+          <a:xfrm>
+            <a:off x="4504944" y="3364992"/>
+            <a:ext cx="76200" cy="475488"/>
           </a:xfrm>
           <a:prstGeom prst="rect">
             <a:avLst/>
@@ -22239,14 +22463,14 @@
       </p:sp>
       <p:sp>
         <p:nvSpPr>
-          <p:cNvPr id="31" name="Shape 29"/>
-          <p:cNvSpPr/>
-          <p:nvPr/>
-        </p:nvSpPr>
-        <p:spPr>
-          <a:xfrm>
-            <a:off x="5230368" y="3364992"/>
-            <a:ext cx="1554480" cy="475488"/>
+          <p:cNvPr id="34" name="Shape 32"/>
+          <p:cNvSpPr/>
+          <p:nvPr/>
+        </p:nvSpPr>
+        <p:spPr>
+          <a:xfrm>
+            <a:off x="4581144" y="3364992"/>
+            <a:ext cx="1225296" cy="475488"/>
           </a:xfrm>
           <a:prstGeom prst="rect">
             <a:avLst>
@@ -22266,14 +22490,14 @@
       </p:sp>
       <p:sp>
         <p:nvSpPr>
-          <p:cNvPr id="32" name="Text 30"/>
-          <p:cNvSpPr/>
-          <p:nvPr/>
-        </p:nvSpPr>
-        <p:spPr>
-          <a:xfrm>
-            <a:off x="5230368" y="3364992"/>
-            <a:ext cx="1554480" cy="475488"/>
+          <p:cNvPr id="35" name="Text 33"/>
+          <p:cNvSpPr/>
+          <p:nvPr/>
+        </p:nvSpPr>
+        <p:spPr>
+          <a:xfrm>
+            <a:off x="4581144" y="3364992"/>
+            <a:ext cx="1225296" cy="475488"/>
           </a:xfrm>
           <a:prstGeom prst="rect">
             <a:avLst/>
@@ -22297,7 +22521,7 @@
                 <a:ea typeface="Trebuchet MS" pitchFamily="34" charset="-122"/>
                 <a:cs typeface="Trebuchet MS" pitchFamily="34" charset="-120"/>
               </a:rPr>
-              <a:t>do</a:t>
+              <a:t>dos</a:t>
             </a:r>
             <a:endParaRPr lang="en-US" sz="1400" dirty="0"/>
           </a:p>
@@ -22305,14 +22529,14 @@
       </p:sp>
       <p:sp>
         <p:nvSpPr>
-          <p:cNvPr id="33" name="Text 31"/>
-          <p:cNvSpPr/>
-          <p:nvPr/>
-        </p:nvSpPr>
-        <p:spPr>
-          <a:xfrm>
-            <a:off x="6784848" y="3364992"/>
-            <a:ext cx="73152" cy="475488"/>
+          <p:cNvPr id="36" name="Text 34"/>
+          <p:cNvSpPr/>
+          <p:nvPr/>
+        </p:nvSpPr>
+        <p:spPr>
+          <a:xfrm>
+            <a:off x="5806440" y="3364992"/>
+            <a:ext cx="76200" cy="475488"/>
           </a:xfrm>
           <a:prstGeom prst="rect">
             <a:avLst/>
@@ -22344,14 +22568,14 @@
       </p:sp>
       <p:sp>
         <p:nvSpPr>
-          <p:cNvPr id="34" name="Shape 32"/>
-          <p:cNvSpPr/>
-          <p:nvPr/>
-        </p:nvSpPr>
-        <p:spPr>
-          <a:xfrm>
-            <a:off x="6858000" y="3364992"/>
-            <a:ext cx="1554480" cy="475488"/>
+          <p:cNvPr id="37" name="Shape 35"/>
+          <p:cNvSpPr/>
+          <p:nvPr/>
+        </p:nvSpPr>
+        <p:spPr>
+          <a:xfrm>
+            <a:off x="5882640" y="3364992"/>
+            <a:ext cx="1225296" cy="475488"/>
           </a:xfrm>
           <a:prstGeom prst="rect">
             <a:avLst>
@@ -22371,14 +22595,14 @@
       </p:sp>
       <p:sp>
         <p:nvSpPr>
-          <p:cNvPr id="35" name="Text 33"/>
-          <p:cNvSpPr/>
-          <p:nvPr/>
-        </p:nvSpPr>
-        <p:spPr>
-          <a:xfrm>
-            <a:off x="6858000" y="3364992"/>
-            <a:ext cx="1554480" cy="475488"/>
+          <p:cNvPr id="38" name="Text 36"/>
+          <p:cNvSpPr/>
+          <p:nvPr/>
+        </p:nvSpPr>
+        <p:spPr>
+          <a:xfrm>
+            <a:off x="5882640" y="3364992"/>
+            <a:ext cx="1225296" cy="475488"/>
           </a:xfrm>
           <a:prstGeom prst="rect">
             <a:avLst/>
@@ -22402,7 +22626,7 @@
                 <a:ea typeface="Trebuchet MS" pitchFamily="34" charset="-122"/>
                 <a:cs typeface="Trebuchet MS" pitchFamily="34" charset="-120"/>
               </a:rPr>
-              <a:t>scope</a:t>
+              <a:t>co</a:t>
             </a:r>
             <a:endParaRPr lang="en-US" sz="1400" dirty="0"/>
           </a:p>
@@ -22410,7 +22634,112 @@
       </p:sp>
       <p:sp>
         <p:nvSpPr>
-          <p:cNvPr id="36" name="Shape 34"/>
+          <p:cNvPr id="39" name="Text 37"/>
+          <p:cNvSpPr/>
+          <p:nvPr/>
+        </p:nvSpPr>
+        <p:spPr>
+          <a:xfrm>
+            <a:off x="7107936" y="3364992"/>
+            <a:ext cx="76200" cy="475488"/>
+          </a:xfrm>
+          <a:prstGeom prst="rect">
+            <a:avLst/>
+          </a:prstGeom>
+          <a:noFill/>
+          <a:ln/>
+        </p:spPr>
+        <p:txBody>
+          <a:bodyPr wrap="square" lIns="0" tIns="0" rIns="0" bIns="0" rtlCol="0" anchor="ctr"/>
+          <a:lstStyle/>
+          <a:p>
+            <a:pPr algn="ctr" indent="0" marL="0">
+              <a:buNone/>
+            </a:pPr>
+            <a:r>
+              <a:rPr lang="en-US" sz="1600" b="1" dirty="0">
+                <a:solidFill>
+                  <a:srgbClr val="0D9488"/>
+                </a:solidFill>
+                <a:latin typeface="Trebuchet MS" pitchFamily="34" charset="0"/>
+                <a:ea typeface="Trebuchet MS" pitchFamily="34" charset="-122"/>
+                <a:cs typeface="Trebuchet MS" pitchFamily="34" charset="-120"/>
+              </a:rPr>
+              <a:t>·</a:t>
+            </a:r>
+            <a:endParaRPr lang="en-US" sz="1600" dirty="0"/>
+          </a:p>
+        </p:txBody>
+      </p:sp>
+      <p:sp>
+        <p:nvSpPr>
+          <p:cNvPr id="40" name="Shape 38"/>
+          <p:cNvSpPr/>
+          <p:nvPr/>
+        </p:nvSpPr>
+        <p:spPr>
+          <a:xfrm>
+            <a:off x="7184136" y="3364992"/>
+            <a:ext cx="1225296" cy="475488"/>
+          </a:xfrm>
+          <a:prstGeom prst="rect">
+            <a:avLst>
+              <a:gd name="adj" fmla="val 9615"/>
+            </a:avLst>
+          </a:prstGeom>
+          <a:solidFill>
+            <a:srgbClr val="FFFFFF"/>
+          </a:solidFill>
+          <a:ln w="12700">
+            <a:solidFill>
+              <a:srgbClr val="0D9488"/>
+            </a:solidFill>
+            <a:prstDash val="solid"/>
+          </a:ln>
+        </p:spPr>
+      </p:sp>
+      <p:sp>
+        <p:nvSpPr>
+          <p:cNvPr id="41" name="Text 39"/>
+          <p:cNvSpPr/>
+          <p:nvPr/>
+        </p:nvSpPr>
+        <p:spPr>
+          <a:xfrm>
+            <a:off x="7184136" y="3364992"/>
+            <a:ext cx="1225296" cy="475488"/>
+          </a:xfrm>
+          <a:prstGeom prst="rect">
+            <a:avLst/>
+          </a:prstGeom>
+          <a:noFill/>
+          <a:ln/>
+        </p:spPr>
+        <p:txBody>
+          <a:bodyPr wrap="square" lIns="0" tIns="0" rIns="0" bIns="0" rtlCol="0" anchor="ctr"/>
+          <a:lstStyle/>
+          <a:p>
+            <a:pPr algn="ctr" indent="0" marL="0">
+              <a:buNone/>
+            </a:pPr>
+            <a:r>
+              <a:rPr lang="en-US" sz="1400" b="1" dirty="0">
+                <a:solidFill>
+                  <a:srgbClr val="0D9488"/>
+                </a:solidFill>
+                <a:latin typeface="Trebuchet MS" pitchFamily="34" charset="0"/>
+                <a:ea typeface="Trebuchet MS" pitchFamily="34" charset="-122"/>
+                <a:cs typeface="Trebuchet MS" pitchFamily="34" charset="-120"/>
+              </a:rPr>
+              <a:t>py</a:t>
+            </a:r>
+            <a:endParaRPr lang="en-US" sz="1400" dirty="0"/>
+          </a:p>
+        </p:txBody>
+      </p:sp>
+      <p:sp>
+        <p:nvSpPr>
+          <p:cNvPr id="42" name="Shape 40"/>
           <p:cNvSpPr/>
           <p:nvPr/>
         </p:nvSpPr>
@@ -22437,7 +22766,7 @@
       </p:sp>
       <p:sp>
         <p:nvSpPr>
-          <p:cNvPr id="37" name="Text 35"/>
+          <p:cNvPr id="43" name="Text 41"/>
           <p:cNvSpPr/>
           <p:nvPr/>
         </p:nvSpPr>
@@ -22476,7 +22805,7 @@
       </p:sp>
       <p:sp>
         <p:nvSpPr>
-          <p:cNvPr id="38" name="Shape 36"/>
+          <p:cNvPr id="44" name="Shape 42"/>
           <p:cNvSpPr/>
           <p:nvPr/>
         </p:nvSpPr>
@@ -22503,7 +22832,7 @@
       </p:sp>
       <p:sp>
         <p:nvSpPr>
-          <p:cNvPr id="39" name="Text 37"/>
+          <p:cNvPr id="45" name="Text 43"/>
           <p:cNvSpPr/>
           <p:nvPr/>
         </p:nvSpPr>
@@ -22826,7 +23155,7 @@
                 <a:ea typeface="Calibri" pitchFamily="34" charset="-122"/>
                 <a:cs typeface="Calibri" pitchFamily="34" charset="-120"/>
               </a:rPr>
-              <a:t>Word Labs  •  wordlabs.app  •  Root: 'kaleido' = beautiful, shifting coloured forms</a:t>
+              <a:t>Word Labs  •  wordlabs.app  •  Root: 'kaleido' = beautiful, varied, shifting forms</a:t>
             </a:r>
             <a:endParaRPr lang="en-US" sz="800" dirty="0"/>
           </a:p>
@@ -22965,7 +23294,7 @@
                 <a:ea typeface="Trebuchet MS" pitchFamily="34" charset="-122"/>
                 <a:cs typeface="Trebuchet MS" pitchFamily="34" charset="-120"/>
               </a:rPr>
-              <a:t>kaleidoscope</a:t>
+              <a:t>kaleidoscopy</a:t>
             </a:r>
             <a:endParaRPr lang="en-US" sz="2800" dirty="0"/>
           </a:p>
@@ -23045,7 +23374,7 @@
         </p:nvSpPr>
         <p:spPr>
           <a:xfrm>
-            <a:off x="2938272" y="2258568"/>
+            <a:off x="2221992" y="2258568"/>
             <a:ext cx="1828800" cy="292608"/>
           </a:xfrm>
           <a:prstGeom prst="rect">
@@ -23079,7 +23408,7 @@
         </p:nvSpPr>
         <p:spPr>
           <a:xfrm>
-            <a:off x="2938272" y="2258568"/>
+            <a:off x="2221992" y="2258568"/>
             <a:ext cx="1828800" cy="292608"/>
           </a:xfrm>
           <a:prstGeom prst="rect">
@@ -23118,7 +23447,7 @@
         </p:nvSpPr>
         <p:spPr>
           <a:xfrm>
-            <a:off x="2938272" y="2569464"/>
+            <a:off x="2221992" y="2569464"/>
             <a:ext cx="1828800" cy="201168"/>
           </a:xfrm>
           <a:prstGeom prst="rect">
@@ -23143,7 +23472,7 @@
                 <a:ea typeface="Calibri" pitchFamily="34" charset="-122"/>
                 <a:cs typeface="Calibri" pitchFamily="34" charset="-120"/>
               </a:rPr>
-              <a:t>beautiful shifting form</a:t>
+              <a:t>beautiful, varied forms</a:t>
             </a:r>
             <a:endParaRPr lang="en-US" sz="850" dirty="0"/>
           </a:p>
@@ -23157,7 +23486,7 @@
         </p:nvSpPr>
         <p:spPr>
           <a:xfrm>
-            <a:off x="5803392" y="2258568"/>
+            <a:off x="4370832" y="2258568"/>
             <a:ext cx="1828800" cy="292608"/>
           </a:xfrm>
           <a:prstGeom prst="rect">
@@ -23191,7 +23520,7 @@
         </p:nvSpPr>
         <p:spPr>
           <a:xfrm>
-            <a:off x="5803392" y="2258568"/>
+            <a:off x="4370832" y="2258568"/>
             <a:ext cx="1828800" cy="292608"/>
           </a:xfrm>
           <a:prstGeom prst="rect">
@@ -23216,7 +23545,7 @@
                 <a:ea typeface="Trebuchet MS" pitchFamily="34" charset="-122"/>
                 <a:cs typeface="Trebuchet MS" pitchFamily="34" charset="-120"/>
               </a:rPr>
-              <a:t>scope</a:t>
+              <a:t>scop</a:t>
             </a:r>
             <a:endParaRPr lang="en-US" sz="1300" dirty="0"/>
           </a:p>
@@ -23230,7 +23559,7 @@
         </p:nvSpPr>
         <p:spPr>
           <a:xfrm>
-            <a:off x="5803392" y="2569464"/>
+            <a:off x="4370832" y="2569464"/>
             <a:ext cx="1828800" cy="201168"/>
           </a:xfrm>
           <a:prstGeom prst="rect">
@@ -23255,7 +23584,7 @@
                 <a:ea typeface="Calibri" pitchFamily="34" charset="-122"/>
                 <a:cs typeface="Calibri" pitchFamily="34" charset="-120"/>
               </a:rPr>
-              <a:t>instrument for looking/viewing</a:t>
+              <a:t>viewing/observing</a:t>
             </a:r>
             <a:endParaRPr lang="en-US" sz="850" dirty="0"/>
           </a:p>
@@ -23264,6 +23593,118 @@
       <p:sp>
         <p:nvSpPr>
           <p:cNvPr id="22" name="Shape 20"/>
+          <p:cNvSpPr/>
+          <p:nvPr/>
+        </p:nvSpPr>
+        <p:spPr>
+          <a:xfrm>
+            <a:off x="6519672" y="2258568"/>
+            <a:ext cx="1828800" cy="292608"/>
+          </a:xfrm>
+          <a:prstGeom prst="rect">
+            <a:avLst>
+              <a:gd name="adj" fmla="val 25000"/>
+            </a:avLst>
+          </a:prstGeom>
+          <a:solidFill>
+            <a:srgbClr val="FCE7F3"/>
+          </a:solidFill>
+          <a:ln w="19050">
+            <a:solidFill>
+              <a:srgbClr val="DB2777"/>
+            </a:solidFill>
+            <a:prstDash val="solid"/>
+          </a:ln>
+          <a:effectLst>
+            <a:outerShdw sx="100000" sy="100000" kx="0" ky="0" algn="bl" rotWithShape="0" blurRad="101600" dist="38100" dir="8100000">
+              <a:srgbClr val="000000">
+                <a:alpha val="12000"/>
+              </a:srgbClr>
+            </a:outerShdw>
+          </a:effectLst>
+        </p:spPr>
+      </p:sp>
+      <p:sp>
+        <p:nvSpPr>
+          <p:cNvPr id="23" name="Text 21"/>
+          <p:cNvSpPr/>
+          <p:nvPr/>
+        </p:nvSpPr>
+        <p:spPr>
+          <a:xfrm>
+            <a:off x="6519672" y="2258568"/>
+            <a:ext cx="1828800" cy="292608"/>
+          </a:xfrm>
+          <a:prstGeom prst="rect">
+            <a:avLst/>
+          </a:prstGeom>
+          <a:noFill/>
+          <a:ln/>
+        </p:spPr>
+        <p:txBody>
+          <a:bodyPr wrap="square" lIns="0" tIns="0" rIns="0" bIns="0" rtlCol="0" anchor="ctr"/>
+          <a:lstStyle/>
+          <a:p>
+            <a:pPr algn="ctr" indent="0" marL="0">
+              <a:buNone/>
+            </a:pPr>
+            <a:r>
+              <a:rPr lang="en-US" sz="1300" b="1" dirty="0">
+                <a:solidFill>
+                  <a:srgbClr val="9D174D"/>
+                </a:solidFill>
+                <a:latin typeface="Trebuchet MS" pitchFamily="34" charset="0"/>
+                <a:ea typeface="Trebuchet MS" pitchFamily="34" charset="-122"/>
+                <a:cs typeface="Trebuchet MS" pitchFamily="34" charset="-120"/>
+              </a:rPr>
+              <a:t>y</a:t>
+            </a:r>
+            <a:endParaRPr lang="en-US" sz="1300" dirty="0"/>
+          </a:p>
+        </p:txBody>
+      </p:sp>
+      <p:sp>
+        <p:nvSpPr>
+          <p:cNvPr id="24" name="Text 22"/>
+          <p:cNvSpPr/>
+          <p:nvPr/>
+        </p:nvSpPr>
+        <p:spPr>
+          <a:xfrm>
+            <a:off x="6519672" y="2569464"/>
+            <a:ext cx="1828800" cy="201168"/>
+          </a:xfrm>
+          <a:prstGeom prst="rect">
+            <a:avLst/>
+          </a:prstGeom>
+          <a:noFill/>
+          <a:ln/>
+        </p:spPr>
+        <p:txBody>
+          <a:bodyPr wrap="square" lIns="0" tIns="0" rIns="0" bIns="0" rtlCol="0" anchor="t"/>
+          <a:lstStyle/>
+          <a:p>
+            <a:pPr algn="ctr" indent="0" marL="0">
+              <a:buNone/>
+            </a:pPr>
+            <a:r>
+              <a:rPr lang="en-US" sz="850" dirty="0">
+                <a:solidFill>
+                  <a:srgbClr val="475569"/>
+                </a:solidFill>
+                <a:latin typeface="Calibri" pitchFamily="34" charset="0"/>
+                <a:ea typeface="Calibri" pitchFamily="34" charset="-122"/>
+                <a:cs typeface="Calibri" pitchFamily="34" charset="-120"/>
+              </a:rPr>
+              <a:t>state of; practice of</a:t>
+            </a:r>
+            <a:endParaRPr lang="en-US" sz="850" dirty="0"/>
+          </a:p>
+        </p:txBody>
+      </p:sp>
+      <p:sp>
+        <p:nvSpPr>
+          <p:cNvPr id="25" name="Shape 23"/>
           <p:cNvSpPr/>
           <p:nvPr/>
         </p:nvSpPr>
@@ -23290,7 +23731,7 @@
       </p:sp>
       <p:sp>
         <p:nvSpPr>
-          <p:cNvPr id="23" name="Text 21"/>
+          <p:cNvPr id="26" name="Text 24"/>
           <p:cNvSpPr/>
           <p:nvPr/>
         </p:nvSpPr>
@@ -23329,7 +23770,7 @@
       </p:sp>
       <p:sp>
         <p:nvSpPr>
-          <p:cNvPr id="24" name="Shape 22"/>
+          <p:cNvPr id="27" name="Shape 25"/>
           <p:cNvSpPr/>
           <p:nvPr/>
         </p:nvSpPr>
@@ -23356,14 +23797,14 @@
       </p:sp>
       <p:sp>
         <p:nvSpPr>
-          <p:cNvPr id="25" name="Shape 23"/>
-          <p:cNvSpPr/>
-          <p:nvPr/>
-        </p:nvSpPr>
-        <p:spPr>
-          <a:xfrm>
-            <a:off x="1975104" y="3364992"/>
-            <a:ext cx="1554480" cy="475488"/>
+          <p:cNvPr id="28" name="Shape 26"/>
+          <p:cNvSpPr/>
+          <p:nvPr/>
+        </p:nvSpPr>
+        <p:spPr>
+          <a:xfrm>
+            <a:off x="1978152" y="3364992"/>
+            <a:ext cx="1225296" cy="475488"/>
           </a:xfrm>
           <a:prstGeom prst="rect">
             <a:avLst>
@@ -23383,14 +23824,14 @@
       </p:sp>
       <p:sp>
         <p:nvSpPr>
-          <p:cNvPr id="26" name="Text 24"/>
-          <p:cNvSpPr/>
-          <p:nvPr/>
-        </p:nvSpPr>
-        <p:spPr>
-          <a:xfrm>
-            <a:off x="1975104" y="3364992"/>
-            <a:ext cx="1554480" cy="475488"/>
+          <p:cNvPr id="29" name="Text 27"/>
+          <p:cNvSpPr/>
+          <p:nvPr/>
+        </p:nvSpPr>
+        <p:spPr>
+          <a:xfrm>
+            <a:off x="1978152" y="3364992"/>
+            <a:ext cx="1225296" cy="475488"/>
           </a:xfrm>
           <a:prstGeom prst="rect">
             <a:avLst/>
@@ -23422,14 +23863,14 @@
       </p:sp>
       <p:sp>
         <p:nvSpPr>
-          <p:cNvPr id="27" name="Text 25"/>
-          <p:cNvSpPr/>
-          <p:nvPr/>
-        </p:nvSpPr>
-        <p:spPr>
-          <a:xfrm>
-            <a:off x="3529584" y="3364992"/>
-            <a:ext cx="73152" cy="475488"/>
+          <p:cNvPr id="30" name="Text 28"/>
+          <p:cNvSpPr/>
+          <p:nvPr/>
+        </p:nvSpPr>
+        <p:spPr>
+          <a:xfrm>
+            <a:off x="3203448" y="3364992"/>
+            <a:ext cx="76200" cy="475488"/>
           </a:xfrm>
           <a:prstGeom prst="rect">
             <a:avLst/>
@@ -23461,14 +23902,14 @@
       </p:sp>
       <p:sp>
         <p:nvSpPr>
-          <p:cNvPr id="28" name="Shape 26"/>
-          <p:cNvSpPr/>
-          <p:nvPr/>
-        </p:nvSpPr>
-        <p:spPr>
-          <a:xfrm>
-            <a:off x="3602736" y="3364992"/>
-            <a:ext cx="1554480" cy="475488"/>
+          <p:cNvPr id="31" name="Shape 29"/>
+          <p:cNvSpPr/>
+          <p:nvPr/>
+        </p:nvSpPr>
+        <p:spPr>
+          <a:xfrm>
+            <a:off x="3279648" y="3364992"/>
+            <a:ext cx="1225296" cy="475488"/>
           </a:xfrm>
           <a:prstGeom prst="rect">
             <a:avLst>
@@ -23488,14 +23929,14 @@
       </p:sp>
       <p:sp>
         <p:nvSpPr>
-          <p:cNvPr id="29" name="Text 27"/>
-          <p:cNvSpPr/>
-          <p:nvPr/>
-        </p:nvSpPr>
-        <p:spPr>
-          <a:xfrm>
-            <a:off x="3602736" y="3364992"/>
-            <a:ext cx="1554480" cy="475488"/>
+          <p:cNvPr id="32" name="Text 30"/>
+          <p:cNvSpPr/>
+          <p:nvPr/>
+        </p:nvSpPr>
+        <p:spPr>
+          <a:xfrm>
+            <a:off x="3279648" y="3364992"/>
+            <a:ext cx="1225296" cy="475488"/>
           </a:xfrm>
           <a:prstGeom prst="rect">
             <a:avLst/>
@@ -23527,14 +23968,14 @@
       </p:sp>
       <p:sp>
         <p:nvSpPr>
-          <p:cNvPr id="30" name="Text 28"/>
-          <p:cNvSpPr/>
-          <p:nvPr/>
-        </p:nvSpPr>
-        <p:spPr>
-          <a:xfrm>
-            <a:off x="5157216" y="3364992"/>
-            <a:ext cx="73152" cy="475488"/>
+          <p:cNvPr id="33" name="Text 31"/>
+          <p:cNvSpPr/>
+          <p:nvPr/>
+        </p:nvSpPr>
+        <p:spPr>
+          <a:xfrm>
+            <a:off x="4504944" y="3364992"/>
+            <a:ext cx="76200" cy="475488"/>
           </a:xfrm>
           <a:prstGeom prst="rect">
             <a:avLst/>
@@ -23566,14 +24007,14 @@
       </p:sp>
       <p:sp>
         <p:nvSpPr>
-          <p:cNvPr id="31" name="Shape 29"/>
-          <p:cNvSpPr/>
-          <p:nvPr/>
-        </p:nvSpPr>
-        <p:spPr>
-          <a:xfrm>
-            <a:off x="5230368" y="3364992"/>
-            <a:ext cx="1554480" cy="475488"/>
+          <p:cNvPr id="34" name="Shape 32"/>
+          <p:cNvSpPr/>
+          <p:nvPr/>
+        </p:nvSpPr>
+        <p:spPr>
+          <a:xfrm>
+            <a:off x="4581144" y="3364992"/>
+            <a:ext cx="1225296" cy="475488"/>
           </a:xfrm>
           <a:prstGeom prst="rect">
             <a:avLst>
@@ -23593,14 +24034,14 @@
       </p:sp>
       <p:sp>
         <p:nvSpPr>
-          <p:cNvPr id="32" name="Text 30"/>
-          <p:cNvSpPr/>
-          <p:nvPr/>
-        </p:nvSpPr>
-        <p:spPr>
-          <a:xfrm>
-            <a:off x="5230368" y="3364992"/>
-            <a:ext cx="1554480" cy="475488"/>
+          <p:cNvPr id="35" name="Text 33"/>
+          <p:cNvSpPr/>
+          <p:nvPr/>
+        </p:nvSpPr>
+        <p:spPr>
+          <a:xfrm>
+            <a:off x="4581144" y="3364992"/>
+            <a:ext cx="1225296" cy="475488"/>
           </a:xfrm>
           <a:prstGeom prst="rect">
             <a:avLst/>
@@ -23624,7 +24065,7 @@
                 <a:ea typeface="Trebuchet MS" pitchFamily="34" charset="-122"/>
                 <a:cs typeface="Trebuchet MS" pitchFamily="34" charset="-120"/>
               </a:rPr>
-              <a:t>do</a:t>
+              <a:t>dos</a:t>
             </a:r>
             <a:endParaRPr lang="en-US" sz="1400" dirty="0"/>
           </a:p>
@@ -23632,14 +24073,14 @@
       </p:sp>
       <p:sp>
         <p:nvSpPr>
-          <p:cNvPr id="33" name="Text 31"/>
-          <p:cNvSpPr/>
-          <p:nvPr/>
-        </p:nvSpPr>
-        <p:spPr>
-          <a:xfrm>
-            <a:off x="6784848" y="3364992"/>
-            <a:ext cx="73152" cy="475488"/>
+          <p:cNvPr id="36" name="Text 34"/>
+          <p:cNvSpPr/>
+          <p:nvPr/>
+        </p:nvSpPr>
+        <p:spPr>
+          <a:xfrm>
+            <a:off x="5806440" y="3364992"/>
+            <a:ext cx="76200" cy="475488"/>
           </a:xfrm>
           <a:prstGeom prst="rect">
             <a:avLst/>
@@ -23671,14 +24112,14 @@
       </p:sp>
       <p:sp>
         <p:nvSpPr>
-          <p:cNvPr id="34" name="Shape 32"/>
-          <p:cNvSpPr/>
-          <p:nvPr/>
-        </p:nvSpPr>
-        <p:spPr>
-          <a:xfrm>
-            <a:off x="6858000" y="3364992"/>
-            <a:ext cx="1554480" cy="475488"/>
+          <p:cNvPr id="37" name="Shape 35"/>
+          <p:cNvSpPr/>
+          <p:nvPr/>
+        </p:nvSpPr>
+        <p:spPr>
+          <a:xfrm>
+            <a:off x="5882640" y="3364992"/>
+            <a:ext cx="1225296" cy="475488"/>
           </a:xfrm>
           <a:prstGeom prst="rect">
             <a:avLst>
@@ -23698,14 +24139,14 @@
       </p:sp>
       <p:sp>
         <p:nvSpPr>
-          <p:cNvPr id="35" name="Text 33"/>
-          <p:cNvSpPr/>
-          <p:nvPr/>
-        </p:nvSpPr>
-        <p:spPr>
-          <a:xfrm>
-            <a:off x="6858000" y="3364992"/>
-            <a:ext cx="1554480" cy="475488"/>
+          <p:cNvPr id="38" name="Text 36"/>
+          <p:cNvSpPr/>
+          <p:nvPr/>
+        </p:nvSpPr>
+        <p:spPr>
+          <a:xfrm>
+            <a:off x="5882640" y="3364992"/>
+            <a:ext cx="1225296" cy="475488"/>
           </a:xfrm>
           <a:prstGeom prst="rect">
             <a:avLst/>
@@ -23729,7 +24170,7 @@
                 <a:ea typeface="Trebuchet MS" pitchFamily="34" charset="-122"/>
                 <a:cs typeface="Trebuchet MS" pitchFamily="34" charset="-120"/>
               </a:rPr>
-              <a:t>scope</a:t>
+              <a:t>co</a:t>
             </a:r>
             <a:endParaRPr lang="en-US" sz="1400" dirty="0"/>
           </a:p>
@@ -23737,7 +24178,112 @@
       </p:sp>
       <p:sp>
         <p:nvSpPr>
-          <p:cNvPr id="36" name="Shape 34"/>
+          <p:cNvPr id="39" name="Text 37"/>
+          <p:cNvSpPr/>
+          <p:nvPr/>
+        </p:nvSpPr>
+        <p:spPr>
+          <a:xfrm>
+            <a:off x="7107936" y="3364992"/>
+            <a:ext cx="76200" cy="475488"/>
+          </a:xfrm>
+          <a:prstGeom prst="rect">
+            <a:avLst/>
+          </a:prstGeom>
+          <a:noFill/>
+          <a:ln/>
+        </p:spPr>
+        <p:txBody>
+          <a:bodyPr wrap="square" lIns="0" tIns="0" rIns="0" bIns="0" rtlCol="0" anchor="ctr"/>
+          <a:lstStyle/>
+          <a:p>
+            <a:pPr algn="ctr" indent="0" marL="0">
+              <a:buNone/>
+            </a:pPr>
+            <a:r>
+              <a:rPr lang="en-US" sz="1600" b="1" dirty="0">
+                <a:solidFill>
+                  <a:srgbClr val="0D9488"/>
+                </a:solidFill>
+                <a:latin typeface="Trebuchet MS" pitchFamily="34" charset="0"/>
+                <a:ea typeface="Trebuchet MS" pitchFamily="34" charset="-122"/>
+                <a:cs typeface="Trebuchet MS" pitchFamily="34" charset="-120"/>
+              </a:rPr>
+              <a:t>·</a:t>
+            </a:r>
+            <a:endParaRPr lang="en-US" sz="1600" dirty="0"/>
+          </a:p>
+        </p:txBody>
+      </p:sp>
+      <p:sp>
+        <p:nvSpPr>
+          <p:cNvPr id="40" name="Shape 38"/>
+          <p:cNvSpPr/>
+          <p:nvPr/>
+        </p:nvSpPr>
+        <p:spPr>
+          <a:xfrm>
+            <a:off x="7184136" y="3364992"/>
+            <a:ext cx="1225296" cy="475488"/>
+          </a:xfrm>
+          <a:prstGeom prst="rect">
+            <a:avLst>
+              <a:gd name="adj" fmla="val 9615"/>
+            </a:avLst>
+          </a:prstGeom>
+          <a:solidFill>
+            <a:srgbClr val="FFFFFF"/>
+          </a:solidFill>
+          <a:ln w="12700">
+            <a:solidFill>
+              <a:srgbClr val="0D9488"/>
+            </a:solidFill>
+            <a:prstDash val="solid"/>
+          </a:ln>
+        </p:spPr>
+      </p:sp>
+      <p:sp>
+        <p:nvSpPr>
+          <p:cNvPr id="41" name="Text 39"/>
+          <p:cNvSpPr/>
+          <p:nvPr/>
+        </p:nvSpPr>
+        <p:spPr>
+          <a:xfrm>
+            <a:off x="7184136" y="3364992"/>
+            <a:ext cx="1225296" cy="475488"/>
+          </a:xfrm>
+          <a:prstGeom prst="rect">
+            <a:avLst/>
+          </a:prstGeom>
+          <a:noFill/>
+          <a:ln/>
+        </p:spPr>
+        <p:txBody>
+          <a:bodyPr wrap="square" lIns="0" tIns="0" rIns="0" bIns="0" rtlCol="0" anchor="ctr"/>
+          <a:lstStyle/>
+          <a:p>
+            <a:pPr algn="ctr" indent="0" marL="0">
+              <a:buNone/>
+            </a:pPr>
+            <a:r>
+              <a:rPr lang="en-US" sz="1400" b="1" dirty="0">
+                <a:solidFill>
+                  <a:srgbClr val="0D9488"/>
+                </a:solidFill>
+                <a:latin typeface="Trebuchet MS" pitchFamily="34" charset="0"/>
+                <a:ea typeface="Trebuchet MS" pitchFamily="34" charset="-122"/>
+                <a:cs typeface="Trebuchet MS" pitchFamily="34" charset="-120"/>
+              </a:rPr>
+              <a:t>py</a:t>
+            </a:r>
+            <a:endParaRPr lang="en-US" sz="1400" dirty="0"/>
+          </a:p>
+        </p:txBody>
+      </p:sp>
+      <p:sp>
+        <p:nvSpPr>
+          <p:cNvPr id="42" name="Shape 40"/>
           <p:cNvSpPr/>
           <p:nvPr/>
         </p:nvSpPr>
@@ -23764,7 +24310,7 @@
       </p:sp>
       <p:sp>
         <p:nvSpPr>
-          <p:cNvPr id="37" name="Text 35"/>
+          <p:cNvPr id="43" name="Text 41"/>
           <p:cNvSpPr/>
           <p:nvPr/>
         </p:nvSpPr>
@@ -23803,7 +24349,7 @@
       </p:sp>
       <p:sp>
         <p:nvSpPr>
-          <p:cNvPr id="38" name="Shape 36"/>
+          <p:cNvPr id="44" name="Shape 42"/>
           <p:cNvSpPr/>
           <p:nvPr/>
         </p:nvSpPr>
@@ -23830,14 +24376,14 @@
       </p:sp>
       <p:sp>
         <p:nvSpPr>
-          <p:cNvPr id="39" name="Shape 37"/>
-          <p:cNvSpPr/>
-          <p:nvPr/>
-        </p:nvSpPr>
-        <p:spPr>
-          <a:xfrm>
-            <a:off x="1951330" y="4169664"/>
-            <a:ext cx="676656" cy="384048"/>
+          <p:cNvPr id="45" name="Shape 43"/>
+          <p:cNvSpPr/>
+          <p:nvPr/>
+        </p:nvSpPr>
+        <p:spPr>
+          <a:xfrm>
+            <a:off x="1952244" y="4169664"/>
+            <a:ext cx="543652" cy="384048"/>
           </a:xfrm>
           <a:prstGeom prst="rect">
             <a:avLst>
@@ -23857,14 +24403,14 @@
       </p:sp>
       <p:sp>
         <p:nvSpPr>
-          <p:cNvPr id="40" name="Text 38"/>
-          <p:cNvSpPr/>
-          <p:nvPr/>
-        </p:nvSpPr>
-        <p:spPr>
-          <a:xfrm>
-            <a:off x="1951330" y="4169664"/>
-            <a:ext cx="676656" cy="384048"/>
+          <p:cNvPr id="46" name="Text 44"/>
+          <p:cNvSpPr/>
+          <p:nvPr/>
+        </p:nvSpPr>
+        <p:spPr>
+          <a:xfrm>
+            <a:off x="1952244" y="4169664"/>
+            <a:ext cx="543652" cy="384048"/>
           </a:xfrm>
           <a:prstGeom prst="rect">
             <a:avLst/>
@@ -23896,14 +24442,14 @@
       </p:sp>
       <p:sp>
         <p:nvSpPr>
-          <p:cNvPr id="41" name="Shape 39"/>
-          <p:cNvSpPr/>
-          <p:nvPr/>
-        </p:nvSpPr>
-        <p:spPr>
-          <a:xfrm>
-            <a:off x="2677363" y="4169664"/>
-            <a:ext cx="676656" cy="384048"/>
+          <p:cNvPr id="47" name="Shape 45"/>
+          <p:cNvSpPr/>
+          <p:nvPr/>
+        </p:nvSpPr>
+        <p:spPr>
+          <a:xfrm>
+            <a:off x="2546188" y="4169664"/>
+            <a:ext cx="543652" cy="384048"/>
           </a:xfrm>
           <a:prstGeom prst="rect">
             <a:avLst>
@@ -23923,14 +24469,14 @@
       </p:sp>
       <p:sp>
         <p:nvSpPr>
-          <p:cNvPr id="42" name="Text 40"/>
-          <p:cNvSpPr/>
-          <p:nvPr/>
-        </p:nvSpPr>
-        <p:spPr>
-          <a:xfrm>
-            <a:off x="2677363" y="4169664"/>
-            <a:ext cx="676656" cy="384048"/>
+          <p:cNvPr id="48" name="Text 46"/>
+          <p:cNvSpPr/>
+          <p:nvPr/>
+        </p:nvSpPr>
+        <p:spPr>
+          <a:xfrm>
+            <a:off x="2546188" y="4169664"/>
+            <a:ext cx="543652" cy="384048"/>
           </a:xfrm>
           <a:prstGeom prst="rect">
             <a:avLst/>
@@ -23962,14 +24508,14 @@
       </p:sp>
       <p:sp>
         <p:nvSpPr>
-          <p:cNvPr id="43" name="Shape 41"/>
-          <p:cNvSpPr/>
-          <p:nvPr/>
-        </p:nvSpPr>
-        <p:spPr>
-          <a:xfrm>
-            <a:off x="3403397" y="4169664"/>
-            <a:ext cx="676656" cy="384048"/>
+          <p:cNvPr id="49" name="Shape 47"/>
+          <p:cNvSpPr/>
+          <p:nvPr/>
+        </p:nvSpPr>
+        <p:spPr>
+          <a:xfrm>
+            <a:off x="3140133" y="4169664"/>
+            <a:ext cx="543652" cy="384048"/>
           </a:xfrm>
           <a:prstGeom prst="rect">
             <a:avLst>
@@ -23989,14 +24535,14 @@
       </p:sp>
       <p:sp>
         <p:nvSpPr>
-          <p:cNvPr id="44" name="Text 42"/>
-          <p:cNvSpPr/>
-          <p:nvPr/>
-        </p:nvSpPr>
-        <p:spPr>
-          <a:xfrm>
-            <a:off x="3403397" y="4169664"/>
-            <a:ext cx="676656" cy="384048"/>
+          <p:cNvPr id="50" name="Text 48"/>
+          <p:cNvSpPr/>
+          <p:nvPr/>
+        </p:nvSpPr>
+        <p:spPr>
+          <a:xfrm>
+            <a:off x="3140133" y="4169664"/>
+            <a:ext cx="543652" cy="384048"/>
           </a:xfrm>
           <a:prstGeom prst="rect">
             <a:avLst/>
@@ -24028,14 +24574,14 @@
       </p:sp>
       <p:sp>
         <p:nvSpPr>
-          <p:cNvPr id="45" name="Shape 43"/>
-          <p:cNvSpPr/>
-          <p:nvPr/>
-        </p:nvSpPr>
-        <p:spPr>
-          <a:xfrm>
-            <a:off x="4129430" y="4169664"/>
-            <a:ext cx="676656" cy="384048"/>
+          <p:cNvPr id="51" name="Shape 49"/>
+          <p:cNvSpPr/>
+          <p:nvPr/>
+        </p:nvSpPr>
+        <p:spPr>
+          <a:xfrm>
+            <a:off x="3734077" y="4169664"/>
+            <a:ext cx="543652" cy="384048"/>
           </a:xfrm>
           <a:prstGeom prst="rect">
             <a:avLst>
@@ -24055,14 +24601,14 @@
       </p:sp>
       <p:sp>
         <p:nvSpPr>
-          <p:cNvPr id="46" name="Text 44"/>
-          <p:cNvSpPr/>
-          <p:nvPr/>
-        </p:nvSpPr>
-        <p:spPr>
-          <a:xfrm>
-            <a:off x="4129430" y="4169664"/>
-            <a:ext cx="676656" cy="384048"/>
+          <p:cNvPr id="52" name="Text 50"/>
+          <p:cNvSpPr/>
+          <p:nvPr/>
+        </p:nvSpPr>
+        <p:spPr>
+          <a:xfrm>
+            <a:off x="3734077" y="4169664"/>
+            <a:ext cx="543652" cy="384048"/>
           </a:xfrm>
           <a:prstGeom prst="rect">
             <a:avLst/>
@@ -24094,14 +24640,14 @@
       </p:sp>
       <p:sp>
         <p:nvSpPr>
-          <p:cNvPr id="47" name="Shape 45"/>
-          <p:cNvSpPr/>
-          <p:nvPr/>
-        </p:nvSpPr>
-        <p:spPr>
-          <a:xfrm>
-            <a:off x="4855464" y="4169664"/>
-            <a:ext cx="676656" cy="384048"/>
+          <p:cNvPr id="53" name="Shape 51"/>
+          <p:cNvSpPr/>
+          <p:nvPr/>
+        </p:nvSpPr>
+        <p:spPr>
+          <a:xfrm>
+            <a:off x="4328021" y="4169664"/>
+            <a:ext cx="543652" cy="384048"/>
           </a:xfrm>
           <a:prstGeom prst="rect">
             <a:avLst>
@@ -24121,14 +24667,14 @@
       </p:sp>
       <p:sp>
         <p:nvSpPr>
-          <p:cNvPr id="48" name="Text 46"/>
-          <p:cNvSpPr/>
-          <p:nvPr/>
-        </p:nvSpPr>
-        <p:spPr>
-          <a:xfrm>
-            <a:off x="4855464" y="4169664"/>
-            <a:ext cx="676656" cy="384048"/>
+          <p:cNvPr id="54" name="Text 52"/>
+          <p:cNvSpPr/>
+          <p:nvPr/>
+        </p:nvSpPr>
+        <p:spPr>
+          <a:xfrm>
+            <a:off x="4328021" y="4169664"/>
+            <a:ext cx="543652" cy="384048"/>
           </a:xfrm>
           <a:prstGeom prst="rect">
             <a:avLst/>
@@ -24160,14 +24706,14 @@
       </p:sp>
       <p:sp>
         <p:nvSpPr>
-          <p:cNvPr id="49" name="Shape 47"/>
-          <p:cNvSpPr/>
-          <p:nvPr/>
-        </p:nvSpPr>
-        <p:spPr>
-          <a:xfrm>
-            <a:off x="5581498" y="4169664"/>
-            <a:ext cx="676656" cy="384048"/>
+          <p:cNvPr id="55" name="Shape 53"/>
+          <p:cNvSpPr/>
+          <p:nvPr/>
+        </p:nvSpPr>
+        <p:spPr>
+          <a:xfrm>
+            <a:off x="4921966" y="4169664"/>
+            <a:ext cx="543652" cy="384048"/>
           </a:xfrm>
           <a:prstGeom prst="rect">
             <a:avLst>
@@ -24187,14 +24733,14 @@
       </p:sp>
       <p:sp>
         <p:nvSpPr>
-          <p:cNvPr id="50" name="Text 48"/>
-          <p:cNvSpPr/>
-          <p:nvPr/>
-        </p:nvSpPr>
-        <p:spPr>
-          <a:xfrm>
-            <a:off x="5581498" y="4169664"/>
-            <a:ext cx="676656" cy="384048"/>
+          <p:cNvPr id="56" name="Text 54"/>
+          <p:cNvSpPr/>
+          <p:nvPr/>
+        </p:nvSpPr>
+        <p:spPr>
+          <a:xfrm>
+            <a:off x="4921966" y="4169664"/>
+            <a:ext cx="543652" cy="384048"/>
           </a:xfrm>
           <a:prstGeom prst="rect">
             <a:avLst/>
@@ -24226,14 +24772,14 @@
       </p:sp>
       <p:sp>
         <p:nvSpPr>
-          <p:cNvPr id="51" name="Shape 49"/>
-          <p:cNvSpPr/>
-          <p:nvPr/>
-        </p:nvSpPr>
-        <p:spPr>
-          <a:xfrm>
-            <a:off x="6307531" y="4169664"/>
-            <a:ext cx="676656" cy="384048"/>
+          <p:cNvPr id="57" name="Shape 55"/>
+          <p:cNvSpPr/>
+          <p:nvPr/>
+        </p:nvSpPr>
+        <p:spPr>
+          <a:xfrm>
+            <a:off x="5515910" y="4169664"/>
+            <a:ext cx="543652" cy="384048"/>
           </a:xfrm>
           <a:prstGeom prst="rect">
             <a:avLst>
@@ -24253,14 +24799,14 @@
       </p:sp>
       <p:sp>
         <p:nvSpPr>
-          <p:cNvPr id="52" name="Text 50"/>
-          <p:cNvSpPr/>
-          <p:nvPr/>
-        </p:nvSpPr>
-        <p:spPr>
-          <a:xfrm>
-            <a:off x="6307531" y="4169664"/>
-            <a:ext cx="676656" cy="384048"/>
+          <p:cNvPr id="58" name="Text 56"/>
+          <p:cNvSpPr/>
+          <p:nvPr/>
+        </p:nvSpPr>
+        <p:spPr>
+          <a:xfrm>
+            <a:off x="5515910" y="4169664"/>
+            <a:ext cx="543652" cy="384048"/>
           </a:xfrm>
           <a:prstGeom prst="rect">
             <a:avLst/>
@@ -24284,7 +24830,7 @@
                 <a:ea typeface="Trebuchet MS" pitchFamily="34" charset="-122"/>
                 <a:cs typeface="Trebuchet MS" pitchFamily="34" charset="-120"/>
               </a:rPr>
-              <a:t>sc</a:t>
+              <a:t>s</a:t>
             </a:r>
             <a:endParaRPr lang="en-US" sz="900" dirty="0"/>
           </a:p>
@@ -24292,14 +24838,80 @@
       </p:sp>
       <p:sp>
         <p:nvSpPr>
-          <p:cNvPr id="53" name="Text 51"/>
-          <p:cNvSpPr/>
-          <p:nvPr/>
-        </p:nvSpPr>
-        <p:spPr>
-          <a:xfrm>
-            <a:off x="6307531" y="4572000"/>
-            <a:ext cx="676656" cy="219456"/>
+          <p:cNvPr id="59" name="Shape 57"/>
+          <p:cNvSpPr/>
+          <p:nvPr/>
+        </p:nvSpPr>
+        <p:spPr>
+          <a:xfrm>
+            <a:off x="6109855" y="4169664"/>
+            <a:ext cx="543652" cy="384048"/>
+          </a:xfrm>
+          <a:prstGeom prst="rect">
+            <a:avLst>
+              <a:gd name="adj" fmla="val 9524"/>
+            </a:avLst>
+          </a:prstGeom>
+          <a:solidFill>
+            <a:srgbClr val="FFFFFF"/>
+          </a:solidFill>
+          <a:ln w="12700">
+            <a:solidFill>
+              <a:srgbClr val="DB2777"/>
+            </a:solidFill>
+            <a:prstDash val="solid"/>
+          </a:ln>
+        </p:spPr>
+      </p:sp>
+      <p:sp>
+        <p:nvSpPr>
+          <p:cNvPr id="60" name="Text 58"/>
+          <p:cNvSpPr/>
+          <p:nvPr/>
+        </p:nvSpPr>
+        <p:spPr>
+          <a:xfrm>
+            <a:off x="6109855" y="4169664"/>
+            <a:ext cx="543652" cy="384048"/>
+          </a:xfrm>
+          <a:prstGeom prst="rect">
+            <a:avLst/>
+          </a:prstGeom>
+          <a:noFill/>
+          <a:ln/>
+        </p:spPr>
+        <p:txBody>
+          <a:bodyPr wrap="square" lIns="0" tIns="0" rIns="0" bIns="0" rtlCol="0" anchor="ctr"/>
+          <a:lstStyle/>
+          <a:p>
+            <a:pPr algn="ctr" indent="0" marL="0">
+              <a:buNone/>
+            </a:pPr>
+            <a:r>
+              <a:rPr lang="en-US" sz="900" b="1" dirty="0">
+                <a:solidFill>
+                  <a:srgbClr val="9D174D"/>
+                </a:solidFill>
+                <a:latin typeface="Trebuchet MS" pitchFamily="34" charset="0"/>
+                <a:ea typeface="Trebuchet MS" pitchFamily="34" charset="-122"/>
+                <a:cs typeface="Trebuchet MS" pitchFamily="34" charset="-120"/>
+              </a:rPr>
+              <a:t>c</a:t>
+            </a:r>
+            <a:endParaRPr lang="en-US" sz="900" dirty="0"/>
+          </a:p>
+        </p:txBody>
+      </p:sp>
+      <p:sp>
+        <p:nvSpPr>
+          <p:cNvPr id="61" name="Text 59"/>
+          <p:cNvSpPr/>
+          <p:nvPr/>
+        </p:nvSpPr>
+        <p:spPr>
+          <a:xfrm>
+            <a:off x="6109855" y="4572000"/>
+            <a:ext cx="543652" cy="219456"/>
           </a:xfrm>
           <a:prstGeom prst="rect">
             <a:avLst/>
@@ -24323,7 +24935,7 @@
                 <a:ea typeface="Calibri" pitchFamily="34" charset="-122"/>
                 <a:cs typeface="Calibri" pitchFamily="34" charset="-120"/>
               </a:rPr>
-              <a:t>/sk/</a:t>
+              <a:t>/k/</a:t>
             </a:r>
             <a:endParaRPr lang="en-US" sz="750" dirty="0"/>
           </a:p>
@@ -24331,14 +24943,14 @@
       </p:sp>
       <p:sp>
         <p:nvSpPr>
-          <p:cNvPr id="54" name="Shape 52"/>
-          <p:cNvSpPr/>
-          <p:nvPr/>
-        </p:nvSpPr>
-        <p:spPr>
-          <a:xfrm>
-            <a:off x="7033565" y="4169664"/>
-            <a:ext cx="676656" cy="384048"/>
+          <p:cNvPr id="62" name="Shape 60"/>
+          <p:cNvSpPr/>
+          <p:nvPr/>
+        </p:nvSpPr>
+        <p:spPr>
+          <a:xfrm>
+            <a:off x="6703799" y="4169664"/>
+            <a:ext cx="543652" cy="384048"/>
           </a:xfrm>
           <a:prstGeom prst="rect">
             <a:avLst>
@@ -24358,14 +24970,14 @@
       </p:sp>
       <p:sp>
         <p:nvSpPr>
-          <p:cNvPr id="55" name="Text 53"/>
-          <p:cNvSpPr/>
-          <p:nvPr/>
-        </p:nvSpPr>
-        <p:spPr>
-          <a:xfrm>
-            <a:off x="7033565" y="4169664"/>
-            <a:ext cx="676656" cy="384048"/>
+          <p:cNvPr id="63" name="Text 61"/>
+          <p:cNvSpPr/>
+          <p:nvPr/>
+        </p:nvSpPr>
+        <p:spPr>
+          <a:xfrm>
+            <a:off x="6703799" y="4169664"/>
+            <a:ext cx="543652" cy="384048"/>
           </a:xfrm>
           <a:prstGeom prst="rect">
             <a:avLst/>
@@ -24397,14 +25009,14 @@
       </p:sp>
       <p:sp>
         <p:nvSpPr>
-          <p:cNvPr id="56" name="Shape 54"/>
-          <p:cNvSpPr/>
-          <p:nvPr/>
-        </p:nvSpPr>
-        <p:spPr>
-          <a:xfrm>
-            <a:off x="7759598" y="4169664"/>
-            <a:ext cx="676656" cy="384048"/>
+          <p:cNvPr id="64" name="Shape 62"/>
+          <p:cNvSpPr/>
+          <p:nvPr/>
+        </p:nvSpPr>
+        <p:spPr>
+          <a:xfrm>
+            <a:off x="7297743" y="4169664"/>
+            <a:ext cx="543652" cy="384048"/>
           </a:xfrm>
           <a:prstGeom prst="rect">
             <a:avLst>
@@ -24424,14 +25036,14 @@
       </p:sp>
       <p:sp>
         <p:nvSpPr>
-          <p:cNvPr id="57" name="Text 55"/>
-          <p:cNvSpPr/>
-          <p:nvPr/>
-        </p:nvSpPr>
-        <p:spPr>
-          <a:xfrm>
-            <a:off x="7759598" y="4169664"/>
-            <a:ext cx="676656" cy="384048"/>
+          <p:cNvPr id="65" name="Text 63"/>
+          <p:cNvSpPr/>
+          <p:nvPr/>
+        </p:nvSpPr>
+        <p:spPr>
+          <a:xfrm>
+            <a:off x="7297743" y="4169664"/>
+            <a:ext cx="543652" cy="384048"/>
           </a:xfrm>
           <a:prstGeom prst="rect">
             <a:avLst/>
@@ -24455,7 +25067,73 @@
                 <a:ea typeface="Trebuchet MS" pitchFamily="34" charset="-122"/>
                 <a:cs typeface="Trebuchet MS" pitchFamily="34" charset="-120"/>
               </a:rPr>
-              <a:t>pe</a:t>
+              <a:t>p</a:t>
+            </a:r>
+            <a:endParaRPr lang="en-US" sz="900" dirty="0"/>
+          </a:p>
+        </p:txBody>
+      </p:sp>
+      <p:sp>
+        <p:nvSpPr>
+          <p:cNvPr id="66" name="Shape 64"/>
+          <p:cNvSpPr/>
+          <p:nvPr/>
+        </p:nvSpPr>
+        <p:spPr>
+          <a:xfrm>
+            <a:off x="7891688" y="4169664"/>
+            <a:ext cx="543652" cy="384048"/>
+          </a:xfrm>
+          <a:prstGeom prst="rect">
+            <a:avLst>
+              <a:gd name="adj" fmla="val 9524"/>
+            </a:avLst>
+          </a:prstGeom>
+          <a:solidFill>
+            <a:srgbClr val="FFFFFF"/>
+          </a:solidFill>
+          <a:ln w="12700">
+            <a:solidFill>
+              <a:srgbClr val="DB2777"/>
+            </a:solidFill>
+            <a:prstDash val="solid"/>
+          </a:ln>
+        </p:spPr>
+      </p:sp>
+      <p:sp>
+        <p:nvSpPr>
+          <p:cNvPr id="67" name="Text 65"/>
+          <p:cNvSpPr/>
+          <p:nvPr/>
+        </p:nvSpPr>
+        <p:spPr>
+          <a:xfrm>
+            <a:off x="7891688" y="4169664"/>
+            <a:ext cx="543652" cy="384048"/>
+          </a:xfrm>
+          <a:prstGeom prst="rect">
+            <a:avLst/>
+          </a:prstGeom>
+          <a:noFill/>
+          <a:ln/>
+        </p:spPr>
+        <p:txBody>
+          <a:bodyPr wrap="square" lIns="0" tIns="0" rIns="0" bIns="0" rtlCol="0" anchor="ctr"/>
+          <a:lstStyle/>
+          <a:p>
+            <a:pPr algn="ctr" indent="0" marL="0">
+              <a:buNone/>
+            </a:pPr>
+            <a:r>
+              <a:rPr lang="en-US" sz="900" b="1" dirty="0">
+                <a:solidFill>
+                  <a:srgbClr val="9D174D"/>
+                </a:solidFill>
+                <a:latin typeface="Trebuchet MS" pitchFamily="34" charset="0"/>
+                <a:ea typeface="Trebuchet MS" pitchFamily="34" charset="-122"/>
+                <a:cs typeface="Trebuchet MS" pitchFamily="34" charset="-120"/>
+              </a:rPr>
+              <a:t>y</a:t>
             </a:r>
             <a:endParaRPr lang="en-US" sz="900" dirty="0"/>
           </a:p>
@@ -24747,7 +25425,7 @@
                 <a:ea typeface="Calibri" pitchFamily="34" charset="-122"/>
                 <a:cs typeface="Calibri" pitchFamily="34" charset="-120"/>
               </a:rPr>
-              <a:t>Word Labs  •  wordlabs.app  •  Root: 'kaleido' = beautiful, shifting coloured forms</a:t>
+              <a:t>Word Labs  •  wordlabs.app  •  Root: 'kaleido' = beautiful, varied, shifting forms</a:t>
             </a:r>
             <a:endParaRPr lang="en-US" sz="800" dirty="0"/>
           </a:p>
@@ -24886,7 +25564,7 @@
                 <a:ea typeface="Trebuchet MS" pitchFamily="34" charset="-122"/>
                 <a:cs typeface="Trebuchet MS" pitchFamily="34" charset="-120"/>
               </a:rPr>
-              <a:t>kaleidoscopic</a:t>
+              <a:t>kaleidoscopically</a:t>
             </a:r>
             <a:endParaRPr lang="en-US" sz="2800" dirty="0"/>
           </a:p>
@@ -25574,7 +26252,7 @@
                 <a:ea typeface="Calibri" pitchFamily="34" charset="-122"/>
                 <a:cs typeface="Calibri" pitchFamily="34" charset="-120"/>
               </a:rPr>
-              <a:t>Word Labs  •  wordlabs.app  •  Root: 'kaleido' = beautiful, shifting coloured forms</a:t>
+              <a:t>Word Labs  •  wordlabs.app  •  Root: 'kaleido' = beautiful, varied, shifting forms</a:t>
             </a:r>
             <a:endParaRPr lang="en-US" sz="800" dirty="0"/>
           </a:p>
@@ -25713,7 +26391,7 @@
                 <a:ea typeface="Trebuchet MS" pitchFamily="34" charset="-122"/>
                 <a:cs typeface="Trebuchet MS" pitchFamily="34" charset="-120"/>
               </a:rPr>
-              <a:t>kaleidoscopic</a:t>
+              <a:t>kaleidoscopically</a:t>
             </a:r>
             <a:endParaRPr lang="en-US" sz="2800" dirty="0"/>
           </a:p>
@@ -25793,8 +26471,8 @@
         </p:nvSpPr>
         <p:spPr>
           <a:xfrm>
-            <a:off x="2221992" y="2258568"/>
-            <a:ext cx="1828800" cy="292608"/>
+            <a:off x="1993392" y="2258568"/>
+            <a:ext cx="1243584" cy="292608"/>
           </a:xfrm>
           <a:prstGeom prst="rect">
             <a:avLst>
@@ -25827,8 +26505,8 @@
         </p:nvSpPr>
         <p:spPr>
           <a:xfrm>
-            <a:off x="2221992" y="2258568"/>
-            <a:ext cx="1828800" cy="292608"/>
+            <a:off x="1993392" y="2258568"/>
+            <a:ext cx="1243584" cy="292608"/>
           </a:xfrm>
           <a:prstGeom prst="rect">
             <a:avLst/>
@@ -25866,8 +26544,8 @@
         </p:nvSpPr>
         <p:spPr>
           <a:xfrm>
-            <a:off x="2221992" y="2569464"/>
-            <a:ext cx="1828800" cy="201168"/>
+            <a:off x="1993392" y="2569464"/>
+            <a:ext cx="1243584" cy="201168"/>
           </a:xfrm>
           <a:prstGeom prst="rect">
             <a:avLst/>
@@ -25891,7 +26569,7 @@
                 <a:ea typeface="Calibri" pitchFamily="34" charset="-122"/>
                 <a:cs typeface="Calibri" pitchFamily="34" charset="-120"/>
               </a:rPr>
-              <a:t>beautiful shifting form</a:t>
+              <a:t>beautiful, varied forms</a:t>
             </a:r>
             <a:endParaRPr lang="en-US" sz="850" dirty="0"/>
           </a:p>
@@ -25905,8 +26583,8 @@
         </p:nvSpPr>
         <p:spPr>
           <a:xfrm>
-            <a:off x="4370832" y="2258568"/>
-            <a:ext cx="1828800" cy="292608"/>
+            <a:off x="3328416" y="2258568"/>
+            <a:ext cx="1243584" cy="292608"/>
           </a:xfrm>
           <a:prstGeom prst="rect">
             <a:avLst>
@@ -25939,8 +26617,8 @@
         </p:nvSpPr>
         <p:spPr>
           <a:xfrm>
-            <a:off x="4370832" y="2258568"/>
-            <a:ext cx="1828800" cy="292608"/>
+            <a:off x="3328416" y="2258568"/>
+            <a:ext cx="1243584" cy="292608"/>
           </a:xfrm>
           <a:prstGeom prst="rect">
             <a:avLst/>
@@ -25978,8 +26656,8 @@
         </p:nvSpPr>
         <p:spPr>
           <a:xfrm>
-            <a:off x="4370832" y="2569464"/>
-            <a:ext cx="1828800" cy="201168"/>
+            <a:off x="3328416" y="2569464"/>
+            <a:ext cx="1243584" cy="201168"/>
           </a:xfrm>
           <a:prstGeom prst="rect">
             <a:avLst/>
@@ -26003,7 +26681,7 @@
                 <a:ea typeface="Calibri" pitchFamily="34" charset="-122"/>
                 <a:cs typeface="Calibri" pitchFamily="34" charset="-120"/>
               </a:rPr>
-              <a:t>look/view</a:t>
+              <a:t>viewing/observing</a:t>
             </a:r>
             <a:endParaRPr lang="en-US" sz="850" dirty="0"/>
           </a:p>
@@ -26017,8 +26695,8 @@
         </p:nvSpPr>
         <p:spPr>
           <a:xfrm>
-            <a:off x="6519672" y="2258568"/>
-            <a:ext cx="1828800" cy="292608"/>
+            <a:off x="4663440" y="2258568"/>
+            <a:ext cx="1243584" cy="292608"/>
           </a:xfrm>
           <a:prstGeom prst="rect">
             <a:avLst>
@@ -26051,8 +26729,8 @@
         </p:nvSpPr>
         <p:spPr>
           <a:xfrm>
-            <a:off x="6519672" y="2258568"/>
-            <a:ext cx="1828800" cy="292608"/>
+            <a:off x="4663440" y="2258568"/>
+            <a:ext cx="1243584" cy="292608"/>
           </a:xfrm>
           <a:prstGeom prst="rect">
             <a:avLst/>
@@ -26090,8 +26768,8 @@
         </p:nvSpPr>
         <p:spPr>
           <a:xfrm>
-            <a:off x="6519672" y="2569464"/>
-            <a:ext cx="1828800" cy="201168"/>
+            <a:off x="4663440" y="2569464"/>
+            <a:ext cx="1243584" cy="201168"/>
           </a:xfrm>
           <a:prstGeom prst="rect">
             <a:avLst/>
@@ -26129,6 +26807,230 @@
         </p:nvSpPr>
         <p:spPr>
           <a:xfrm>
+            <a:off x="5998464" y="2258568"/>
+            <a:ext cx="1243584" cy="292608"/>
+          </a:xfrm>
+          <a:prstGeom prst="rect">
+            <a:avLst>
+              <a:gd name="adj" fmla="val 25000"/>
+            </a:avLst>
+          </a:prstGeom>
+          <a:solidFill>
+            <a:srgbClr val="FCE7F3"/>
+          </a:solidFill>
+          <a:ln w="19050">
+            <a:solidFill>
+              <a:srgbClr val="DB2777"/>
+            </a:solidFill>
+            <a:prstDash val="solid"/>
+          </a:ln>
+          <a:effectLst>
+            <a:outerShdw sx="100000" sy="100000" kx="0" ky="0" algn="bl" rotWithShape="0" blurRad="101600" dist="38100" dir="8100000">
+              <a:srgbClr val="000000">
+                <a:alpha val="12000"/>
+              </a:srgbClr>
+            </a:outerShdw>
+          </a:effectLst>
+        </p:spPr>
+      </p:sp>
+      <p:sp>
+        <p:nvSpPr>
+          <p:cNvPr id="26" name="Text 24"/>
+          <p:cNvSpPr/>
+          <p:nvPr/>
+        </p:nvSpPr>
+        <p:spPr>
+          <a:xfrm>
+            <a:off x="5998464" y="2258568"/>
+            <a:ext cx="1243584" cy="292608"/>
+          </a:xfrm>
+          <a:prstGeom prst="rect">
+            <a:avLst/>
+          </a:prstGeom>
+          <a:noFill/>
+          <a:ln/>
+        </p:spPr>
+        <p:txBody>
+          <a:bodyPr wrap="square" lIns="0" tIns="0" rIns="0" bIns="0" rtlCol="0" anchor="ctr"/>
+          <a:lstStyle/>
+          <a:p>
+            <a:pPr algn="ctr" indent="0" marL="0">
+              <a:buNone/>
+            </a:pPr>
+            <a:r>
+              <a:rPr lang="en-US" sz="1300" b="1" dirty="0">
+                <a:solidFill>
+                  <a:srgbClr val="9D174D"/>
+                </a:solidFill>
+                <a:latin typeface="Trebuchet MS" pitchFamily="34" charset="0"/>
+                <a:ea typeface="Trebuchet MS" pitchFamily="34" charset="-122"/>
+                <a:cs typeface="Trebuchet MS" pitchFamily="34" charset="-120"/>
+              </a:rPr>
+              <a:t>al</a:t>
+            </a:r>
+            <a:endParaRPr lang="en-US" sz="1300" dirty="0"/>
+          </a:p>
+        </p:txBody>
+      </p:sp>
+      <p:sp>
+        <p:nvSpPr>
+          <p:cNvPr id="27" name="Text 25"/>
+          <p:cNvSpPr/>
+          <p:nvPr/>
+        </p:nvSpPr>
+        <p:spPr>
+          <a:xfrm>
+            <a:off x="5998464" y="2569464"/>
+            <a:ext cx="1243584" cy="201168"/>
+          </a:xfrm>
+          <a:prstGeom prst="rect">
+            <a:avLst/>
+          </a:prstGeom>
+          <a:noFill/>
+          <a:ln/>
+        </p:spPr>
+        <p:txBody>
+          <a:bodyPr wrap="square" lIns="0" tIns="0" rIns="0" bIns="0" rtlCol="0" anchor="t"/>
+          <a:lstStyle/>
+          <a:p>
+            <a:pPr algn="ctr" indent="0" marL="0">
+              <a:buNone/>
+            </a:pPr>
+            <a:r>
+              <a:rPr lang="en-US" sz="850" dirty="0">
+                <a:solidFill>
+                  <a:srgbClr val="475569"/>
+                </a:solidFill>
+                <a:latin typeface="Calibri" pitchFamily="34" charset="0"/>
+                <a:ea typeface="Calibri" pitchFamily="34" charset="-122"/>
+                <a:cs typeface="Calibri" pitchFamily="34" charset="-120"/>
+              </a:rPr>
+              <a:t>relating to</a:t>
+            </a:r>
+            <a:endParaRPr lang="en-US" sz="850" dirty="0"/>
+          </a:p>
+        </p:txBody>
+      </p:sp>
+      <p:sp>
+        <p:nvSpPr>
+          <p:cNvPr id="28" name="Shape 26"/>
+          <p:cNvSpPr/>
+          <p:nvPr/>
+        </p:nvSpPr>
+        <p:spPr>
+          <a:xfrm>
+            <a:off x="7333488" y="2258568"/>
+            <a:ext cx="1243584" cy="292608"/>
+          </a:xfrm>
+          <a:prstGeom prst="rect">
+            <a:avLst>
+              <a:gd name="adj" fmla="val 25000"/>
+            </a:avLst>
+          </a:prstGeom>
+          <a:solidFill>
+            <a:srgbClr val="FCE7F3"/>
+          </a:solidFill>
+          <a:ln w="19050">
+            <a:solidFill>
+              <a:srgbClr val="DB2777"/>
+            </a:solidFill>
+            <a:prstDash val="solid"/>
+          </a:ln>
+          <a:effectLst>
+            <a:outerShdw sx="100000" sy="100000" kx="0" ky="0" algn="bl" rotWithShape="0" blurRad="101600" dist="38100" dir="8100000">
+              <a:srgbClr val="000000">
+                <a:alpha val="12000"/>
+              </a:srgbClr>
+            </a:outerShdw>
+          </a:effectLst>
+        </p:spPr>
+      </p:sp>
+      <p:sp>
+        <p:nvSpPr>
+          <p:cNvPr id="29" name="Text 27"/>
+          <p:cNvSpPr/>
+          <p:nvPr/>
+        </p:nvSpPr>
+        <p:spPr>
+          <a:xfrm>
+            <a:off x="7333488" y="2258568"/>
+            <a:ext cx="1243584" cy="292608"/>
+          </a:xfrm>
+          <a:prstGeom prst="rect">
+            <a:avLst/>
+          </a:prstGeom>
+          <a:noFill/>
+          <a:ln/>
+        </p:spPr>
+        <p:txBody>
+          <a:bodyPr wrap="square" lIns="0" tIns="0" rIns="0" bIns="0" rtlCol="0" anchor="ctr"/>
+          <a:lstStyle/>
+          <a:p>
+            <a:pPr algn="ctr" indent="0" marL="0">
+              <a:buNone/>
+            </a:pPr>
+            <a:r>
+              <a:rPr lang="en-US" sz="1300" b="1" dirty="0">
+                <a:solidFill>
+                  <a:srgbClr val="9D174D"/>
+                </a:solidFill>
+                <a:latin typeface="Trebuchet MS" pitchFamily="34" charset="0"/>
+                <a:ea typeface="Trebuchet MS" pitchFamily="34" charset="-122"/>
+                <a:cs typeface="Trebuchet MS" pitchFamily="34" charset="-120"/>
+              </a:rPr>
+              <a:t>ly</a:t>
+            </a:r>
+            <a:endParaRPr lang="en-US" sz="1300" dirty="0"/>
+          </a:p>
+        </p:txBody>
+      </p:sp>
+      <p:sp>
+        <p:nvSpPr>
+          <p:cNvPr id="30" name="Text 28"/>
+          <p:cNvSpPr/>
+          <p:nvPr/>
+        </p:nvSpPr>
+        <p:spPr>
+          <a:xfrm>
+            <a:off x="7333488" y="2569464"/>
+            <a:ext cx="1243584" cy="201168"/>
+          </a:xfrm>
+          <a:prstGeom prst="rect">
+            <a:avLst/>
+          </a:prstGeom>
+          <a:noFill/>
+          <a:ln/>
+        </p:spPr>
+        <p:txBody>
+          <a:bodyPr wrap="square" lIns="0" tIns="0" rIns="0" bIns="0" rtlCol="0" anchor="t"/>
+          <a:lstStyle/>
+          <a:p>
+            <a:pPr algn="ctr" indent="0" marL="0">
+              <a:buNone/>
+            </a:pPr>
+            <a:r>
+              <a:rPr lang="en-US" sz="850" dirty="0">
+                <a:solidFill>
+                  <a:srgbClr val="475569"/>
+                </a:solidFill>
+                <a:latin typeface="Calibri" pitchFamily="34" charset="0"/>
+                <a:ea typeface="Calibri" pitchFamily="34" charset="-122"/>
+                <a:cs typeface="Calibri" pitchFamily="34" charset="-120"/>
+              </a:rPr>
+              <a:t>in the manner of</a:t>
+            </a:r>
+            <a:endParaRPr lang="en-US" sz="850" dirty="0"/>
+          </a:p>
+        </p:txBody>
+      </p:sp>
+      <p:sp>
+        <p:nvSpPr>
+          <p:cNvPr id="31" name="Shape 29"/>
+          <p:cNvSpPr/>
+          <p:nvPr/>
+        </p:nvSpPr>
+        <p:spPr>
+          <a:xfrm>
             <a:off x="365760" y="3273552"/>
             <a:ext cx="1371600" cy="658368"/>
           </a:xfrm>
@@ -26150,7 +27052,7 @@
       </p:sp>
       <p:sp>
         <p:nvSpPr>
-          <p:cNvPr id="26" name="Text 24"/>
+          <p:cNvPr id="32" name="Text 30"/>
           <p:cNvSpPr/>
           <p:nvPr/>
         </p:nvSpPr>
@@ -26189,7 +27091,7 @@
       </p:sp>
       <p:sp>
         <p:nvSpPr>
-          <p:cNvPr id="27" name="Shape 25"/>
+          <p:cNvPr id="33" name="Shape 31"/>
           <p:cNvSpPr/>
           <p:nvPr/>
         </p:nvSpPr>
@@ -26216,7 +27118,7 @@
       </p:sp>
       <p:sp>
         <p:nvSpPr>
-          <p:cNvPr id="28" name="Text 26"/>
+          <p:cNvPr id="34" name="Text 32"/>
           <p:cNvSpPr/>
           <p:nvPr/>
         </p:nvSpPr>
@@ -26255,7 +27157,7 @@
       </p:sp>
       <p:sp>
         <p:nvSpPr>
-          <p:cNvPr id="29" name="Shape 27"/>
+          <p:cNvPr id="35" name="Shape 33"/>
           <p:cNvSpPr/>
           <p:nvPr/>
         </p:nvSpPr>
@@ -26282,7 +27184,7 @@
       </p:sp>
       <p:sp>
         <p:nvSpPr>
-          <p:cNvPr id="30" name="Text 28"/>
+          <p:cNvPr id="36" name="Text 34"/>
           <p:cNvSpPr/>
           <p:nvPr/>
         </p:nvSpPr>
@@ -26321,7 +27223,7 @@
       </p:sp>
       <p:sp>
         <p:nvSpPr>
-          <p:cNvPr id="31" name="Shape 29"/>
+          <p:cNvPr id="37" name="Shape 35"/>
           <p:cNvSpPr/>
           <p:nvPr/>
         </p:nvSpPr>
@@ -26348,7 +27250,7 @@
       </p:sp>
       <p:sp>
         <p:nvSpPr>
-          <p:cNvPr id="32" name="Text 30"/>
+          <p:cNvPr id="38" name="Text 36"/>
           <p:cNvSpPr/>
           <p:nvPr/>
         </p:nvSpPr>
@@ -26671,7 +27573,7 @@
                 <a:ea typeface="Calibri" pitchFamily="34" charset="-122"/>
                 <a:cs typeface="Calibri" pitchFamily="34" charset="-120"/>
               </a:rPr>
-              <a:t>Word Labs  •  wordlabs.app  •  Root: 'kaleido' = beautiful, shifting coloured forms</a:t>
+              <a:t>Word Labs  •  wordlabs.app  •  Root: 'kaleido' = beautiful, varied, shifting forms</a:t>
             </a:r>
             <a:endParaRPr lang="en-US" sz="800" dirty="0"/>
           </a:p>
@@ -26744,7 +27646,7 @@
                 <a:ea typeface="Trebuchet MS" pitchFamily="34" charset="-122"/>
                 <a:cs typeface="Trebuchet MS" pitchFamily="34" charset="-120"/>
               </a:rPr>
-              <a:t>We are learning that the root 'kaleido' means 'beautiful, shifting coloured forms'.</a:t>
+              <a:t>We are learning that the root 'kaleido' means 'beautiful, varied, shifting forms'.</a:t>
             </a:r>
             <a:endParaRPr lang="en-US" sz="2000" dirty="0"/>
           </a:p>
@@ -27390,7 +28292,7 @@
                 <a:ea typeface="Calibri" pitchFamily="34" charset="-122"/>
                 <a:cs typeface="Calibri" pitchFamily="34" charset="-120"/>
               </a:rPr>
-              <a:t>Word Labs  •  wordlabs.app  •  Root: 'kaleido' = beautiful, shifting coloured forms</a:t>
+              <a:t>Word Labs  •  wordlabs.app  •  Root: 'kaleido' = beautiful, varied, shifting forms</a:t>
             </a:r>
             <a:endParaRPr lang="en-US" sz="800" dirty="0"/>
           </a:p>
@@ -27529,7 +28431,7 @@
                 <a:ea typeface="Trebuchet MS" pitchFamily="34" charset="-122"/>
                 <a:cs typeface="Trebuchet MS" pitchFamily="34" charset="-120"/>
               </a:rPr>
-              <a:t>kaleidoscopic</a:t>
+              <a:t>kaleidoscopically</a:t>
             </a:r>
             <a:endParaRPr lang="en-US" sz="2800" dirty="0"/>
           </a:p>
@@ -27609,8 +28511,8 @@
         </p:nvSpPr>
         <p:spPr>
           <a:xfrm>
-            <a:off x="2221992" y="2258568"/>
-            <a:ext cx="1828800" cy="292608"/>
+            <a:off x="1993392" y="2258568"/>
+            <a:ext cx="1243584" cy="292608"/>
           </a:xfrm>
           <a:prstGeom prst="rect">
             <a:avLst>
@@ -27643,8 +28545,8 @@
         </p:nvSpPr>
         <p:spPr>
           <a:xfrm>
-            <a:off x="2221992" y="2258568"/>
-            <a:ext cx="1828800" cy="292608"/>
+            <a:off x="1993392" y="2258568"/>
+            <a:ext cx="1243584" cy="292608"/>
           </a:xfrm>
           <a:prstGeom prst="rect">
             <a:avLst/>
@@ -27682,8 +28584,8 @@
         </p:nvSpPr>
         <p:spPr>
           <a:xfrm>
-            <a:off x="2221992" y="2569464"/>
-            <a:ext cx="1828800" cy="201168"/>
+            <a:off x="1993392" y="2569464"/>
+            <a:ext cx="1243584" cy="201168"/>
           </a:xfrm>
           <a:prstGeom prst="rect">
             <a:avLst/>
@@ -27707,7 +28609,7 @@
                 <a:ea typeface="Calibri" pitchFamily="34" charset="-122"/>
                 <a:cs typeface="Calibri" pitchFamily="34" charset="-120"/>
               </a:rPr>
-              <a:t>beautiful shifting form</a:t>
+              <a:t>beautiful, varied forms</a:t>
             </a:r>
             <a:endParaRPr lang="en-US" sz="850" dirty="0"/>
           </a:p>
@@ -27721,8 +28623,8 @@
         </p:nvSpPr>
         <p:spPr>
           <a:xfrm>
-            <a:off x="4370832" y="2258568"/>
-            <a:ext cx="1828800" cy="292608"/>
+            <a:off x="3328416" y="2258568"/>
+            <a:ext cx="1243584" cy="292608"/>
           </a:xfrm>
           <a:prstGeom prst="rect">
             <a:avLst>
@@ -27755,8 +28657,8 @@
         </p:nvSpPr>
         <p:spPr>
           <a:xfrm>
-            <a:off x="4370832" y="2258568"/>
-            <a:ext cx="1828800" cy="292608"/>
+            <a:off x="3328416" y="2258568"/>
+            <a:ext cx="1243584" cy="292608"/>
           </a:xfrm>
           <a:prstGeom prst="rect">
             <a:avLst/>
@@ -27794,8 +28696,8 @@
         </p:nvSpPr>
         <p:spPr>
           <a:xfrm>
-            <a:off x="4370832" y="2569464"/>
-            <a:ext cx="1828800" cy="201168"/>
+            <a:off x="3328416" y="2569464"/>
+            <a:ext cx="1243584" cy="201168"/>
           </a:xfrm>
           <a:prstGeom prst="rect">
             <a:avLst/>
@@ -27819,7 +28721,7 @@
                 <a:ea typeface="Calibri" pitchFamily="34" charset="-122"/>
                 <a:cs typeface="Calibri" pitchFamily="34" charset="-120"/>
               </a:rPr>
-              <a:t>look/view</a:t>
+              <a:t>viewing/observing</a:t>
             </a:r>
             <a:endParaRPr lang="en-US" sz="850" dirty="0"/>
           </a:p>
@@ -27833,8 +28735,8 @@
         </p:nvSpPr>
         <p:spPr>
           <a:xfrm>
-            <a:off x="6519672" y="2258568"/>
-            <a:ext cx="1828800" cy="292608"/>
+            <a:off x="4663440" y="2258568"/>
+            <a:ext cx="1243584" cy="292608"/>
           </a:xfrm>
           <a:prstGeom prst="rect">
             <a:avLst>
@@ -27867,8 +28769,8 @@
         </p:nvSpPr>
         <p:spPr>
           <a:xfrm>
-            <a:off x="6519672" y="2258568"/>
-            <a:ext cx="1828800" cy="292608"/>
+            <a:off x="4663440" y="2258568"/>
+            <a:ext cx="1243584" cy="292608"/>
           </a:xfrm>
           <a:prstGeom prst="rect">
             <a:avLst/>
@@ -27906,8 +28808,8 @@
         </p:nvSpPr>
         <p:spPr>
           <a:xfrm>
-            <a:off x="6519672" y="2569464"/>
-            <a:ext cx="1828800" cy="201168"/>
+            <a:off x="4663440" y="2569464"/>
+            <a:ext cx="1243584" cy="201168"/>
           </a:xfrm>
           <a:prstGeom prst="rect">
             <a:avLst/>
@@ -27945,6 +28847,230 @@
         </p:nvSpPr>
         <p:spPr>
           <a:xfrm>
+            <a:off x="5998464" y="2258568"/>
+            <a:ext cx="1243584" cy="292608"/>
+          </a:xfrm>
+          <a:prstGeom prst="rect">
+            <a:avLst>
+              <a:gd name="adj" fmla="val 25000"/>
+            </a:avLst>
+          </a:prstGeom>
+          <a:solidFill>
+            <a:srgbClr val="FCE7F3"/>
+          </a:solidFill>
+          <a:ln w="19050">
+            <a:solidFill>
+              <a:srgbClr val="DB2777"/>
+            </a:solidFill>
+            <a:prstDash val="solid"/>
+          </a:ln>
+          <a:effectLst>
+            <a:outerShdw sx="100000" sy="100000" kx="0" ky="0" algn="bl" rotWithShape="0" blurRad="101600" dist="38100" dir="8100000">
+              <a:srgbClr val="000000">
+                <a:alpha val="12000"/>
+              </a:srgbClr>
+            </a:outerShdw>
+          </a:effectLst>
+        </p:spPr>
+      </p:sp>
+      <p:sp>
+        <p:nvSpPr>
+          <p:cNvPr id="26" name="Text 24"/>
+          <p:cNvSpPr/>
+          <p:nvPr/>
+        </p:nvSpPr>
+        <p:spPr>
+          <a:xfrm>
+            <a:off x="5998464" y="2258568"/>
+            <a:ext cx="1243584" cy="292608"/>
+          </a:xfrm>
+          <a:prstGeom prst="rect">
+            <a:avLst/>
+          </a:prstGeom>
+          <a:noFill/>
+          <a:ln/>
+        </p:spPr>
+        <p:txBody>
+          <a:bodyPr wrap="square" lIns="0" tIns="0" rIns="0" bIns="0" rtlCol="0" anchor="ctr"/>
+          <a:lstStyle/>
+          <a:p>
+            <a:pPr algn="ctr" indent="0" marL="0">
+              <a:buNone/>
+            </a:pPr>
+            <a:r>
+              <a:rPr lang="en-US" sz="1300" b="1" dirty="0">
+                <a:solidFill>
+                  <a:srgbClr val="9D174D"/>
+                </a:solidFill>
+                <a:latin typeface="Trebuchet MS" pitchFamily="34" charset="0"/>
+                <a:ea typeface="Trebuchet MS" pitchFamily="34" charset="-122"/>
+                <a:cs typeface="Trebuchet MS" pitchFamily="34" charset="-120"/>
+              </a:rPr>
+              <a:t>al</a:t>
+            </a:r>
+            <a:endParaRPr lang="en-US" sz="1300" dirty="0"/>
+          </a:p>
+        </p:txBody>
+      </p:sp>
+      <p:sp>
+        <p:nvSpPr>
+          <p:cNvPr id="27" name="Text 25"/>
+          <p:cNvSpPr/>
+          <p:nvPr/>
+        </p:nvSpPr>
+        <p:spPr>
+          <a:xfrm>
+            <a:off x="5998464" y="2569464"/>
+            <a:ext cx="1243584" cy="201168"/>
+          </a:xfrm>
+          <a:prstGeom prst="rect">
+            <a:avLst/>
+          </a:prstGeom>
+          <a:noFill/>
+          <a:ln/>
+        </p:spPr>
+        <p:txBody>
+          <a:bodyPr wrap="square" lIns="0" tIns="0" rIns="0" bIns="0" rtlCol="0" anchor="t"/>
+          <a:lstStyle/>
+          <a:p>
+            <a:pPr algn="ctr" indent="0" marL="0">
+              <a:buNone/>
+            </a:pPr>
+            <a:r>
+              <a:rPr lang="en-US" sz="850" dirty="0">
+                <a:solidFill>
+                  <a:srgbClr val="475569"/>
+                </a:solidFill>
+                <a:latin typeface="Calibri" pitchFamily="34" charset="0"/>
+                <a:ea typeface="Calibri" pitchFamily="34" charset="-122"/>
+                <a:cs typeface="Calibri" pitchFamily="34" charset="-120"/>
+              </a:rPr>
+              <a:t>relating to</a:t>
+            </a:r>
+            <a:endParaRPr lang="en-US" sz="850" dirty="0"/>
+          </a:p>
+        </p:txBody>
+      </p:sp>
+      <p:sp>
+        <p:nvSpPr>
+          <p:cNvPr id="28" name="Shape 26"/>
+          <p:cNvSpPr/>
+          <p:nvPr/>
+        </p:nvSpPr>
+        <p:spPr>
+          <a:xfrm>
+            <a:off x="7333488" y="2258568"/>
+            <a:ext cx="1243584" cy="292608"/>
+          </a:xfrm>
+          <a:prstGeom prst="rect">
+            <a:avLst>
+              <a:gd name="adj" fmla="val 25000"/>
+            </a:avLst>
+          </a:prstGeom>
+          <a:solidFill>
+            <a:srgbClr val="FCE7F3"/>
+          </a:solidFill>
+          <a:ln w="19050">
+            <a:solidFill>
+              <a:srgbClr val="DB2777"/>
+            </a:solidFill>
+            <a:prstDash val="solid"/>
+          </a:ln>
+          <a:effectLst>
+            <a:outerShdw sx="100000" sy="100000" kx="0" ky="0" algn="bl" rotWithShape="0" blurRad="101600" dist="38100" dir="8100000">
+              <a:srgbClr val="000000">
+                <a:alpha val="12000"/>
+              </a:srgbClr>
+            </a:outerShdw>
+          </a:effectLst>
+        </p:spPr>
+      </p:sp>
+      <p:sp>
+        <p:nvSpPr>
+          <p:cNvPr id="29" name="Text 27"/>
+          <p:cNvSpPr/>
+          <p:nvPr/>
+        </p:nvSpPr>
+        <p:spPr>
+          <a:xfrm>
+            <a:off x="7333488" y="2258568"/>
+            <a:ext cx="1243584" cy="292608"/>
+          </a:xfrm>
+          <a:prstGeom prst="rect">
+            <a:avLst/>
+          </a:prstGeom>
+          <a:noFill/>
+          <a:ln/>
+        </p:spPr>
+        <p:txBody>
+          <a:bodyPr wrap="square" lIns="0" tIns="0" rIns="0" bIns="0" rtlCol="0" anchor="ctr"/>
+          <a:lstStyle/>
+          <a:p>
+            <a:pPr algn="ctr" indent="0" marL="0">
+              <a:buNone/>
+            </a:pPr>
+            <a:r>
+              <a:rPr lang="en-US" sz="1300" b="1" dirty="0">
+                <a:solidFill>
+                  <a:srgbClr val="9D174D"/>
+                </a:solidFill>
+                <a:latin typeface="Trebuchet MS" pitchFamily="34" charset="0"/>
+                <a:ea typeface="Trebuchet MS" pitchFamily="34" charset="-122"/>
+                <a:cs typeface="Trebuchet MS" pitchFamily="34" charset="-120"/>
+              </a:rPr>
+              <a:t>ly</a:t>
+            </a:r>
+            <a:endParaRPr lang="en-US" sz="1300" dirty="0"/>
+          </a:p>
+        </p:txBody>
+      </p:sp>
+      <p:sp>
+        <p:nvSpPr>
+          <p:cNvPr id="30" name="Text 28"/>
+          <p:cNvSpPr/>
+          <p:nvPr/>
+        </p:nvSpPr>
+        <p:spPr>
+          <a:xfrm>
+            <a:off x="7333488" y="2569464"/>
+            <a:ext cx="1243584" cy="201168"/>
+          </a:xfrm>
+          <a:prstGeom prst="rect">
+            <a:avLst/>
+          </a:prstGeom>
+          <a:noFill/>
+          <a:ln/>
+        </p:spPr>
+        <p:txBody>
+          <a:bodyPr wrap="square" lIns="0" tIns="0" rIns="0" bIns="0" rtlCol="0" anchor="t"/>
+          <a:lstStyle/>
+          <a:p>
+            <a:pPr algn="ctr" indent="0" marL="0">
+              <a:buNone/>
+            </a:pPr>
+            <a:r>
+              <a:rPr lang="en-US" sz="850" dirty="0">
+                <a:solidFill>
+                  <a:srgbClr val="475569"/>
+                </a:solidFill>
+                <a:latin typeface="Calibri" pitchFamily="34" charset="0"/>
+                <a:ea typeface="Calibri" pitchFamily="34" charset="-122"/>
+                <a:cs typeface="Calibri" pitchFamily="34" charset="-120"/>
+              </a:rPr>
+              <a:t>in the manner of</a:t>
+            </a:r>
+            <a:endParaRPr lang="en-US" sz="850" dirty="0"/>
+          </a:p>
+        </p:txBody>
+      </p:sp>
+      <p:sp>
+        <p:nvSpPr>
+          <p:cNvPr id="31" name="Shape 29"/>
+          <p:cNvSpPr/>
+          <p:nvPr/>
+        </p:nvSpPr>
+        <p:spPr>
+          <a:xfrm>
             <a:off x="365760" y="3273552"/>
             <a:ext cx="1371600" cy="658368"/>
           </a:xfrm>
@@ -27966,7 +29092,7 @@
       </p:sp>
       <p:sp>
         <p:nvSpPr>
-          <p:cNvPr id="26" name="Text 24"/>
+          <p:cNvPr id="32" name="Text 30"/>
           <p:cNvSpPr/>
           <p:nvPr/>
         </p:nvSpPr>
@@ -28005,7 +29131,7 @@
       </p:sp>
       <p:sp>
         <p:nvSpPr>
-          <p:cNvPr id="27" name="Shape 25"/>
+          <p:cNvPr id="33" name="Shape 31"/>
           <p:cNvSpPr/>
           <p:nvPr/>
         </p:nvSpPr>
@@ -28032,14 +29158,14 @@
       </p:sp>
       <p:sp>
         <p:nvSpPr>
-          <p:cNvPr id="28" name="Shape 26"/>
-          <p:cNvSpPr/>
-          <p:nvPr/>
-        </p:nvSpPr>
-        <p:spPr>
-          <a:xfrm>
-            <a:off x="1978152" y="3364992"/>
-            <a:ext cx="1225296" cy="475488"/>
+          <p:cNvPr id="34" name="Shape 32"/>
+          <p:cNvSpPr/>
+          <p:nvPr/>
+        </p:nvSpPr>
+        <p:spPr>
+          <a:xfrm>
+            <a:off x="1981962" y="3364992"/>
+            <a:ext cx="849086" cy="475488"/>
           </a:xfrm>
           <a:prstGeom prst="rect">
             <a:avLst>
@@ -28059,14 +29185,14 @@
       </p:sp>
       <p:sp>
         <p:nvSpPr>
-          <p:cNvPr id="29" name="Text 27"/>
-          <p:cNvSpPr/>
-          <p:nvPr/>
-        </p:nvSpPr>
-        <p:spPr>
-          <a:xfrm>
-            <a:off x="1978152" y="3364992"/>
-            <a:ext cx="1225296" cy="475488"/>
+          <p:cNvPr id="35" name="Text 33"/>
+          <p:cNvSpPr/>
+          <p:nvPr/>
+        </p:nvSpPr>
+        <p:spPr>
+          <a:xfrm>
+            <a:off x="1981962" y="3364992"/>
+            <a:ext cx="849086" cy="475488"/>
           </a:xfrm>
           <a:prstGeom prst="rect">
             <a:avLst/>
@@ -28098,14 +29224,14 @@
       </p:sp>
       <p:sp>
         <p:nvSpPr>
-          <p:cNvPr id="30" name="Text 28"/>
-          <p:cNvSpPr/>
-          <p:nvPr/>
-        </p:nvSpPr>
-        <p:spPr>
-          <a:xfrm>
-            <a:off x="3203448" y="3364992"/>
-            <a:ext cx="76200" cy="475488"/>
+          <p:cNvPr id="36" name="Text 34"/>
+          <p:cNvSpPr/>
+          <p:nvPr/>
+        </p:nvSpPr>
+        <p:spPr>
+          <a:xfrm>
+            <a:off x="2831048" y="3364992"/>
+            <a:ext cx="80010" cy="475488"/>
           </a:xfrm>
           <a:prstGeom prst="rect">
             <a:avLst/>
@@ -28137,14 +29263,14 @@
       </p:sp>
       <p:sp>
         <p:nvSpPr>
-          <p:cNvPr id="31" name="Shape 29"/>
-          <p:cNvSpPr/>
-          <p:nvPr/>
-        </p:nvSpPr>
-        <p:spPr>
-          <a:xfrm>
-            <a:off x="3279648" y="3364992"/>
-            <a:ext cx="1225296" cy="475488"/>
+          <p:cNvPr id="37" name="Shape 35"/>
+          <p:cNvSpPr/>
+          <p:nvPr/>
+        </p:nvSpPr>
+        <p:spPr>
+          <a:xfrm>
+            <a:off x="2911058" y="3364992"/>
+            <a:ext cx="849086" cy="475488"/>
           </a:xfrm>
           <a:prstGeom prst="rect">
             <a:avLst>
@@ -28164,14 +29290,14 @@
       </p:sp>
       <p:sp>
         <p:nvSpPr>
-          <p:cNvPr id="32" name="Text 30"/>
-          <p:cNvSpPr/>
-          <p:nvPr/>
-        </p:nvSpPr>
-        <p:spPr>
-          <a:xfrm>
-            <a:off x="3279648" y="3364992"/>
-            <a:ext cx="1225296" cy="475488"/>
+          <p:cNvPr id="38" name="Text 36"/>
+          <p:cNvSpPr/>
+          <p:nvPr/>
+        </p:nvSpPr>
+        <p:spPr>
+          <a:xfrm>
+            <a:off x="2911058" y="3364992"/>
+            <a:ext cx="849086" cy="475488"/>
           </a:xfrm>
           <a:prstGeom prst="rect">
             <a:avLst/>
@@ -28203,14 +29329,14 @@
       </p:sp>
       <p:sp>
         <p:nvSpPr>
-          <p:cNvPr id="33" name="Text 31"/>
-          <p:cNvSpPr/>
-          <p:nvPr/>
-        </p:nvSpPr>
-        <p:spPr>
-          <a:xfrm>
-            <a:off x="4504944" y="3364992"/>
-            <a:ext cx="76200" cy="475488"/>
+          <p:cNvPr id="39" name="Text 37"/>
+          <p:cNvSpPr/>
+          <p:nvPr/>
+        </p:nvSpPr>
+        <p:spPr>
+          <a:xfrm>
+            <a:off x="3760143" y="3364992"/>
+            <a:ext cx="80010" cy="475488"/>
           </a:xfrm>
           <a:prstGeom prst="rect">
             <a:avLst/>
@@ -28242,14 +29368,14 @@
       </p:sp>
       <p:sp>
         <p:nvSpPr>
-          <p:cNvPr id="34" name="Shape 32"/>
-          <p:cNvSpPr/>
-          <p:nvPr/>
-        </p:nvSpPr>
-        <p:spPr>
-          <a:xfrm>
-            <a:off x="4581144" y="3364992"/>
-            <a:ext cx="1225296" cy="475488"/>
+          <p:cNvPr id="40" name="Shape 38"/>
+          <p:cNvSpPr/>
+          <p:nvPr/>
+        </p:nvSpPr>
+        <p:spPr>
+          <a:xfrm>
+            <a:off x="3840153" y="3364992"/>
+            <a:ext cx="849086" cy="475488"/>
           </a:xfrm>
           <a:prstGeom prst="rect">
             <a:avLst>
@@ -28269,14 +29395,14 @@
       </p:sp>
       <p:sp>
         <p:nvSpPr>
-          <p:cNvPr id="35" name="Text 33"/>
-          <p:cNvSpPr/>
-          <p:nvPr/>
-        </p:nvSpPr>
-        <p:spPr>
-          <a:xfrm>
-            <a:off x="4581144" y="3364992"/>
-            <a:ext cx="1225296" cy="475488"/>
+          <p:cNvPr id="41" name="Text 39"/>
+          <p:cNvSpPr/>
+          <p:nvPr/>
+        </p:nvSpPr>
+        <p:spPr>
+          <a:xfrm>
+            <a:off x="3840153" y="3364992"/>
+            <a:ext cx="849086" cy="475488"/>
           </a:xfrm>
           <a:prstGeom prst="rect">
             <a:avLst/>
@@ -28308,14 +29434,14 @@
       </p:sp>
       <p:sp>
         <p:nvSpPr>
-          <p:cNvPr id="36" name="Text 34"/>
-          <p:cNvSpPr/>
-          <p:nvPr/>
-        </p:nvSpPr>
-        <p:spPr>
-          <a:xfrm>
-            <a:off x="5806440" y="3364992"/>
-            <a:ext cx="76200" cy="475488"/>
+          <p:cNvPr id="42" name="Text 40"/>
+          <p:cNvSpPr/>
+          <p:nvPr/>
+        </p:nvSpPr>
+        <p:spPr>
+          <a:xfrm>
+            <a:off x="4689239" y="3364992"/>
+            <a:ext cx="80010" cy="475488"/>
           </a:xfrm>
           <a:prstGeom prst="rect">
             <a:avLst/>
@@ -28347,14 +29473,14 @@
       </p:sp>
       <p:sp>
         <p:nvSpPr>
-          <p:cNvPr id="37" name="Shape 35"/>
-          <p:cNvSpPr/>
-          <p:nvPr/>
-        </p:nvSpPr>
-        <p:spPr>
-          <a:xfrm>
-            <a:off x="5882640" y="3364992"/>
-            <a:ext cx="1225296" cy="475488"/>
+          <p:cNvPr id="43" name="Shape 41"/>
+          <p:cNvSpPr/>
+          <p:nvPr/>
+        </p:nvSpPr>
+        <p:spPr>
+          <a:xfrm>
+            <a:off x="4769249" y="3364992"/>
+            <a:ext cx="849086" cy="475488"/>
           </a:xfrm>
           <a:prstGeom prst="rect">
             <a:avLst>
@@ -28374,14 +29500,14 @@
       </p:sp>
       <p:sp>
         <p:nvSpPr>
-          <p:cNvPr id="38" name="Text 36"/>
-          <p:cNvSpPr/>
-          <p:nvPr/>
-        </p:nvSpPr>
-        <p:spPr>
-          <a:xfrm>
-            <a:off x="5882640" y="3364992"/>
-            <a:ext cx="1225296" cy="475488"/>
+          <p:cNvPr id="44" name="Text 42"/>
+          <p:cNvSpPr/>
+          <p:nvPr/>
+        </p:nvSpPr>
+        <p:spPr>
+          <a:xfrm>
+            <a:off x="4769249" y="3364992"/>
+            <a:ext cx="849086" cy="475488"/>
           </a:xfrm>
           <a:prstGeom prst="rect">
             <a:avLst/>
@@ -28413,14 +29539,14 @@
       </p:sp>
       <p:sp>
         <p:nvSpPr>
-          <p:cNvPr id="39" name="Text 37"/>
-          <p:cNvSpPr/>
-          <p:nvPr/>
-        </p:nvSpPr>
-        <p:spPr>
-          <a:xfrm>
-            <a:off x="7107936" y="3364992"/>
-            <a:ext cx="76200" cy="475488"/>
+          <p:cNvPr id="45" name="Text 43"/>
+          <p:cNvSpPr/>
+          <p:nvPr/>
+        </p:nvSpPr>
+        <p:spPr>
+          <a:xfrm>
+            <a:off x="5618335" y="3364992"/>
+            <a:ext cx="80010" cy="475488"/>
           </a:xfrm>
           <a:prstGeom prst="rect">
             <a:avLst/>
@@ -28452,14 +29578,14 @@
       </p:sp>
       <p:sp>
         <p:nvSpPr>
-          <p:cNvPr id="40" name="Shape 38"/>
-          <p:cNvSpPr/>
-          <p:nvPr/>
-        </p:nvSpPr>
-        <p:spPr>
-          <a:xfrm>
-            <a:off x="7184136" y="3364992"/>
-            <a:ext cx="1225296" cy="475488"/>
+          <p:cNvPr id="46" name="Shape 44"/>
+          <p:cNvSpPr/>
+          <p:nvPr/>
+        </p:nvSpPr>
+        <p:spPr>
+          <a:xfrm>
+            <a:off x="5698345" y="3364992"/>
+            <a:ext cx="849086" cy="475488"/>
           </a:xfrm>
           <a:prstGeom prst="rect">
             <a:avLst>
@@ -28479,14 +29605,14 @@
       </p:sp>
       <p:sp>
         <p:nvSpPr>
-          <p:cNvPr id="41" name="Text 39"/>
-          <p:cNvSpPr/>
-          <p:nvPr/>
-        </p:nvSpPr>
-        <p:spPr>
-          <a:xfrm>
-            <a:off x="7184136" y="3364992"/>
-            <a:ext cx="1225296" cy="475488"/>
+          <p:cNvPr id="47" name="Text 45"/>
+          <p:cNvSpPr/>
+          <p:nvPr/>
+        </p:nvSpPr>
+        <p:spPr>
+          <a:xfrm>
+            <a:off x="5698345" y="3364992"/>
+            <a:ext cx="849086" cy="475488"/>
           </a:xfrm>
           <a:prstGeom prst="rect">
             <a:avLst/>
@@ -28518,7 +29644,217 @@
       </p:sp>
       <p:sp>
         <p:nvSpPr>
-          <p:cNvPr id="42" name="Shape 40"/>
+          <p:cNvPr id="48" name="Text 46"/>
+          <p:cNvSpPr/>
+          <p:nvPr/>
+        </p:nvSpPr>
+        <p:spPr>
+          <a:xfrm>
+            <a:off x="6547431" y="3364992"/>
+            <a:ext cx="80010" cy="475488"/>
+          </a:xfrm>
+          <a:prstGeom prst="rect">
+            <a:avLst/>
+          </a:prstGeom>
+          <a:noFill/>
+          <a:ln/>
+        </p:spPr>
+        <p:txBody>
+          <a:bodyPr wrap="square" lIns="0" tIns="0" rIns="0" bIns="0" rtlCol="0" anchor="ctr"/>
+          <a:lstStyle/>
+          <a:p>
+            <a:pPr algn="ctr" indent="0" marL="0">
+              <a:buNone/>
+            </a:pPr>
+            <a:r>
+              <a:rPr lang="en-US" sz="1600" b="1" dirty="0">
+                <a:solidFill>
+                  <a:srgbClr val="0D9488"/>
+                </a:solidFill>
+                <a:latin typeface="Trebuchet MS" pitchFamily="34" charset="0"/>
+                <a:ea typeface="Trebuchet MS" pitchFamily="34" charset="-122"/>
+                <a:cs typeface="Trebuchet MS" pitchFamily="34" charset="-120"/>
+              </a:rPr>
+              <a:t>·</a:t>
+            </a:r>
+            <a:endParaRPr lang="en-US" sz="1600" dirty="0"/>
+          </a:p>
+        </p:txBody>
+      </p:sp>
+      <p:sp>
+        <p:nvSpPr>
+          <p:cNvPr id="49" name="Shape 47"/>
+          <p:cNvSpPr/>
+          <p:nvPr/>
+        </p:nvSpPr>
+        <p:spPr>
+          <a:xfrm>
+            <a:off x="6627441" y="3364992"/>
+            <a:ext cx="849086" cy="475488"/>
+          </a:xfrm>
+          <a:prstGeom prst="rect">
+            <a:avLst>
+              <a:gd name="adj" fmla="val 9615"/>
+            </a:avLst>
+          </a:prstGeom>
+          <a:solidFill>
+            <a:srgbClr val="FFFFFF"/>
+          </a:solidFill>
+          <a:ln w="12700">
+            <a:solidFill>
+              <a:srgbClr val="0D9488"/>
+            </a:solidFill>
+            <a:prstDash val="solid"/>
+          </a:ln>
+        </p:spPr>
+      </p:sp>
+      <p:sp>
+        <p:nvSpPr>
+          <p:cNvPr id="50" name="Text 48"/>
+          <p:cNvSpPr/>
+          <p:nvPr/>
+        </p:nvSpPr>
+        <p:spPr>
+          <a:xfrm>
+            <a:off x="6627441" y="3364992"/>
+            <a:ext cx="849086" cy="475488"/>
+          </a:xfrm>
+          <a:prstGeom prst="rect">
+            <a:avLst/>
+          </a:prstGeom>
+          <a:noFill/>
+          <a:ln/>
+        </p:spPr>
+        <p:txBody>
+          <a:bodyPr wrap="square" lIns="0" tIns="0" rIns="0" bIns="0" rtlCol="0" anchor="ctr"/>
+          <a:lstStyle/>
+          <a:p>
+            <a:pPr algn="ctr" indent="0" marL="0">
+              <a:buNone/>
+            </a:pPr>
+            <a:r>
+              <a:rPr lang="en-US" sz="1400" b="1" dirty="0">
+                <a:solidFill>
+                  <a:srgbClr val="0D9488"/>
+                </a:solidFill>
+                <a:latin typeface="Trebuchet MS" pitchFamily="34" charset="0"/>
+                <a:ea typeface="Trebuchet MS" pitchFamily="34" charset="-122"/>
+                <a:cs typeface="Trebuchet MS" pitchFamily="34" charset="-120"/>
+              </a:rPr>
+              <a:t>al</a:t>
+            </a:r>
+            <a:endParaRPr lang="en-US" sz="1400" dirty="0"/>
+          </a:p>
+        </p:txBody>
+      </p:sp>
+      <p:sp>
+        <p:nvSpPr>
+          <p:cNvPr id="51" name="Text 49"/>
+          <p:cNvSpPr/>
+          <p:nvPr/>
+        </p:nvSpPr>
+        <p:spPr>
+          <a:xfrm>
+            <a:off x="7476526" y="3364992"/>
+            <a:ext cx="80010" cy="475488"/>
+          </a:xfrm>
+          <a:prstGeom prst="rect">
+            <a:avLst/>
+          </a:prstGeom>
+          <a:noFill/>
+          <a:ln/>
+        </p:spPr>
+        <p:txBody>
+          <a:bodyPr wrap="square" lIns="0" tIns="0" rIns="0" bIns="0" rtlCol="0" anchor="ctr"/>
+          <a:lstStyle/>
+          <a:p>
+            <a:pPr algn="ctr" indent="0" marL="0">
+              <a:buNone/>
+            </a:pPr>
+            <a:r>
+              <a:rPr lang="en-US" sz="1600" b="1" dirty="0">
+                <a:solidFill>
+                  <a:srgbClr val="0D9488"/>
+                </a:solidFill>
+                <a:latin typeface="Trebuchet MS" pitchFamily="34" charset="0"/>
+                <a:ea typeface="Trebuchet MS" pitchFamily="34" charset="-122"/>
+                <a:cs typeface="Trebuchet MS" pitchFamily="34" charset="-120"/>
+              </a:rPr>
+              <a:t>·</a:t>
+            </a:r>
+            <a:endParaRPr lang="en-US" sz="1600" dirty="0"/>
+          </a:p>
+        </p:txBody>
+      </p:sp>
+      <p:sp>
+        <p:nvSpPr>
+          <p:cNvPr id="52" name="Shape 50"/>
+          <p:cNvSpPr/>
+          <p:nvPr/>
+        </p:nvSpPr>
+        <p:spPr>
+          <a:xfrm>
+            <a:off x="7556536" y="3364992"/>
+            <a:ext cx="849086" cy="475488"/>
+          </a:xfrm>
+          <a:prstGeom prst="rect">
+            <a:avLst>
+              <a:gd name="adj" fmla="val 9615"/>
+            </a:avLst>
+          </a:prstGeom>
+          <a:solidFill>
+            <a:srgbClr val="FFFFFF"/>
+          </a:solidFill>
+          <a:ln w="12700">
+            <a:solidFill>
+              <a:srgbClr val="0D9488"/>
+            </a:solidFill>
+            <a:prstDash val="solid"/>
+          </a:ln>
+        </p:spPr>
+      </p:sp>
+      <p:sp>
+        <p:nvSpPr>
+          <p:cNvPr id="53" name="Text 51"/>
+          <p:cNvSpPr/>
+          <p:nvPr/>
+        </p:nvSpPr>
+        <p:spPr>
+          <a:xfrm>
+            <a:off x="7556536" y="3364992"/>
+            <a:ext cx="849086" cy="475488"/>
+          </a:xfrm>
+          <a:prstGeom prst="rect">
+            <a:avLst/>
+          </a:prstGeom>
+          <a:noFill/>
+          <a:ln/>
+        </p:spPr>
+        <p:txBody>
+          <a:bodyPr wrap="square" lIns="0" tIns="0" rIns="0" bIns="0" rtlCol="0" anchor="ctr"/>
+          <a:lstStyle/>
+          <a:p>
+            <a:pPr algn="ctr" indent="0" marL="0">
+              <a:buNone/>
+            </a:pPr>
+            <a:r>
+              <a:rPr lang="en-US" sz="1400" b="1" dirty="0">
+                <a:solidFill>
+                  <a:srgbClr val="0D9488"/>
+                </a:solidFill>
+                <a:latin typeface="Trebuchet MS" pitchFamily="34" charset="0"/>
+                <a:ea typeface="Trebuchet MS" pitchFamily="34" charset="-122"/>
+                <a:cs typeface="Trebuchet MS" pitchFamily="34" charset="-120"/>
+              </a:rPr>
+              <a:t>ly</a:t>
+            </a:r>
+            <a:endParaRPr lang="en-US" sz="1400" dirty="0"/>
+          </a:p>
+        </p:txBody>
+      </p:sp>
+      <p:sp>
+        <p:nvSpPr>
+          <p:cNvPr id="54" name="Shape 52"/>
           <p:cNvSpPr/>
           <p:nvPr/>
         </p:nvSpPr>
@@ -28545,7 +29881,7 @@
       </p:sp>
       <p:sp>
         <p:nvSpPr>
-          <p:cNvPr id="43" name="Text 41"/>
+          <p:cNvPr id="55" name="Text 53"/>
           <p:cNvSpPr/>
           <p:nvPr/>
         </p:nvSpPr>
@@ -28584,7 +29920,7 @@
       </p:sp>
       <p:sp>
         <p:nvSpPr>
-          <p:cNvPr id="44" name="Shape 42"/>
+          <p:cNvPr id="56" name="Shape 54"/>
           <p:cNvSpPr/>
           <p:nvPr/>
         </p:nvSpPr>
@@ -28611,7 +29947,7 @@
       </p:sp>
       <p:sp>
         <p:nvSpPr>
-          <p:cNvPr id="45" name="Text 43"/>
+          <p:cNvPr id="57" name="Text 55"/>
           <p:cNvSpPr/>
           <p:nvPr/>
         </p:nvSpPr>
@@ -28934,7 +30270,7 @@
                 <a:ea typeface="Calibri" pitchFamily="34" charset="-122"/>
                 <a:cs typeface="Calibri" pitchFamily="34" charset="-120"/>
               </a:rPr>
-              <a:t>Word Labs  •  wordlabs.app  •  Root: 'kaleido' = beautiful, shifting coloured forms</a:t>
+              <a:t>Word Labs  •  wordlabs.app  •  Root: 'kaleido' = beautiful, varied, shifting forms</a:t>
             </a:r>
             <a:endParaRPr lang="en-US" sz="800" dirty="0"/>
           </a:p>
@@ -29073,7 +30409,7 @@
                 <a:ea typeface="Trebuchet MS" pitchFamily="34" charset="-122"/>
                 <a:cs typeface="Trebuchet MS" pitchFamily="34" charset="-120"/>
               </a:rPr>
-              <a:t>kaleidoscopic</a:t>
+              <a:t>kaleidoscopically</a:t>
             </a:r>
             <a:endParaRPr lang="en-US" sz="2800" dirty="0"/>
           </a:p>
@@ -29153,8 +30489,8 @@
         </p:nvSpPr>
         <p:spPr>
           <a:xfrm>
-            <a:off x="2221992" y="2258568"/>
-            <a:ext cx="1828800" cy="292608"/>
+            <a:off x="1993392" y="2258568"/>
+            <a:ext cx="1243584" cy="292608"/>
           </a:xfrm>
           <a:prstGeom prst="rect">
             <a:avLst>
@@ -29187,8 +30523,8 @@
         </p:nvSpPr>
         <p:spPr>
           <a:xfrm>
-            <a:off x="2221992" y="2258568"/>
-            <a:ext cx="1828800" cy="292608"/>
+            <a:off x="1993392" y="2258568"/>
+            <a:ext cx="1243584" cy="292608"/>
           </a:xfrm>
           <a:prstGeom prst="rect">
             <a:avLst/>
@@ -29226,8 +30562,8 @@
         </p:nvSpPr>
         <p:spPr>
           <a:xfrm>
-            <a:off x="2221992" y="2569464"/>
-            <a:ext cx="1828800" cy="201168"/>
+            <a:off x="1993392" y="2569464"/>
+            <a:ext cx="1243584" cy="201168"/>
           </a:xfrm>
           <a:prstGeom prst="rect">
             <a:avLst/>
@@ -29251,7 +30587,7 @@
                 <a:ea typeface="Calibri" pitchFamily="34" charset="-122"/>
                 <a:cs typeface="Calibri" pitchFamily="34" charset="-120"/>
               </a:rPr>
-              <a:t>beautiful shifting form</a:t>
+              <a:t>beautiful, varied forms</a:t>
             </a:r>
             <a:endParaRPr lang="en-US" sz="850" dirty="0"/>
           </a:p>
@@ -29265,8 +30601,8 @@
         </p:nvSpPr>
         <p:spPr>
           <a:xfrm>
-            <a:off x="4370832" y="2258568"/>
-            <a:ext cx="1828800" cy="292608"/>
+            <a:off x="3328416" y="2258568"/>
+            <a:ext cx="1243584" cy="292608"/>
           </a:xfrm>
           <a:prstGeom prst="rect">
             <a:avLst>
@@ -29299,8 +30635,8 @@
         </p:nvSpPr>
         <p:spPr>
           <a:xfrm>
-            <a:off x="4370832" y="2258568"/>
-            <a:ext cx="1828800" cy="292608"/>
+            <a:off x="3328416" y="2258568"/>
+            <a:ext cx="1243584" cy="292608"/>
           </a:xfrm>
           <a:prstGeom prst="rect">
             <a:avLst/>
@@ -29338,8 +30674,8 @@
         </p:nvSpPr>
         <p:spPr>
           <a:xfrm>
-            <a:off x="4370832" y="2569464"/>
-            <a:ext cx="1828800" cy="201168"/>
+            <a:off x="3328416" y="2569464"/>
+            <a:ext cx="1243584" cy="201168"/>
           </a:xfrm>
           <a:prstGeom prst="rect">
             <a:avLst/>
@@ -29363,7 +30699,7 @@
                 <a:ea typeface="Calibri" pitchFamily="34" charset="-122"/>
                 <a:cs typeface="Calibri" pitchFamily="34" charset="-120"/>
               </a:rPr>
-              <a:t>look/view</a:t>
+              <a:t>viewing/observing</a:t>
             </a:r>
             <a:endParaRPr lang="en-US" sz="850" dirty="0"/>
           </a:p>
@@ -29377,8 +30713,8 @@
         </p:nvSpPr>
         <p:spPr>
           <a:xfrm>
-            <a:off x="6519672" y="2258568"/>
-            <a:ext cx="1828800" cy="292608"/>
+            <a:off x="4663440" y="2258568"/>
+            <a:ext cx="1243584" cy="292608"/>
           </a:xfrm>
           <a:prstGeom prst="rect">
             <a:avLst>
@@ -29411,8 +30747,8 @@
         </p:nvSpPr>
         <p:spPr>
           <a:xfrm>
-            <a:off x="6519672" y="2258568"/>
-            <a:ext cx="1828800" cy="292608"/>
+            <a:off x="4663440" y="2258568"/>
+            <a:ext cx="1243584" cy="292608"/>
           </a:xfrm>
           <a:prstGeom prst="rect">
             <a:avLst/>
@@ -29450,8 +30786,8 @@
         </p:nvSpPr>
         <p:spPr>
           <a:xfrm>
-            <a:off x="6519672" y="2569464"/>
-            <a:ext cx="1828800" cy="201168"/>
+            <a:off x="4663440" y="2569464"/>
+            <a:ext cx="1243584" cy="201168"/>
           </a:xfrm>
           <a:prstGeom prst="rect">
             <a:avLst/>
@@ -29489,6 +30825,230 @@
         </p:nvSpPr>
         <p:spPr>
           <a:xfrm>
+            <a:off x="5998464" y="2258568"/>
+            <a:ext cx="1243584" cy="292608"/>
+          </a:xfrm>
+          <a:prstGeom prst="rect">
+            <a:avLst>
+              <a:gd name="adj" fmla="val 25000"/>
+            </a:avLst>
+          </a:prstGeom>
+          <a:solidFill>
+            <a:srgbClr val="FCE7F3"/>
+          </a:solidFill>
+          <a:ln w="19050">
+            <a:solidFill>
+              <a:srgbClr val="DB2777"/>
+            </a:solidFill>
+            <a:prstDash val="solid"/>
+          </a:ln>
+          <a:effectLst>
+            <a:outerShdw sx="100000" sy="100000" kx="0" ky="0" algn="bl" rotWithShape="0" blurRad="101600" dist="38100" dir="8100000">
+              <a:srgbClr val="000000">
+                <a:alpha val="12000"/>
+              </a:srgbClr>
+            </a:outerShdw>
+          </a:effectLst>
+        </p:spPr>
+      </p:sp>
+      <p:sp>
+        <p:nvSpPr>
+          <p:cNvPr id="26" name="Text 24"/>
+          <p:cNvSpPr/>
+          <p:nvPr/>
+        </p:nvSpPr>
+        <p:spPr>
+          <a:xfrm>
+            <a:off x="5998464" y="2258568"/>
+            <a:ext cx="1243584" cy="292608"/>
+          </a:xfrm>
+          <a:prstGeom prst="rect">
+            <a:avLst/>
+          </a:prstGeom>
+          <a:noFill/>
+          <a:ln/>
+        </p:spPr>
+        <p:txBody>
+          <a:bodyPr wrap="square" lIns="0" tIns="0" rIns="0" bIns="0" rtlCol="0" anchor="ctr"/>
+          <a:lstStyle/>
+          <a:p>
+            <a:pPr algn="ctr" indent="0" marL="0">
+              <a:buNone/>
+            </a:pPr>
+            <a:r>
+              <a:rPr lang="en-US" sz="1300" b="1" dirty="0">
+                <a:solidFill>
+                  <a:srgbClr val="9D174D"/>
+                </a:solidFill>
+                <a:latin typeface="Trebuchet MS" pitchFamily="34" charset="0"/>
+                <a:ea typeface="Trebuchet MS" pitchFamily="34" charset="-122"/>
+                <a:cs typeface="Trebuchet MS" pitchFamily="34" charset="-120"/>
+              </a:rPr>
+              <a:t>al</a:t>
+            </a:r>
+            <a:endParaRPr lang="en-US" sz="1300" dirty="0"/>
+          </a:p>
+        </p:txBody>
+      </p:sp>
+      <p:sp>
+        <p:nvSpPr>
+          <p:cNvPr id="27" name="Text 25"/>
+          <p:cNvSpPr/>
+          <p:nvPr/>
+        </p:nvSpPr>
+        <p:spPr>
+          <a:xfrm>
+            <a:off x="5998464" y="2569464"/>
+            <a:ext cx="1243584" cy="201168"/>
+          </a:xfrm>
+          <a:prstGeom prst="rect">
+            <a:avLst/>
+          </a:prstGeom>
+          <a:noFill/>
+          <a:ln/>
+        </p:spPr>
+        <p:txBody>
+          <a:bodyPr wrap="square" lIns="0" tIns="0" rIns="0" bIns="0" rtlCol="0" anchor="t"/>
+          <a:lstStyle/>
+          <a:p>
+            <a:pPr algn="ctr" indent="0" marL="0">
+              <a:buNone/>
+            </a:pPr>
+            <a:r>
+              <a:rPr lang="en-US" sz="850" dirty="0">
+                <a:solidFill>
+                  <a:srgbClr val="475569"/>
+                </a:solidFill>
+                <a:latin typeface="Calibri" pitchFamily="34" charset="0"/>
+                <a:ea typeface="Calibri" pitchFamily="34" charset="-122"/>
+                <a:cs typeface="Calibri" pitchFamily="34" charset="-120"/>
+              </a:rPr>
+              <a:t>relating to</a:t>
+            </a:r>
+            <a:endParaRPr lang="en-US" sz="850" dirty="0"/>
+          </a:p>
+        </p:txBody>
+      </p:sp>
+      <p:sp>
+        <p:nvSpPr>
+          <p:cNvPr id="28" name="Shape 26"/>
+          <p:cNvSpPr/>
+          <p:nvPr/>
+        </p:nvSpPr>
+        <p:spPr>
+          <a:xfrm>
+            <a:off x="7333488" y="2258568"/>
+            <a:ext cx="1243584" cy="292608"/>
+          </a:xfrm>
+          <a:prstGeom prst="rect">
+            <a:avLst>
+              <a:gd name="adj" fmla="val 25000"/>
+            </a:avLst>
+          </a:prstGeom>
+          <a:solidFill>
+            <a:srgbClr val="FCE7F3"/>
+          </a:solidFill>
+          <a:ln w="19050">
+            <a:solidFill>
+              <a:srgbClr val="DB2777"/>
+            </a:solidFill>
+            <a:prstDash val="solid"/>
+          </a:ln>
+          <a:effectLst>
+            <a:outerShdw sx="100000" sy="100000" kx="0" ky="0" algn="bl" rotWithShape="0" blurRad="101600" dist="38100" dir="8100000">
+              <a:srgbClr val="000000">
+                <a:alpha val="12000"/>
+              </a:srgbClr>
+            </a:outerShdw>
+          </a:effectLst>
+        </p:spPr>
+      </p:sp>
+      <p:sp>
+        <p:nvSpPr>
+          <p:cNvPr id="29" name="Text 27"/>
+          <p:cNvSpPr/>
+          <p:nvPr/>
+        </p:nvSpPr>
+        <p:spPr>
+          <a:xfrm>
+            <a:off x="7333488" y="2258568"/>
+            <a:ext cx="1243584" cy="292608"/>
+          </a:xfrm>
+          <a:prstGeom prst="rect">
+            <a:avLst/>
+          </a:prstGeom>
+          <a:noFill/>
+          <a:ln/>
+        </p:spPr>
+        <p:txBody>
+          <a:bodyPr wrap="square" lIns="0" tIns="0" rIns="0" bIns="0" rtlCol="0" anchor="ctr"/>
+          <a:lstStyle/>
+          <a:p>
+            <a:pPr algn="ctr" indent="0" marL="0">
+              <a:buNone/>
+            </a:pPr>
+            <a:r>
+              <a:rPr lang="en-US" sz="1300" b="1" dirty="0">
+                <a:solidFill>
+                  <a:srgbClr val="9D174D"/>
+                </a:solidFill>
+                <a:latin typeface="Trebuchet MS" pitchFamily="34" charset="0"/>
+                <a:ea typeface="Trebuchet MS" pitchFamily="34" charset="-122"/>
+                <a:cs typeface="Trebuchet MS" pitchFamily="34" charset="-120"/>
+              </a:rPr>
+              <a:t>ly</a:t>
+            </a:r>
+            <a:endParaRPr lang="en-US" sz="1300" dirty="0"/>
+          </a:p>
+        </p:txBody>
+      </p:sp>
+      <p:sp>
+        <p:nvSpPr>
+          <p:cNvPr id="30" name="Text 28"/>
+          <p:cNvSpPr/>
+          <p:nvPr/>
+        </p:nvSpPr>
+        <p:spPr>
+          <a:xfrm>
+            <a:off x="7333488" y="2569464"/>
+            <a:ext cx="1243584" cy="201168"/>
+          </a:xfrm>
+          <a:prstGeom prst="rect">
+            <a:avLst/>
+          </a:prstGeom>
+          <a:noFill/>
+          <a:ln/>
+        </p:spPr>
+        <p:txBody>
+          <a:bodyPr wrap="square" lIns="0" tIns="0" rIns="0" bIns="0" rtlCol="0" anchor="t"/>
+          <a:lstStyle/>
+          <a:p>
+            <a:pPr algn="ctr" indent="0" marL="0">
+              <a:buNone/>
+            </a:pPr>
+            <a:r>
+              <a:rPr lang="en-US" sz="850" dirty="0">
+                <a:solidFill>
+                  <a:srgbClr val="475569"/>
+                </a:solidFill>
+                <a:latin typeface="Calibri" pitchFamily="34" charset="0"/>
+                <a:ea typeface="Calibri" pitchFamily="34" charset="-122"/>
+                <a:cs typeface="Calibri" pitchFamily="34" charset="-120"/>
+              </a:rPr>
+              <a:t>in the manner of</a:t>
+            </a:r>
+            <a:endParaRPr lang="en-US" sz="850" dirty="0"/>
+          </a:p>
+        </p:txBody>
+      </p:sp>
+      <p:sp>
+        <p:nvSpPr>
+          <p:cNvPr id="31" name="Shape 29"/>
+          <p:cNvSpPr/>
+          <p:nvPr/>
+        </p:nvSpPr>
+        <p:spPr>
+          <a:xfrm>
             <a:off x="365760" y="3273552"/>
             <a:ext cx="1371600" cy="658368"/>
           </a:xfrm>
@@ -29510,7 +31070,7 @@
       </p:sp>
       <p:sp>
         <p:nvSpPr>
-          <p:cNvPr id="26" name="Text 24"/>
+          <p:cNvPr id="32" name="Text 30"/>
           <p:cNvSpPr/>
           <p:nvPr/>
         </p:nvSpPr>
@@ -29549,7 +31109,7 @@
       </p:sp>
       <p:sp>
         <p:nvSpPr>
-          <p:cNvPr id="27" name="Shape 25"/>
+          <p:cNvPr id="33" name="Shape 31"/>
           <p:cNvSpPr/>
           <p:nvPr/>
         </p:nvSpPr>
@@ -29576,14 +31136,14 @@
       </p:sp>
       <p:sp>
         <p:nvSpPr>
-          <p:cNvPr id="28" name="Shape 26"/>
-          <p:cNvSpPr/>
-          <p:nvPr/>
-        </p:nvSpPr>
-        <p:spPr>
-          <a:xfrm>
-            <a:off x="1978152" y="3364992"/>
-            <a:ext cx="1225296" cy="475488"/>
+          <p:cNvPr id="34" name="Shape 32"/>
+          <p:cNvSpPr/>
+          <p:nvPr/>
+        </p:nvSpPr>
+        <p:spPr>
+          <a:xfrm>
+            <a:off x="1981962" y="3364992"/>
+            <a:ext cx="849086" cy="475488"/>
           </a:xfrm>
           <a:prstGeom prst="rect">
             <a:avLst>
@@ -29603,14 +31163,14 @@
       </p:sp>
       <p:sp>
         <p:nvSpPr>
-          <p:cNvPr id="29" name="Text 27"/>
-          <p:cNvSpPr/>
-          <p:nvPr/>
-        </p:nvSpPr>
-        <p:spPr>
-          <a:xfrm>
-            <a:off x="1978152" y="3364992"/>
-            <a:ext cx="1225296" cy="475488"/>
+          <p:cNvPr id="35" name="Text 33"/>
+          <p:cNvSpPr/>
+          <p:nvPr/>
+        </p:nvSpPr>
+        <p:spPr>
+          <a:xfrm>
+            <a:off x="1981962" y="3364992"/>
+            <a:ext cx="849086" cy="475488"/>
           </a:xfrm>
           <a:prstGeom prst="rect">
             <a:avLst/>
@@ -29642,14 +31202,14 @@
       </p:sp>
       <p:sp>
         <p:nvSpPr>
-          <p:cNvPr id="30" name="Text 28"/>
-          <p:cNvSpPr/>
-          <p:nvPr/>
-        </p:nvSpPr>
-        <p:spPr>
-          <a:xfrm>
-            <a:off x="3203448" y="3364992"/>
-            <a:ext cx="76200" cy="475488"/>
+          <p:cNvPr id="36" name="Text 34"/>
+          <p:cNvSpPr/>
+          <p:nvPr/>
+        </p:nvSpPr>
+        <p:spPr>
+          <a:xfrm>
+            <a:off x="2831048" y="3364992"/>
+            <a:ext cx="80010" cy="475488"/>
           </a:xfrm>
           <a:prstGeom prst="rect">
             <a:avLst/>
@@ -29681,14 +31241,14 @@
       </p:sp>
       <p:sp>
         <p:nvSpPr>
-          <p:cNvPr id="31" name="Shape 29"/>
-          <p:cNvSpPr/>
-          <p:nvPr/>
-        </p:nvSpPr>
-        <p:spPr>
-          <a:xfrm>
-            <a:off x="3279648" y="3364992"/>
-            <a:ext cx="1225296" cy="475488"/>
+          <p:cNvPr id="37" name="Shape 35"/>
+          <p:cNvSpPr/>
+          <p:nvPr/>
+        </p:nvSpPr>
+        <p:spPr>
+          <a:xfrm>
+            <a:off x="2911058" y="3364992"/>
+            <a:ext cx="849086" cy="475488"/>
           </a:xfrm>
           <a:prstGeom prst="rect">
             <a:avLst>
@@ -29708,14 +31268,14 @@
       </p:sp>
       <p:sp>
         <p:nvSpPr>
-          <p:cNvPr id="32" name="Text 30"/>
-          <p:cNvSpPr/>
-          <p:nvPr/>
-        </p:nvSpPr>
-        <p:spPr>
-          <a:xfrm>
-            <a:off x="3279648" y="3364992"/>
-            <a:ext cx="1225296" cy="475488"/>
+          <p:cNvPr id="38" name="Text 36"/>
+          <p:cNvSpPr/>
+          <p:nvPr/>
+        </p:nvSpPr>
+        <p:spPr>
+          <a:xfrm>
+            <a:off x="2911058" y="3364992"/>
+            <a:ext cx="849086" cy="475488"/>
           </a:xfrm>
           <a:prstGeom prst="rect">
             <a:avLst/>
@@ -29747,14 +31307,14 @@
       </p:sp>
       <p:sp>
         <p:nvSpPr>
-          <p:cNvPr id="33" name="Text 31"/>
-          <p:cNvSpPr/>
-          <p:nvPr/>
-        </p:nvSpPr>
-        <p:spPr>
-          <a:xfrm>
-            <a:off x="4504944" y="3364992"/>
-            <a:ext cx="76200" cy="475488"/>
+          <p:cNvPr id="39" name="Text 37"/>
+          <p:cNvSpPr/>
+          <p:nvPr/>
+        </p:nvSpPr>
+        <p:spPr>
+          <a:xfrm>
+            <a:off x="3760143" y="3364992"/>
+            <a:ext cx="80010" cy="475488"/>
           </a:xfrm>
           <a:prstGeom prst="rect">
             <a:avLst/>
@@ -29786,14 +31346,14 @@
       </p:sp>
       <p:sp>
         <p:nvSpPr>
-          <p:cNvPr id="34" name="Shape 32"/>
-          <p:cNvSpPr/>
-          <p:nvPr/>
-        </p:nvSpPr>
-        <p:spPr>
-          <a:xfrm>
-            <a:off x="4581144" y="3364992"/>
-            <a:ext cx="1225296" cy="475488"/>
+          <p:cNvPr id="40" name="Shape 38"/>
+          <p:cNvSpPr/>
+          <p:nvPr/>
+        </p:nvSpPr>
+        <p:spPr>
+          <a:xfrm>
+            <a:off x="3840153" y="3364992"/>
+            <a:ext cx="849086" cy="475488"/>
           </a:xfrm>
           <a:prstGeom prst="rect">
             <a:avLst>
@@ -29813,14 +31373,14 @@
       </p:sp>
       <p:sp>
         <p:nvSpPr>
-          <p:cNvPr id="35" name="Text 33"/>
-          <p:cNvSpPr/>
-          <p:nvPr/>
-        </p:nvSpPr>
-        <p:spPr>
-          <a:xfrm>
-            <a:off x="4581144" y="3364992"/>
-            <a:ext cx="1225296" cy="475488"/>
+          <p:cNvPr id="41" name="Text 39"/>
+          <p:cNvSpPr/>
+          <p:nvPr/>
+        </p:nvSpPr>
+        <p:spPr>
+          <a:xfrm>
+            <a:off x="3840153" y="3364992"/>
+            <a:ext cx="849086" cy="475488"/>
           </a:xfrm>
           <a:prstGeom prst="rect">
             <a:avLst/>
@@ -29852,14 +31412,14 @@
       </p:sp>
       <p:sp>
         <p:nvSpPr>
-          <p:cNvPr id="36" name="Text 34"/>
-          <p:cNvSpPr/>
-          <p:nvPr/>
-        </p:nvSpPr>
-        <p:spPr>
-          <a:xfrm>
-            <a:off x="5806440" y="3364992"/>
-            <a:ext cx="76200" cy="475488"/>
+          <p:cNvPr id="42" name="Text 40"/>
+          <p:cNvSpPr/>
+          <p:nvPr/>
+        </p:nvSpPr>
+        <p:spPr>
+          <a:xfrm>
+            <a:off x="4689239" y="3364992"/>
+            <a:ext cx="80010" cy="475488"/>
           </a:xfrm>
           <a:prstGeom prst="rect">
             <a:avLst/>
@@ -29891,14 +31451,14 @@
       </p:sp>
       <p:sp>
         <p:nvSpPr>
-          <p:cNvPr id="37" name="Shape 35"/>
-          <p:cNvSpPr/>
-          <p:nvPr/>
-        </p:nvSpPr>
-        <p:spPr>
-          <a:xfrm>
-            <a:off x="5882640" y="3364992"/>
-            <a:ext cx="1225296" cy="475488"/>
+          <p:cNvPr id="43" name="Shape 41"/>
+          <p:cNvSpPr/>
+          <p:nvPr/>
+        </p:nvSpPr>
+        <p:spPr>
+          <a:xfrm>
+            <a:off x="4769249" y="3364992"/>
+            <a:ext cx="849086" cy="475488"/>
           </a:xfrm>
           <a:prstGeom prst="rect">
             <a:avLst>
@@ -29918,14 +31478,14 @@
       </p:sp>
       <p:sp>
         <p:nvSpPr>
-          <p:cNvPr id="38" name="Text 36"/>
-          <p:cNvSpPr/>
-          <p:nvPr/>
-        </p:nvSpPr>
-        <p:spPr>
-          <a:xfrm>
-            <a:off x="5882640" y="3364992"/>
-            <a:ext cx="1225296" cy="475488"/>
+          <p:cNvPr id="44" name="Text 42"/>
+          <p:cNvSpPr/>
+          <p:nvPr/>
+        </p:nvSpPr>
+        <p:spPr>
+          <a:xfrm>
+            <a:off x="4769249" y="3364992"/>
+            <a:ext cx="849086" cy="475488"/>
           </a:xfrm>
           <a:prstGeom prst="rect">
             <a:avLst/>
@@ -29957,14 +31517,14 @@
       </p:sp>
       <p:sp>
         <p:nvSpPr>
-          <p:cNvPr id="39" name="Text 37"/>
-          <p:cNvSpPr/>
-          <p:nvPr/>
-        </p:nvSpPr>
-        <p:spPr>
-          <a:xfrm>
-            <a:off x="7107936" y="3364992"/>
-            <a:ext cx="76200" cy="475488"/>
+          <p:cNvPr id="45" name="Text 43"/>
+          <p:cNvSpPr/>
+          <p:nvPr/>
+        </p:nvSpPr>
+        <p:spPr>
+          <a:xfrm>
+            <a:off x="5618335" y="3364992"/>
+            <a:ext cx="80010" cy="475488"/>
           </a:xfrm>
           <a:prstGeom prst="rect">
             <a:avLst/>
@@ -29996,14 +31556,14 @@
       </p:sp>
       <p:sp>
         <p:nvSpPr>
-          <p:cNvPr id="40" name="Shape 38"/>
-          <p:cNvSpPr/>
-          <p:nvPr/>
-        </p:nvSpPr>
-        <p:spPr>
-          <a:xfrm>
-            <a:off x="7184136" y="3364992"/>
-            <a:ext cx="1225296" cy="475488"/>
+          <p:cNvPr id="46" name="Shape 44"/>
+          <p:cNvSpPr/>
+          <p:nvPr/>
+        </p:nvSpPr>
+        <p:spPr>
+          <a:xfrm>
+            <a:off x="5698345" y="3364992"/>
+            <a:ext cx="849086" cy="475488"/>
           </a:xfrm>
           <a:prstGeom prst="rect">
             <a:avLst>
@@ -30023,14 +31583,14 @@
       </p:sp>
       <p:sp>
         <p:nvSpPr>
-          <p:cNvPr id="41" name="Text 39"/>
-          <p:cNvSpPr/>
-          <p:nvPr/>
-        </p:nvSpPr>
-        <p:spPr>
-          <a:xfrm>
-            <a:off x="7184136" y="3364992"/>
-            <a:ext cx="1225296" cy="475488"/>
+          <p:cNvPr id="47" name="Text 45"/>
+          <p:cNvSpPr/>
+          <p:nvPr/>
+        </p:nvSpPr>
+        <p:spPr>
+          <a:xfrm>
+            <a:off x="5698345" y="3364992"/>
+            <a:ext cx="849086" cy="475488"/>
           </a:xfrm>
           <a:prstGeom prst="rect">
             <a:avLst/>
@@ -30062,7 +31622,217 @@
       </p:sp>
       <p:sp>
         <p:nvSpPr>
-          <p:cNvPr id="42" name="Shape 40"/>
+          <p:cNvPr id="48" name="Text 46"/>
+          <p:cNvSpPr/>
+          <p:nvPr/>
+        </p:nvSpPr>
+        <p:spPr>
+          <a:xfrm>
+            <a:off x="6547431" y="3364992"/>
+            <a:ext cx="80010" cy="475488"/>
+          </a:xfrm>
+          <a:prstGeom prst="rect">
+            <a:avLst/>
+          </a:prstGeom>
+          <a:noFill/>
+          <a:ln/>
+        </p:spPr>
+        <p:txBody>
+          <a:bodyPr wrap="square" lIns="0" tIns="0" rIns="0" bIns="0" rtlCol="0" anchor="ctr"/>
+          <a:lstStyle/>
+          <a:p>
+            <a:pPr algn="ctr" indent="0" marL="0">
+              <a:buNone/>
+            </a:pPr>
+            <a:r>
+              <a:rPr lang="en-US" sz="1600" b="1" dirty="0">
+                <a:solidFill>
+                  <a:srgbClr val="0D9488"/>
+                </a:solidFill>
+                <a:latin typeface="Trebuchet MS" pitchFamily="34" charset="0"/>
+                <a:ea typeface="Trebuchet MS" pitchFamily="34" charset="-122"/>
+                <a:cs typeface="Trebuchet MS" pitchFamily="34" charset="-120"/>
+              </a:rPr>
+              <a:t>·</a:t>
+            </a:r>
+            <a:endParaRPr lang="en-US" sz="1600" dirty="0"/>
+          </a:p>
+        </p:txBody>
+      </p:sp>
+      <p:sp>
+        <p:nvSpPr>
+          <p:cNvPr id="49" name="Shape 47"/>
+          <p:cNvSpPr/>
+          <p:nvPr/>
+        </p:nvSpPr>
+        <p:spPr>
+          <a:xfrm>
+            <a:off x="6627441" y="3364992"/>
+            <a:ext cx="849086" cy="475488"/>
+          </a:xfrm>
+          <a:prstGeom prst="rect">
+            <a:avLst>
+              <a:gd name="adj" fmla="val 9615"/>
+            </a:avLst>
+          </a:prstGeom>
+          <a:solidFill>
+            <a:srgbClr val="FFFFFF"/>
+          </a:solidFill>
+          <a:ln w="12700">
+            <a:solidFill>
+              <a:srgbClr val="0D9488"/>
+            </a:solidFill>
+            <a:prstDash val="solid"/>
+          </a:ln>
+        </p:spPr>
+      </p:sp>
+      <p:sp>
+        <p:nvSpPr>
+          <p:cNvPr id="50" name="Text 48"/>
+          <p:cNvSpPr/>
+          <p:nvPr/>
+        </p:nvSpPr>
+        <p:spPr>
+          <a:xfrm>
+            <a:off x="6627441" y="3364992"/>
+            <a:ext cx="849086" cy="475488"/>
+          </a:xfrm>
+          <a:prstGeom prst="rect">
+            <a:avLst/>
+          </a:prstGeom>
+          <a:noFill/>
+          <a:ln/>
+        </p:spPr>
+        <p:txBody>
+          <a:bodyPr wrap="square" lIns="0" tIns="0" rIns="0" bIns="0" rtlCol="0" anchor="ctr"/>
+          <a:lstStyle/>
+          <a:p>
+            <a:pPr algn="ctr" indent="0" marL="0">
+              <a:buNone/>
+            </a:pPr>
+            <a:r>
+              <a:rPr lang="en-US" sz="1400" b="1" dirty="0">
+                <a:solidFill>
+                  <a:srgbClr val="0D9488"/>
+                </a:solidFill>
+                <a:latin typeface="Trebuchet MS" pitchFamily="34" charset="0"/>
+                <a:ea typeface="Trebuchet MS" pitchFamily="34" charset="-122"/>
+                <a:cs typeface="Trebuchet MS" pitchFamily="34" charset="-120"/>
+              </a:rPr>
+              <a:t>al</a:t>
+            </a:r>
+            <a:endParaRPr lang="en-US" sz="1400" dirty="0"/>
+          </a:p>
+        </p:txBody>
+      </p:sp>
+      <p:sp>
+        <p:nvSpPr>
+          <p:cNvPr id="51" name="Text 49"/>
+          <p:cNvSpPr/>
+          <p:nvPr/>
+        </p:nvSpPr>
+        <p:spPr>
+          <a:xfrm>
+            <a:off x="7476526" y="3364992"/>
+            <a:ext cx="80010" cy="475488"/>
+          </a:xfrm>
+          <a:prstGeom prst="rect">
+            <a:avLst/>
+          </a:prstGeom>
+          <a:noFill/>
+          <a:ln/>
+        </p:spPr>
+        <p:txBody>
+          <a:bodyPr wrap="square" lIns="0" tIns="0" rIns="0" bIns="0" rtlCol="0" anchor="ctr"/>
+          <a:lstStyle/>
+          <a:p>
+            <a:pPr algn="ctr" indent="0" marL="0">
+              <a:buNone/>
+            </a:pPr>
+            <a:r>
+              <a:rPr lang="en-US" sz="1600" b="1" dirty="0">
+                <a:solidFill>
+                  <a:srgbClr val="0D9488"/>
+                </a:solidFill>
+                <a:latin typeface="Trebuchet MS" pitchFamily="34" charset="0"/>
+                <a:ea typeface="Trebuchet MS" pitchFamily="34" charset="-122"/>
+                <a:cs typeface="Trebuchet MS" pitchFamily="34" charset="-120"/>
+              </a:rPr>
+              <a:t>·</a:t>
+            </a:r>
+            <a:endParaRPr lang="en-US" sz="1600" dirty="0"/>
+          </a:p>
+        </p:txBody>
+      </p:sp>
+      <p:sp>
+        <p:nvSpPr>
+          <p:cNvPr id="52" name="Shape 50"/>
+          <p:cNvSpPr/>
+          <p:nvPr/>
+        </p:nvSpPr>
+        <p:spPr>
+          <a:xfrm>
+            <a:off x="7556536" y="3364992"/>
+            <a:ext cx="849086" cy="475488"/>
+          </a:xfrm>
+          <a:prstGeom prst="rect">
+            <a:avLst>
+              <a:gd name="adj" fmla="val 9615"/>
+            </a:avLst>
+          </a:prstGeom>
+          <a:solidFill>
+            <a:srgbClr val="FFFFFF"/>
+          </a:solidFill>
+          <a:ln w="12700">
+            <a:solidFill>
+              <a:srgbClr val="0D9488"/>
+            </a:solidFill>
+            <a:prstDash val="solid"/>
+          </a:ln>
+        </p:spPr>
+      </p:sp>
+      <p:sp>
+        <p:nvSpPr>
+          <p:cNvPr id="53" name="Text 51"/>
+          <p:cNvSpPr/>
+          <p:nvPr/>
+        </p:nvSpPr>
+        <p:spPr>
+          <a:xfrm>
+            <a:off x="7556536" y="3364992"/>
+            <a:ext cx="849086" cy="475488"/>
+          </a:xfrm>
+          <a:prstGeom prst="rect">
+            <a:avLst/>
+          </a:prstGeom>
+          <a:noFill/>
+          <a:ln/>
+        </p:spPr>
+        <p:txBody>
+          <a:bodyPr wrap="square" lIns="0" tIns="0" rIns="0" bIns="0" rtlCol="0" anchor="ctr"/>
+          <a:lstStyle/>
+          <a:p>
+            <a:pPr algn="ctr" indent="0" marL="0">
+              <a:buNone/>
+            </a:pPr>
+            <a:r>
+              <a:rPr lang="en-US" sz="1400" b="1" dirty="0">
+                <a:solidFill>
+                  <a:srgbClr val="0D9488"/>
+                </a:solidFill>
+                <a:latin typeface="Trebuchet MS" pitchFamily="34" charset="0"/>
+                <a:ea typeface="Trebuchet MS" pitchFamily="34" charset="-122"/>
+                <a:cs typeface="Trebuchet MS" pitchFamily="34" charset="-120"/>
+              </a:rPr>
+              <a:t>ly</a:t>
+            </a:r>
+            <a:endParaRPr lang="en-US" sz="1400" dirty="0"/>
+          </a:p>
+        </p:txBody>
+      </p:sp>
+      <p:sp>
+        <p:nvSpPr>
+          <p:cNvPr id="54" name="Shape 52"/>
           <p:cNvSpPr/>
           <p:nvPr/>
         </p:nvSpPr>
@@ -30089,7 +31859,7 @@
       </p:sp>
       <p:sp>
         <p:nvSpPr>
-          <p:cNvPr id="43" name="Text 41"/>
+          <p:cNvPr id="55" name="Text 53"/>
           <p:cNvSpPr/>
           <p:nvPr/>
         </p:nvSpPr>
@@ -30128,7 +31898,7 @@
       </p:sp>
       <p:sp>
         <p:nvSpPr>
-          <p:cNvPr id="44" name="Shape 42"/>
+          <p:cNvPr id="56" name="Shape 54"/>
           <p:cNvSpPr/>
           <p:nvPr/>
         </p:nvSpPr>
@@ -30155,14 +31925,14 @@
       </p:sp>
       <p:sp>
         <p:nvSpPr>
-          <p:cNvPr id="45" name="Shape 43"/>
-          <p:cNvSpPr/>
-          <p:nvPr/>
-        </p:nvSpPr>
-        <p:spPr>
-          <a:xfrm>
-            <a:off x="1952244" y="4169664"/>
-            <a:ext cx="543652" cy="384048"/>
+          <p:cNvPr id="57" name="Shape 55"/>
+          <p:cNvSpPr/>
+          <p:nvPr/>
+        </p:nvSpPr>
+        <p:spPr>
+          <a:xfrm>
+            <a:off x="1953158" y="4169664"/>
+            <a:ext cx="415399" cy="384048"/>
           </a:xfrm>
           <a:prstGeom prst="rect">
             <a:avLst>
@@ -30182,14 +31952,14 @@
       </p:sp>
       <p:sp>
         <p:nvSpPr>
-          <p:cNvPr id="46" name="Text 44"/>
-          <p:cNvSpPr/>
-          <p:nvPr/>
-        </p:nvSpPr>
-        <p:spPr>
-          <a:xfrm>
-            <a:off x="1952244" y="4169664"/>
-            <a:ext cx="543652" cy="384048"/>
+          <p:cNvPr id="58" name="Text 56"/>
+          <p:cNvSpPr/>
+          <p:nvPr/>
+        </p:nvSpPr>
+        <p:spPr>
+          <a:xfrm>
+            <a:off x="1953158" y="4169664"/>
+            <a:ext cx="415399" cy="384048"/>
           </a:xfrm>
           <a:prstGeom prst="rect">
             <a:avLst/>
@@ -30221,14 +31991,14 @@
       </p:sp>
       <p:sp>
         <p:nvSpPr>
-          <p:cNvPr id="47" name="Shape 45"/>
-          <p:cNvSpPr/>
-          <p:nvPr/>
-        </p:nvSpPr>
-        <p:spPr>
-          <a:xfrm>
-            <a:off x="2546188" y="4169664"/>
-            <a:ext cx="543652" cy="384048"/>
+          <p:cNvPr id="59" name="Shape 57"/>
+          <p:cNvSpPr/>
+          <p:nvPr/>
+        </p:nvSpPr>
+        <p:spPr>
+          <a:xfrm>
+            <a:off x="2419764" y="4169664"/>
+            <a:ext cx="415399" cy="384048"/>
           </a:xfrm>
           <a:prstGeom prst="rect">
             <a:avLst>
@@ -30248,14 +32018,14 @@
       </p:sp>
       <p:sp>
         <p:nvSpPr>
-          <p:cNvPr id="48" name="Text 46"/>
-          <p:cNvSpPr/>
-          <p:nvPr/>
-        </p:nvSpPr>
-        <p:spPr>
-          <a:xfrm>
-            <a:off x="2546188" y="4169664"/>
-            <a:ext cx="543652" cy="384048"/>
+          <p:cNvPr id="60" name="Text 58"/>
+          <p:cNvSpPr/>
+          <p:nvPr/>
+        </p:nvSpPr>
+        <p:spPr>
+          <a:xfrm>
+            <a:off x="2419764" y="4169664"/>
+            <a:ext cx="415399" cy="384048"/>
           </a:xfrm>
           <a:prstGeom prst="rect">
             <a:avLst/>
@@ -30287,14 +32057,14 @@
       </p:sp>
       <p:sp>
         <p:nvSpPr>
-          <p:cNvPr id="49" name="Shape 47"/>
-          <p:cNvSpPr/>
-          <p:nvPr/>
-        </p:nvSpPr>
-        <p:spPr>
-          <a:xfrm>
-            <a:off x="3140133" y="4169664"/>
-            <a:ext cx="543652" cy="384048"/>
+          <p:cNvPr id="61" name="Shape 59"/>
+          <p:cNvSpPr/>
+          <p:nvPr/>
+        </p:nvSpPr>
+        <p:spPr>
+          <a:xfrm>
+            <a:off x="2886369" y="4169664"/>
+            <a:ext cx="415399" cy="384048"/>
           </a:xfrm>
           <a:prstGeom prst="rect">
             <a:avLst>
@@ -30314,14 +32084,14 @@
       </p:sp>
       <p:sp>
         <p:nvSpPr>
-          <p:cNvPr id="50" name="Text 48"/>
-          <p:cNvSpPr/>
-          <p:nvPr/>
-        </p:nvSpPr>
-        <p:spPr>
-          <a:xfrm>
-            <a:off x="3140133" y="4169664"/>
-            <a:ext cx="543652" cy="384048"/>
+          <p:cNvPr id="62" name="Text 60"/>
+          <p:cNvSpPr/>
+          <p:nvPr/>
+        </p:nvSpPr>
+        <p:spPr>
+          <a:xfrm>
+            <a:off x="2886369" y="4169664"/>
+            <a:ext cx="415399" cy="384048"/>
           </a:xfrm>
           <a:prstGeom prst="rect">
             <a:avLst/>
@@ -30353,14 +32123,14 @@
       </p:sp>
       <p:sp>
         <p:nvSpPr>
-          <p:cNvPr id="51" name="Shape 49"/>
-          <p:cNvSpPr/>
-          <p:nvPr/>
-        </p:nvSpPr>
-        <p:spPr>
-          <a:xfrm>
-            <a:off x="3734077" y="4169664"/>
-            <a:ext cx="543652" cy="384048"/>
+          <p:cNvPr id="63" name="Shape 61"/>
+          <p:cNvSpPr/>
+          <p:nvPr/>
+        </p:nvSpPr>
+        <p:spPr>
+          <a:xfrm>
+            <a:off x="3352974" y="4169664"/>
+            <a:ext cx="415399" cy="384048"/>
           </a:xfrm>
           <a:prstGeom prst="rect">
             <a:avLst>
@@ -30380,14 +32150,14 @@
       </p:sp>
       <p:sp>
         <p:nvSpPr>
-          <p:cNvPr id="52" name="Text 50"/>
-          <p:cNvSpPr/>
-          <p:nvPr/>
-        </p:nvSpPr>
-        <p:spPr>
-          <a:xfrm>
-            <a:off x="3734077" y="4169664"/>
-            <a:ext cx="543652" cy="384048"/>
+          <p:cNvPr id="64" name="Text 62"/>
+          <p:cNvSpPr/>
+          <p:nvPr/>
+        </p:nvSpPr>
+        <p:spPr>
+          <a:xfrm>
+            <a:off x="3352974" y="4169664"/>
+            <a:ext cx="415399" cy="384048"/>
           </a:xfrm>
           <a:prstGeom prst="rect">
             <a:avLst/>
@@ -30419,14 +32189,14 @@
       </p:sp>
       <p:sp>
         <p:nvSpPr>
-          <p:cNvPr id="53" name="Shape 51"/>
-          <p:cNvSpPr/>
-          <p:nvPr/>
-        </p:nvSpPr>
-        <p:spPr>
-          <a:xfrm>
-            <a:off x="4328021" y="4169664"/>
-            <a:ext cx="543652" cy="384048"/>
+          <p:cNvPr id="65" name="Shape 63"/>
+          <p:cNvSpPr/>
+          <p:nvPr/>
+        </p:nvSpPr>
+        <p:spPr>
+          <a:xfrm>
+            <a:off x="3819579" y="4169664"/>
+            <a:ext cx="415399" cy="384048"/>
           </a:xfrm>
           <a:prstGeom prst="rect">
             <a:avLst>
@@ -30446,14 +32216,14 @@
       </p:sp>
       <p:sp>
         <p:nvSpPr>
-          <p:cNvPr id="54" name="Text 52"/>
-          <p:cNvSpPr/>
-          <p:nvPr/>
-        </p:nvSpPr>
-        <p:spPr>
-          <a:xfrm>
-            <a:off x="4328021" y="4169664"/>
-            <a:ext cx="543652" cy="384048"/>
+          <p:cNvPr id="66" name="Text 64"/>
+          <p:cNvSpPr/>
+          <p:nvPr/>
+        </p:nvSpPr>
+        <p:spPr>
+          <a:xfrm>
+            <a:off x="3819579" y="4169664"/>
+            <a:ext cx="415399" cy="384048"/>
           </a:xfrm>
           <a:prstGeom prst="rect">
             <a:avLst/>
@@ -30485,14 +32255,14 @@
       </p:sp>
       <p:sp>
         <p:nvSpPr>
-          <p:cNvPr id="55" name="Shape 53"/>
-          <p:cNvSpPr/>
-          <p:nvPr/>
-        </p:nvSpPr>
-        <p:spPr>
-          <a:xfrm>
-            <a:off x="4921966" y="4169664"/>
-            <a:ext cx="543652" cy="384048"/>
+          <p:cNvPr id="67" name="Shape 65"/>
+          <p:cNvSpPr/>
+          <p:nvPr/>
+        </p:nvSpPr>
+        <p:spPr>
+          <a:xfrm>
+            <a:off x="4286185" y="4169664"/>
+            <a:ext cx="415399" cy="384048"/>
           </a:xfrm>
           <a:prstGeom prst="rect">
             <a:avLst>
@@ -30512,14 +32282,14 @@
       </p:sp>
       <p:sp>
         <p:nvSpPr>
-          <p:cNvPr id="56" name="Text 54"/>
-          <p:cNvSpPr/>
-          <p:nvPr/>
-        </p:nvSpPr>
-        <p:spPr>
-          <a:xfrm>
-            <a:off x="4921966" y="4169664"/>
-            <a:ext cx="543652" cy="384048"/>
+          <p:cNvPr id="68" name="Text 66"/>
+          <p:cNvSpPr/>
+          <p:nvPr/>
+        </p:nvSpPr>
+        <p:spPr>
+          <a:xfrm>
+            <a:off x="4286185" y="4169664"/>
+            <a:ext cx="415399" cy="384048"/>
           </a:xfrm>
           <a:prstGeom prst="rect">
             <a:avLst/>
@@ -30551,14 +32321,14 @@
       </p:sp>
       <p:sp>
         <p:nvSpPr>
-          <p:cNvPr id="57" name="Shape 55"/>
-          <p:cNvSpPr/>
-          <p:nvPr/>
-        </p:nvSpPr>
-        <p:spPr>
-          <a:xfrm>
-            <a:off x="5515910" y="4169664"/>
-            <a:ext cx="543652" cy="384048"/>
+          <p:cNvPr id="69" name="Shape 67"/>
+          <p:cNvSpPr/>
+          <p:nvPr/>
+        </p:nvSpPr>
+        <p:spPr>
+          <a:xfrm>
+            <a:off x="4752790" y="4169664"/>
+            <a:ext cx="415399" cy="384048"/>
           </a:xfrm>
           <a:prstGeom prst="rect">
             <a:avLst>
@@ -30578,14 +32348,14 @@
       </p:sp>
       <p:sp>
         <p:nvSpPr>
-          <p:cNvPr id="58" name="Text 56"/>
-          <p:cNvSpPr/>
-          <p:nvPr/>
-        </p:nvSpPr>
-        <p:spPr>
-          <a:xfrm>
-            <a:off x="5515910" y="4169664"/>
-            <a:ext cx="543652" cy="384048"/>
+          <p:cNvPr id="70" name="Text 68"/>
+          <p:cNvSpPr/>
+          <p:nvPr/>
+        </p:nvSpPr>
+        <p:spPr>
+          <a:xfrm>
+            <a:off x="4752790" y="4169664"/>
+            <a:ext cx="415399" cy="384048"/>
           </a:xfrm>
           <a:prstGeom prst="rect">
             <a:avLst/>
@@ -30617,14 +32387,14 @@
       </p:sp>
       <p:sp>
         <p:nvSpPr>
-          <p:cNvPr id="59" name="Text 57"/>
-          <p:cNvSpPr/>
-          <p:nvPr/>
-        </p:nvSpPr>
-        <p:spPr>
-          <a:xfrm>
-            <a:off x="5515910" y="4572000"/>
-            <a:ext cx="543652" cy="219456"/>
+          <p:cNvPr id="71" name="Text 69"/>
+          <p:cNvSpPr/>
+          <p:nvPr/>
+        </p:nvSpPr>
+        <p:spPr>
+          <a:xfrm>
+            <a:off x="4752790" y="4572000"/>
+            <a:ext cx="415399" cy="219456"/>
           </a:xfrm>
           <a:prstGeom prst="rect">
             <a:avLst/>
@@ -30656,14 +32426,14 @@
       </p:sp>
       <p:sp>
         <p:nvSpPr>
-          <p:cNvPr id="60" name="Shape 58"/>
-          <p:cNvSpPr/>
-          <p:nvPr/>
-        </p:nvSpPr>
-        <p:spPr>
-          <a:xfrm>
-            <a:off x="6109855" y="4169664"/>
-            <a:ext cx="543652" cy="384048"/>
+          <p:cNvPr id="72" name="Shape 70"/>
+          <p:cNvSpPr/>
+          <p:nvPr/>
+        </p:nvSpPr>
+        <p:spPr>
+          <a:xfrm>
+            <a:off x="5219395" y="4169664"/>
+            <a:ext cx="415399" cy="384048"/>
           </a:xfrm>
           <a:prstGeom prst="rect">
             <a:avLst>
@@ -30683,14 +32453,14 @@
       </p:sp>
       <p:sp>
         <p:nvSpPr>
-          <p:cNvPr id="61" name="Text 59"/>
-          <p:cNvSpPr/>
-          <p:nvPr/>
-        </p:nvSpPr>
-        <p:spPr>
-          <a:xfrm>
-            <a:off x="6109855" y="4169664"/>
-            <a:ext cx="543652" cy="384048"/>
+          <p:cNvPr id="73" name="Text 71"/>
+          <p:cNvSpPr/>
+          <p:nvPr/>
+        </p:nvSpPr>
+        <p:spPr>
+          <a:xfrm>
+            <a:off x="5219395" y="4169664"/>
+            <a:ext cx="415399" cy="384048"/>
           </a:xfrm>
           <a:prstGeom prst="rect">
             <a:avLst/>
@@ -30722,14 +32492,14 @@
       </p:sp>
       <p:sp>
         <p:nvSpPr>
-          <p:cNvPr id="62" name="Shape 60"/>
-          <p:cNvSpPr/>
-          <p:nvPr/>
-        </p:nvSpPr>
-        <p:spPr>
-          <a:xfrm>
-            <a:off x="6703799" y="4169664"/>
-            <a:ext cx="543652" cy="384048"/>
+          <p:cNvPr id="74" name="Shape 72"/>
+          <p:cNvSpPr/>
+          <p:nvPr/>
+        </p:nvSpPr>
+        <p:spPr>
+          <a:xfrm>
+            <a:off x="5686000" y="4169664"/>
+            <a:ext cx="415399" cy="384048"/>
           </a:xfrm>
           <a:prstGeom prst="rect">
             <a:avLst>
@@ -30749,14 +32519,14 @@
       </p:sp>
       <p:sp>
         <p:nvSpPr>
-          <p:cNvPr id="63" name="Text 61"/>
-          <p:cNvSpPr/>
-          <p:nvPr/>
-        </p:nvSpPr>
-        <p:spPr>
-          <a:xfrm>
-            <a:off x="6703799" y="4169664"/>
-            <a:ext cx="543652" cy="384048"/>
+          <p:cNvPr id="75" name="Text 73"/>
+          <p:cNvSpPr/>
+          <p:nvPr/>
+        </p:nvSpPr>
+        <p:spPr>
+          <a:xfrm>
+            <a:off x="5686000" y="4169664"/>
+            <a:ext cx="415399" cy="384048"/>
           </a:xfrm>
           <a:prstGeom prst="rect">
             <a:avLst/>
@@ -30788,14 +32558,14 @@
       </p:sp>
       <p:sp>
         <p:nvSpPr>
-          <p:cNvPr id="64" name="Shape 62"/>
-          <p:cNvSpPr/>
-          <p:nvPr/>
-        </p:nvSpPr>
-        <p:spPr>
-          <a:xfrm>
-            <a:off x="7297743" y="4169664"/>
-            <a:ext cx="543652" cy="384048"/>
+          <p:cNvPr id="76" name="Shape 74"/>
+          <p:cNvSpPr/>
+          <p:nvPr/>
+        </p:nvSpPr>
+        <p:spPr>
+          <a:xfrm>
+            <a:off x="6152606" y="4169664"/>
+            <a:ext cx="415399" cy="384048"/>
           </a:xfrm>
           <a:prstGeom prst="rect">
             <a:avLst>
@@ -30815,14 +32585,14 @@
       </p:sp>
       <p:sp>
         <p:nvSpPr>
-          <p:cNvPr id="65" name="Text 63"/>
-          <p:cNvSpPr/>
-          <p:nvPr/>
-        </p:nvSpPr>
-        <p:spPr>
-          <a:xfrm>
-            <a:off x="7297743" y="4169664"/>
-            <a:ext cx="543652" cy="384048"/>
+          <p:cNvPr id="77" name="Text 75"/>
+          <p:cNvSpPr/>
+          <p:nvPr/>
+        </p:nvSpPr>
+        <p:spPr>
+          <a:xfrm>
+            <a:off x="6152606" y="4169664"/>
+            <a:ext cx="415399" cy="384048"/>
           </a:xfrm>
           <a:prstGeom prst="rect">
             <a:avLst/>
@@ -30854,14 +32624,14 @@
       </p:sp>
       <p:sp>
         <p:nvSpPr>
-          <p:cNvPr id="66" name="Shape 64"/>
-          <p:cNvSpPr/>
-          <p:nvPr/>
-        </p:nvSpPr>
-        <p:spPr>
-          <a:xfrm>
-            <a:off x="7891688" y="4169664"/>
-            <a:ext cx="543652" cy="384048"/>
+          <p:cNvPr id="78" name="Shape 76"/>
+          <p:cNvSpPr/>
+          <p:nvPr/>
+        </p:nvSpPr>
+        <p:spPr>
+          <a:xfrm>
+            <a:off x="6619211" y="4169664"/>
+            <a:ext cx="415399" cy="384048"/>
           </a:xfrm>
           <a:prstGeom prst="rect">
             <a:avLst>
@@ -30881,14 +32651,14 @@
       </p:sp>
       <p:sp>
         <p:nvSpPr>
-          <p:cNvPr id="67" name="Text 65"/>
-          <p:cNvSpPr/>
-          <p:nvPr/>
-        </p:nvSpPr>
-        <p:spPr>
-          <a:xfrm>
-            <a:off x="7891688" y="4169664"/>
-            <a:ext cx="543652" cy="384048"/>
+          <p:cNvPr id="79" name="Text 77"/>
+          <p:cNvSpPr/>
+          <p:nvPr/>
+        </p:nvSpPr>
+        <p:spPr>
+          <a:xfrm>
+            <a:off x="6619211" y="4169664"/>
+            <a:ext cx="415399" cy="384048"/>
           </a:xfrm>
           <a:prstGeom prst="rect">
             <a:avLst/>
@@ -30920,14 +32690,14 @@
       </p:sp>
       <p:sp>
         <p:nvSpPr>
-          <p:cNvPr id="68" name="Text 66"/>
-          <p:cNvSpPr/>
-          <p:nvPr/>
-        </p:nvSpPr>
-        <p:spPr>
-          <a:xfrm>
-            <a:off x="7891688" y="4572000"/>
-            <a:ext cx="543652" cy="219456"/>
+          <p:cNvPr id="80" name="Text 78"/>
+          <p:cNvSpPr/>
+          <p:nvPr/>
+        </p:nvSpPr>
+        <p:spPr>
+          <a:xfrm>
+            <a:off x="6619211" y="4572000"/>
+            <a:ext cx="415399" cy="219456"/>
           </a:xfrm>
           <a:prstGeom prst="rect">
             <a:avLst/>
@@ -30954,6 +32724,204 @@
               <a:t>/k/</a:t>
             </a:r>
             <a:endParaRPr lang="en-US" sz="750" dirty="0"/>
+          </a:p>
+        </p:txBody>
+      </p:sp>
+      <p:sp>
+        <p:nvSpPr>
+          <p:cNvPr id="81" name="Shape 79"/>
+          <p:cNvSpPr/>
+          <p:nvPr/>
+        </p:nvSpPr>
+        <p:spPr>
+          <a:xfrm>
+            <a:off x="7085816" y="4169664"/>
+            <a:ext cx="415399" cy="384048"/>
+          </a:xfrm>
+          <a:prstGeom prst="rect">
+            <a:avLst>
+              <a:gd name="adj" fmla="val 9524"/>
+            </a:avLst>
+          </a:prstGeom>
+          <a:solidFill>
+            <a:srgbClr val="FFFFFF"/>
+          </a:solidFill>
+          <a:ln w="12700">
+            <a:solidFill>
+              <a:srgbClr val="DB2777"/>
+            </a:solidFill>
+            <a:prstDash val="solid"/>
+          </a:ln>
+        </p:spPr>
+      </p:sp>
+      <p:sp>
+        <p:nvSpPr>
+          <p:cNvPr id="82" name="Text 80"/>
+          <p:cNvSpPr/>
+          <p:nvPr/>
+        </p:nvSpPr>
+        <p:spPr>
+          <a:xfrm>
+            <a:off x="7085816" y="4169664"/>
+            <a:ext cx="415399" cy="384048"/>
+          </a:xfrm>
+          <a:prstGeom prst="rect">
+            <a:avLst/>
+          </a:prstGeom>
+          <a:noFill/>
+          <a:ln/>
+        </p:spPr>
+        <p:txBody>
+          <a:bodyPr wrap="square" lIns="0" tIns="0" rIns="0" bIns="0" rtlCol="0" anchor="ctr"/>
+          <a:lstStyle/>
+          <a:p>
+            <a:pPr algn="ctr" indent="0" marL="0">
+              <a:buNone/>
+            </a:pPr>
+            <a:r>
+              <a:rPr lang="en-US" sz="900" b="1" dirty="0">
+                <a:solidFill>
+                  <a:srgbClr val="9D174D"/>
+                </a:solidFill>
+                <a:latin typeface="Trebuchet MS" pitchFamily="34" charset="0"/>
+                <a:ea typeface="Trebuchet MS" pitchFamily="34" charset="-122"/>
+                <a:cs typeface="Trebuchet MS" pitchFamily="34" charset="-120"/>
+              </a:rPr>
+              <a:t>a</a:t>
+            </a:r>
+            <a:endParaRPr lang="en-US" sz="900" dirty="0"/>
+          </a:p>
+        </p:txBody>
+      </p:sp>
+      <p:sp>
+        <p:nvSpPr>
+          <p:cNvPr id="83" name="Shape 81"/>
+          <p:cNvSpPr/>
+          <p:nvPr/>
+        </p:nvSpPr>
+        <p:spPr>
+          <a:xfrm>
+            <a:off x="7552421" y="4169664"/>
+            <a:ext cx="415399" cy="384048"/>
+          </a:xfrm>
+          <a:prstGeom prst="rect">
+            <a:avLst>
+              <a:gd name="adj" fmla="val 9524"/>
+            </a:avLst>
+          </a:prstGeom>
+          <a:solidFill>
+            <a:srgbClr val="FFFFFF"/>
+          </a:solidFill>
+          <a:ln w="12700">
+            <a:solidFill>
+              <a:srgbClr val="DB2777"/>
+            </a:solidFill>
+            <a:prstDash val="solid"/>
+          </a:ln>
+        </p:spPr>
+      </p:sp>
+      <p:sp>
+        <p:nvSpPr>
+          <p:cNvPr id="84" name="Text 82"/>
+          <p:cNvSpPr/>
+          <p:nvPr/>
+        </p:nvSpPr>
+        <p:spPr>
+          <a:xfrm>
+            <a:off x="7552421" y="4169664"/>
+            <a:ext cx="415399" cy="384048"/>
+          </a:xfrm>
+          <a:prstGeom prst="rect">
+            <a:avLst/>
+          </a:prstGeom>
+          <a:noFill/>
+          <a:ln/>
+        </p:spPr>
+        <p:txBody>
+          <a:bodyPr wrap="square" lIns="0" tIns="0" rIns="0" bIns="0" rtlCol="0" anchor="ctr"/>
+          <a:lstStyle/>
+          <a:p>
+            <a:pPr algn="ctr" indent="0" marL="0">
+              <a:buNone/>
+            </a:pPr>
+            <a:r>
+              <a:rPr lang="en-US" sz="900" b="1" dirty="0">
+                <a:solidFill>
+                  <a:srgbClr val="9D174D"/>
+                </a:solidFill>
+                <a:latin typeface="Trebuchet MS" pitchFamily="34" charset="0"/>
+                <a:ea typeface="Trebuchet MS" pitchFamily="34" charset="-122"/>
+                <a:cs typeface="Trebuchet MS" pitchFamily="34" charset="-120"/>
+              </a:rPr>
+              <a:t>ll</a:t>
+            </a:r>
+            <a:endParaRPr lang="en-US" sz="900" dirty="0"/>
+          </a:p>
+        </p:txBody>
+      </p:sp>
+      <p:sp>
+        <p:nvSpPr>
+          <p:cNvPr id="85" name="Shape 83"/>
+          <p:cNvSpPr/>
+          <p:nvPr/>
+        </p:nvSpPr>
+        <p:spPr>
+          <a:xfrm>
+            <a:off x="8019027" y="4169664"/>
+            <a:ext cx="415399" cy="384048"/>
+          </a:xfrm>
+          <a:prstGeom prst="rect">
+            <a:avLst>
+              <a:gd name="adj" fmla="val 9524"/>
+            </a:avLst>
+          </a:prstGeom>
+          <a:solidFill>
+            <a:srgbClr val="FFFFFF"/>
+          </a:solidFill>
+          <a:ln w="12700">
+            <a:solidFill>
+              <a:srgbClr val="DB2777"/>
+            </a:solidFill>
+            <a:prstDash val="solid"/>
+          </a:ln>
+        </p:spPr>
+      </p:sp>
+      <p:sp>
+        <p:nvSpPr>
+          <p:cNvPr id="86" name="Text 84"/>
+          <p:cNvSpPr/>
+          <p:nvPr/>
+        </p:nvSpPr>
+        <p:spPr>
+          <a:xfrm>
+            <a:off x="8019027" y="4169664"/>
+            <a:ext cx="415399" cy="384048"/>
+          </a:xfrm>
+          <a:prstGeom prst="rect">
+            <a:avLst/>
+          </a:prstGeom>
+          <a:noFill/>
+          <a:ln/>
+        </p:spPr>
+        <p:txBody>
+          <a:bodyPr wrap="square" lIns="0" tIns="0" rIns="0" bIns="0" rtlCol="0" anchor="ctr"/>
+          <a:lstStyle/>
+          <a:p>
+            <a:pPr algn="ctr" indent="0" marL="0">
+              <a:buNone/>
+            </a:pPr>
+            <a:r>
+              <a:rPr lang="en-US" sz="900" b="1" dirty="0">
+                <a:solidFill>
+                  <a:srgbClr val="9D174D"/>
+                </a:solidFill>
+                <a:latin typeface="Trebuchet MS" pitchFamily="34" charset="0"/>
+                <a:ea typeface="Trebuchet MS" pitchFamily="34" charset="-122"/>
+                <a:cs typeface="Trebuchet MS" pitchFamily="34" charset="-120"/>
+              </a:rPr>
+              <a:t>y</a:t>
+            </a:r>
+            <a:endParaRPr lang="en-US" sz="900" dirty="0"/>
           </a:p>
         </p:txBody>
       </p:sp>
@@ -31243,7 +33211,7 @@
                 <a:ea typeface="Calibri" pitchFamily="34" charset="-122"/>
                 <a:cs typeface="Calibri" pitchFamily="34" charset="-120"/>
               </a:rPr>
-              <a:t>Word Labs  •  wordlabs.app  •  Root: 'kaleido' = beautiful, shifting coloured forms</a:t>
+              <a:t>Word Labs  •  wordlabs.app  •  Root: 'kaleido' = beautiful, varied, shifting forms</a:t>
             </a:r>
             <a:endParaRPr lang="en-US" sz="800" dirty="0"/>
           </a:p>
@@ -31382,7 +33350,7 @@
                 <a:ea typeface="Trebuchet MS" pitchFamily="34" charset="-122"/>
                 <a:cs typeface="Trebuchet MS" pitchFamily="34" charset="-120"/>
               </a:rPr>
-              <a:t>kaleidoscape</a:t>
+              <a:t>kaleidograph</a:t>
             </a:r>
             <a:endParaRPr lang="en-US" sz="2800" dirty="0"/>
           </a:p>
@@ -32070,7 +34038,7 @@
                 <a:ea typeface="Calibri" pitchFamily="34" charset="-122"/>
                 <a:cs typeface="Calibri" pitchFamily="34" charset="-120"/>
               </a:rPr>
-              <a:t>Word Labs  •  wordlabs.app  •  Root: 'kaleido' = beautiful, shifting coloured forms</a:t>
+              <a:t>Word Labs  •  wordlabs.app  •  Root: 'kaleido' = beautiful, varied, shifting forms</a:t>
             </a:r>
             <a:endParaRPr lang="en-US" sz="800" dirty="0"/>
           </a:p>
@@ -32209,7 +34177,7 @@
                 <a:ea typeface="Trebuchet MS" pitchFamily="34" charset="-122"/>
                 <a:cs typeface="Trebuchet MS" pitchFamily="34" charset="-120"/>
               </a:rPr>
-              <a:t>kaleidoscape</a:t>
+              <a:t>kaleidograph</a:t>
             </a:r>
             <a:endParaRPr lang="en-US" sz="2800" dirty="0"/>
           </a:p>
@@ -32387,7 +34355,7 @@
                 <a:ea typeface="Calibri" pitchFamily="34" charset="-122"/>
                 <a:cs typeface="Calibri" pitchFamily="34" charset="-120"/>
               </a:rPr>
-              <a:t>beautiful shifting form</a:t>
+              <a:t>beautiful, varied forms</a:t>
             </a:r>
             <a:endParaRPr lang="en-US" sz="850" dirty="0"/>
           </a:p>
@@ -32460,7 +34428,7 @@
                 <a:ea typeface="Trebuchet MS" pitchFamily="34" charset="-122"/>
                 <a:cs typeface="Trebuchet MS" pitchFamily="34" charset="-120"/>
               </a:rPr>
-              <a:t>scape</a:t>
+              <a:t>graph</a:t>
             </a:r>
             <a:endParaRPr lang="en-US" sz="1300" dirty="0"/>
           </a:p>
@@ -32499,7 +34467,7 @@
                 <a:ea typeface="Calibri" pitchFamily="34" charset="-122"/>
                 <a:cs typeface="Calibri" pitchFamily="34" charset="-120"/>
               </a:rPr>
-              <a:t>a scene or view</a:t>
+              <a:t>something written or drawn; a recording instrument</a:t>
             </a:r>
             <a:endParaRPr lang="en-US" sz="850" dirty="0"/>
           </a:p>
@@ -33055,7 +35023,7 @@
                 <a:ea typeface="Calibri" pitchFamily="34" charset="-122"/>
                 <a:cs typeface="Calibri" pitchFamily="34" charset="-120"/>
               </a:rPr>
-              <a:t>Word Labs  •  wordlabs.app  •  Root: 'kaleido' = beautiful, shifting coloured forms</a:t>
+              <a:t>Word Labs  •  wordlabs.app  •  Root: 'kaleido' = beautiful, varied, shifting forms</a:t>
             </a:r>
             <a:endParaRPr lang="en-US" sz="800" dirty="0"/>
           </a:p>
@@ -33194,7 +35162,7 @@
                 <a:ea typeface="Trebuchet MS" pitchFamily="34" charset="-122"/>
                 <a:cs typeface="Trebuchet MS" pitchFamily="34" charset="-120"/>
               </a:rPr>
-              <a:t>kaleidoscape</a:t>
+              <a:t>kaleidograph</a:t>
             </a:r>
             <a:endParaRPr lang="en-US" sz="2800" dirty="0"/>
           </a:p>
@@ -33372,7 +35340,7 @@
                 <a:ea typeface="Calibri" pitchFamily="34" charset="-122"/>
                 <a:cs typeface="Calibri" pitchFamily="34" charset="-120"/>
               </a:rPr>
-              <a:t>beautiful shifting form</a:t>
+              <a:t>beautiful, varied forms</a:t>
             </a:r>
             <a:endParaRPr lang="en-US" sz="850" dirty="0"/>
           </a:p>
@@ -33445,7 +35413,7 @@
                 <a:ea typeface="Trebuchet MS" pitchFamily="34" charset="-122"/>
                 <a:cs typeface="Trebuchet MS" pitchFamily="34" charset="-120"/>
               </a:rPr>
-              <a:t>scape</a:t>
+              <a:t>graph</a:t>
             </a:r>
             <a:endParaRPr lang="en-US" sz="1300" dirty="0"/>
           </a:p>
@@ -33484,7 +35452,7 @@
                 <a:ea typeface="Calibri" pitchFamily="34" charset="-122"/>
                 <a:cs typeface="Calibri" pitchFamily="34" charset="-120"/>
               </a:rPr>
-              <a:t>a scene or view</a:t>
+              <a:t>something written or drawn; a recording instrument</a:t>
             </a:r>
             <a:endParaRPr lang="en-US" sz="850" dirty="0"/>
           </a:p>
@@ -33958,7 +35926,7 @@
                 <a:ea typeface="Trebuchet MS" pitchFamily="34" charset="-122"/>
                 <a:cs typeface="Trebuchet MS" pitchFamily="34" charset="-120"/>
               </a:rPr>
-              <a:t>scape</a:t>
+              <a:t>graph</a:t>
             </a:r>
             <a:endParaRPr lang="en-US" sz="1400" dirty="0"/>
           </a:p>
@@ -34382,7 +36350,7 @@
                 <a:ea typeface="Calibri" pitchFamily="34" charset="-122"/>
                 <a:cs typeface="Calibri" pitchFamily="34" charset="-120"/>
               </a:rPr>
-              <a:t>Word Labs  •  wordlabs.app  •  Root: 'kaleido' = beautiful, shifting coloured forms</a:t>
+              <a:t>Word Labs  •  wordlabs.app  •  Root: 'kaleido' = beautiful, varied, shifting forms</a:t>
             </a:r>
             <a:endParaRPr lang="en-US" sz="800" dirty="0"/>
           </a:p>
@@ -34521,7 +36489,7 @@
                 <a:ea typeface="Trebuchet MS" pitchFamily="34" charset="-122"/>
                 <a:cs typeface="Trebuchet MS" pitchFamily="34" charset="-120"/>
               </a:rPr>
-              <a:t>kaleidoscape</a:t>
+              <a:t>kaleidograph</a:t>
             </a:r>
             <a:endParaRPr lang="en-US" sz="2800" dirty="0"/>
           </a:p>
@@ -34699,7 +36667,7 @@
                 <a:ea typeface="Calibri" pitchFamily="34" charset="-122"/>
                 <a:cs typeface="Calibri" pitchFamily="34" charset="-120"/>
               </a:rPr>
-              <a:t>beautiful shifting form</a:t>
+              <a:t>beautiful, varied forms</a:t>
             </a:r>
             <a:endParaRPr lang="en-US" sz="850" dirty="0"/>
           </a:p>
@@ -34772,7 +36740,7 @@
                 <a:ea typeface="Trebuchet MS" pitchFamily="34" charset="-122"/>
                 <a:cs typeface="Trebuchet MS" pitchFamily="34" charset="-120"/>
               </a:rPr>
-              <a:t>scape</a:t>
+              <a:t>graph</a:t>
             </a:r>
             <a:endParaRPr lang="en-US" sz="1300" dirty="0"/>
           </a:p>
@@ -34811,7 +36779,7 @@
                 <a:ea typeface="Calibri" pitchFamily="34" charset="-122"/>
                 <a:cs typeface="Calibri" pitchFamily="34" charset="-120"/>
               </a:rPr>
-              <a:t>a scene or view</a:t>
+              <a:t>something written or drawn; a recording instrument</a:t>
             </a:r>
             <a:endParaRPr lang="en-US" sz="850" dirty="0"/>
           </a:p>
@@ -35285,7 +37253,7 @@
                 <a:ea typeface="Trebuchet MS" pitchFamily="34" charset="-122"/>
                 <a:cs typeface="Trebuchet MS" pitchFamily="34" charset="-120"/>
               </a:rPr>
-              <a:t>scape</a:t>
+              <a:t>graph</a:t>
             </a:r>
             <a:endParaRPr lang="en-US" sz="1400" dirty="0"/>
           </a:p>
@@ -35840,7 +37808,7 @@
                 <a:ea typeface="Trebuchet MS" pitchFamily="34" charset="-122"/>
                 <a:cs typeface="Trebuchet MS" pitchFamily="34" charset="-120"/>
               </a:rPr>
-              <a:t>sc</a:t>
+              <a:t>gr</a:t>
             </a:r>
             <a:endParaRPr lang="en-US" sz="900" dirty="0"/>
           </a:p>
@@ -35848,13 +37816,145 @@
       </p:sp>
       <p:sp>
         <p:nvSpPr>
-          <p:cNvPr id="53" name="Text 51"/>
-          <p:cNvSpPr/>
-          <p:nvPr/>
-        </p:nvSpPr>
-        <p:spPr>
-          <a:xfrm>
-            <a:off x="6307531" y="4572000"/>
+          <p:cNvPr id="53" name="Shape 51"/>
+          <p:cNvSpPr/>
+          <p:nvPr/>
+        </p:nvSpPr>
+        <p:spPr>
+          <a:xfrm>
+            <a:off x="7033565" y="4169664"/>
+            <a:ext cx="676656" cy="384048"/>
+          </a:xfrm>
+          <a:prstGeom prst="rect">
+            <a:avLst>
+              <a:gd name="adj" fmla="val 9524"/>
+            </a:avLst>
+          </a:prstGeom>
+          <a:solidFill>
+            <a:srgbClr val="FFFFFF"/>
+          </a:solidFill>
+          <a:ln w="12700">
+            <a:solidFill>
+              <a:srgbClr val="DB2777"/>
+            </a:solidFill>
+            <a:prstDash val="solid"/>
+          </a:ln>
+        </p:spPr>
+      </p:sp>
+      <p:sp>
+        <p:nvSpPr>
+          <p:cNvPr id="54" name="Text 52"/>
+          <p:cNvSpPr/>
+          <p:nvPr/>
+        </p:nvSpPr>
+        <p:spPr>
+          <a:xfrm>
+            <a:off x="7033565" y="4169664"/>
+            <a:ext cx="676656" cy="384048"/>
+          </a:xfrm>
+          <a:prstGeom prst="rect">
+            <a:avLst/>
+          </a:prstGeom>
+          <a:noFill/>
+          <a:ln/>
+        </p:spPr>
+        <p:txBody>
+          <a:bodyPr wrap="square" lIns="0" tIns="0" rIns="0" bIns="0" rtlCol="0" anchor="ctr"/>
+          <a:lstStyle/>
+          <a:p>
+            <a:pPr algn="ctr" indent="0" marL="0">
+              <a:buNone/>
+            </a:pPr>
+            <a:r>
+              <a:rPr lang="en-US" sz="900" b="1" dirty="0">
+                <a:solidFill>
+                  <a:srgbClr val="9D174D"/>
+                </a:solidFill>
+                <a:latin typeface="Trebuchet MS" pitchFamily="34" charset="0"/>
+                <a:ea typeface="Trebuchet MS" pitchFamily="34" charset="-122"/>
+                <a:cs typeface="Trebuchet MS" pitchFamily="34" charset="-120"/>
+              </a:rPr>
+              <a:t>a</a:t>
+            </a:r>
+            <a:endParaRPr lang="en-US" sz="900" dirty="0"/>
+          </a:p>
+        </p:txBody>
+      </p:sp>
+      <p:sp>
+        <p:nvSpPr>
+          <p:cNvPr id="55" name="Shape 53"/>
+          <p:cNvSpPr/>
+          <p:nvPr/>
+        </p:nvSpPr>
+        <p:spPr>
+          <a:xfrm>
+            <a:off x="7759598" y="4169664"/>
+            <a:ext cx="676656" cy="384048"/>
+          </a:xfrm>
+          <a:prstGeom prst="rect">
+            <a:avLst>
+              <a:gd name="adj" fmla="val 9524"/>
+            </a:avLst>
+          </a:prstGeom>
+          <a:solidFill>
+            <a:srgbClr val="FFFFFF"/>
+          </a:solidFill>
+          <a:ln w="12700">
+            <a:solidFill>
+              <a:srgbClr val="DB2777"/>
+            </a:solidFill>
+            <a:prstDash val="solid"/>
+          </a:ln>
+        </p:spPr>
+      </p:sp>
+      <p:sp>
+        <p:nvSpPr>
+          <p:cNvPr id="56" name="Text 54"/>
+          <p:cNvSpPr/>
+          <p:nvPr/>
+        </p:nvSpPr>
+        <p:spPr>
+          <a:xfrm>
+            <a:off x="7759598" y="4169664"/>
+            <a:ext cx="676656" cy="384048"/>
+          </a:xfrm>
+          <a:prstGeom prst="rect">
+            <a:avLst/>
+          </a:prstGeom>
+          <a:noFill/>
+          <a:ln/>
+        </p:spPr>
+        <p:txBody>
+          <a:bodyPr wrap="square" lIns="0" tIns="0" rIns="0" bIns="0" rtlCol="0" anchor="ctr"/>
+          <a:lstStyle/>
+          <a:p>
+            <a:pPr algn="ctr" indent="0" marL="0">
+              <a:buNone/>
+            </a:pPr>
+            <a:r>
+              <a:rPr lang="en-US" sz="900" b="1" dirty="0">
+                <a:solidFill>
+                  <a:srgbClr val="9D174D"/>
+                </a:solidFill>
+                <a:latin typeface="Trebuchet MS" pitchFamily="34" charset="0"/>
+                <a:ea typeface="Trebuchet MS" pitchFamily="34" charset="-122"/>
+                <a:cs typeface="Trebuchet MS" pitchFamily="34" charset="-120"/>
+              </a:rPr>
+              <a:t>ph</a:t>
+            </a:r>
+            <a:endParaRPr lang="en-US" sz="900" dirty="0"/>
+          </a:p>
+        </p:txBody>
+      </p:sp>
+      <p:sp>
+        <p:nvSpPr>
+          <p:cNvPr id="57" name="Text 55"/>
+          <p:cNvSpPr/>
+          <p:nvPr/>
+        </p:nvSpPr>
+        <p:spPr>
+          <a:xfrm>
+            <a:off x="7759598" y="4572000"/>
             <a:ext cx="676656" cy="219456"/>
           </a:xfrm>
           <a:prstGeom prst="rect">
@@ -35879,141 +37979,9 @@
                 <a:ea typeface="Calibri" pitchFamily="34" charset="-122"/>
                 <a:cs typeface="Calibri" pitchFamily="34" charset="-120"/>
               </a:rPr>
-              <a:t>/sk/</a:t>
+              <a:t>/f/</a:t>
             </a:r>
             <a:endParaRPr lang="en-US" sz="750" dirty="0"/>
-          </a:p>
-        </p:txBody>
-      </p:sp>
-      <p:sp>
-        <p:nvSpPr>
-          <p:cNvPr id="54" name="Shape 52"/>
-          <p:cNvSpPr/>
-          <p:nvPr/>
-        </p:nvSpPr>
-        <p:spPr>
-          <a:xfrm>
-            <a:off x="7033565" y="4169664"/>
-            <a:ext cx="676656" cy="384048"/>
-          </a:xfrm>
-          <a:prstGeom prst="rect">
-            <a:avLst>
-              <a:gd name="adj" fmla="val 9524"/>
-            </a:avLst>
-          </a:prstGeom>
-          <a:solidFill>
-            <a:srgbClr val="FFFFFF"/>
-          </a:solidFill>
-          <a:ln w="12700">
-            <a:solidFill>
-              <a:srgbClr val="DB2777"/>
-            </a:solidFill>
-            <a:prstDash val="solid"/>
-          </a:ln>
-        </p:spPr>
-      </p:sp>
-      <p:sp>
-        <p:nvSpPr>
-          <p:cNvPr id="55" name="Text 53"/>
-          <p:cNvSpPr/>
-          <p:nvPr/>
-        </p:nvSpPr>
-        <p:spPr>
-          <a:xfrm>
-            <a:off x="7033565" y="4169664"/>
-            <a:ext cx="676656" cy="384048"/>
-          </a:xfrm>
-          <a:prstGeom prst="rect">
-            <a:avLst/>
-          </a:prstGeom>
-          <a:noFill/>
-          <a:ln/>
-        </p:spPr>
-        <p:txBody>
-          <a:bodyPr wrap="square" lIns="0" tIns="0" rIns="0" bIns="0" rtlCol="0" anchor="ctr"/>
-          <a:lstStyle/>
-          <a:p>
-            <a:pPr algn="ctr" indent="0" marL="0">
-              <a:buNone/>
-            </a:pPr>
-            <a:r>
-              <a:rPr lang="en-US" sz="900" b="1" dirty="0">
-                <a:solidFill>
-                  <a:srgbClr val="9D174D"/>
-                </a:solidFill>
-                <a:latin typeface="Trebuchet MS" pitchFamily="34" charset="0"/>
-                <a:ea typeface="Trebuchet MS" pitchFamily="34" charset="-122"/>
-                <a:cs typeface="Trebuchet MS" pitchFamily="34" charset="-120"/>
-              </a:rPr>
-              <a:t>a</a:t>
-            </a:r>
-            <a:endParaRPr lang="en-US" sz="900" dirty="0"/>
-          </a:p>
-        </p:txBody>
-      </p:sp>
-      <p:sp>
-        <p:nvSpPr>
-          <p:cNvPr id="56" name="Shape 54"/>
-          <p:cNvSpPr/>
-          <p:nvPr/>
-        </p:nvSpPr>
-        <p:spPr>
-          <a:xfrm>
-            <a:off x="7759598" y="4169664"/>
-            <a:ext cx="676656" cy="384048"/>
-          </a:xfrm>
-          <a:prstGeom prst="rect">
-            <a:avLst>
-              <a:gd name="adj" fmla="val 9524"/>
-            </a:avLst>
-          </a:prstGeom>
-          <a:solidFill>
-            <a:srgbClr val="FFFFFF"/>
-          </a:solidFill>
-          <a:ln w="12700">
-            <a:solidFill>
-              <a:srgbClr val="DB2777"/>
-            </a:solidFill>
-            <a:prstDash val="solid"/>
-          </a:ln>
-        </p:spPr>
-      </p:sp>
-      <p:sp>
-        <p:nvSpPr>
-          <p:cNvPr id="57" name="Text 55"/>
-          <p:cNvSpPr/>
-          <p:nvPr/>
-        </p:nvSpPr>
-        <p:spPr>
-          <a:xfrm>
-            <a:off x="7759598" y="4169664"/>
-            <a:ext cx="676656" cy="384048"/>
-          </a:xfrm>
-          <a:prstGeom prst="rect">
-            <a:avLst/>
-          </a:prstGeom>
-          <a:noFill/>
-          <a:ln/>
-        </p:spPr>
-        <p:txBody>
-          <a:bodyPr wrap="square" lIns="0" tIns="0" rIns="0" bIns="0" rtlCol="0" anchor="ctr"/>
-          <a:lstStyle/>
-          <a:p>
-            <a:pPr algn="ctr" indent="0" marL="0">
-              <a:buNone/>
-            </a:pPr>
-            <a:r>
-              <a:rPr lang="en-US" sz="900" b="1" dirty="0">
-                <a:solidFill>
-                  <a:srgbClr val="9D174D"/>
-                </a:solidFill>
-                <a:latin typeface="Trebuchet MS" pitchFamily="34" charset="0"/>
-                <a:ea typeface="Trebuchet MS" pitchFamily="34" charset="-122"/>
-                <a:cs typeface="Trebuchet MS" pitchFamily="34" charset="-120"/>
-              </a:rPr>
-              <a:t>pe</a:t>
-            </a:r>
-            <a:endParaRPr lang="en-US" sz="900" dirty="0"/>
           </a:p>
         </p:txBody>
       </p:sp>
@@ -36303,7 +38271,7 @@
                 <a:ea typeface="Calibri" pitchFamily="34" charset="-122"/>
                 <a:cs typeface="Calibri" pitchFamily="34" charset="-120"/>
               </a:rPr>
-              <a:t>Word Labs  •  wordlabs.app  •  Root: 'kaleido' = beautiful, shifting coloured forms</a:t>
+              <a:t>Word Labs  •  wordlabs.app  •  Root: 'kaleido' = beautiful, varied, shifting forms</a:t>
             </a:r>
             <a:endParaRPr lang="en-US" sz="800" dirty="0"/>
           </a:p>
@@ -37472,7 +39440,7 @@
                 <a:ea typeface="Calibri" pitchFamily="34" charset="-122"/>
                 <a:cs typeface="Calibri" pitchFamily="34" charset="-120"/>
               </a:rPr>
-              <a:t>Word Labs  •  wordlabs.app  •  Root: 'kaleido' = beautiful, shifting coloured forms</a:t>
+              <a:t>Word Labs  •  wordlabs.app  •  Root: 'kaleido' = beautiful, varied, shifting forms</a:t>
             </a:r>
             <a:endParaRPr lang="en-US" sz="800" dirty="0"/>
           </a:p>
@@ -38118,7 +40086,7 @@
                 <a:ea typeface="Trebuchet MS" pitchFamily="34" charset="-122"/>
                 <a:cs typeface="Trebuchet MS" pitchFamily="34" charset="-120"/>
               </a:rPr>
-              <a:t>micro-</a:t>
+              <a:t>neo-</a:t>
             </a:r>
             <a:endParaRPr lang="en-US" sz="1300" dirty="0"/>
           </a:p>
@@ -38271,7 +40239,7 @@
                 <a:ea typeface="Trebuchet MS" pitchFamily="34" charset="-122"/>
                 <a:cs typeface="Trebuchet MS" pitchFamily="34" charset="-120"/>
               </a:rPr>
-              <a:t>tele-</a:t>
+              <a:t>micro-</a:t>
             </a:r>
             <a:endParaRPr lang="en-US" sz="1300" dirty="0"/>
           </a:p>
@@ -38424,7 +40392,7 @@
                 <a:ea typeface="Trebuchet MS" pitchFamily="34" charset="-122"/>
                 <a:cs typeface="Trebuchet MS" pitchFamily="34" charset="-120"/>
               </a:rPr>
-              <a:t>neo-</a:t>
+              <a:t>pseudo-</a:t>
             </a:r>
             <a:endParaRPr lang="en-US" sz="1300" dirty="0"/>
           </a:p>
@@ -38513,7 +40481,7 @@
                 <a:ea typeface="Trebuchet MS" pitchFamily="34" charset="-122"/>
                 <a:cs typeface="Trebuchet MS" pitchFamily="34" charset="-120"/>
               </a:rPr>
-              <a:t>-graphic</a:t>
+              <a:t>-graph</a:t>
             </a:r>
             <a:endParaRPr lang="en-US" sz="1300" dirty="0"/>
           </a:p>
@@ -38816,7 +40784,7 @@
                 <a:ea typeface="Trebuchet MS" pitchFamily="34" charset="-122"/>
                 <a:cs typeface="Trebuchet MS" pitchFamily="34" charset="-120"/>
               </a:rPr>
-              <a:t>kaleidophone</a:t>
+              <a:t>kaleidoscopy</a:t>
             </a:r>
             <a:endParaRPr lang="en-US" sz="1200" dirty="0"/>
           </a:p>
@@ -38882,7 +40850,7 @@
                 <a:ea typeface="Trebuchet MS" pitchFamily="34" charset="-122"/>
                 <a:cs typeface="Trebuchet MS" pitchFamily="34" charset="-120"/>
               </a:rPr>
-              <a:t>kaleidograph</a:t>
+              <a:t>kaleidophonic</a:t>
             </a:r>
             <a:endParaRPr lang="en-US" sz="1200" dirty="0"/>
           </a:p>
@@ -38948,7 +40916,7 @@
                 <a:ea typeface="Trebuchet MS" pitchFamily="34" charset="-122"/>
                 <a:cs typeface="Trebuchet MS" pitchFamily="34" charset="-120"/>
               </a:rPr>
-              <a:t>kaleidoscape</a:t>
+              <a:t>kaleidograph</a:t>
             </a:r>
             <a:endParaRPr lang="en-US" sz="1200" dirty="0"/>
           </a:p>
@@ -39014,7 +40982,7 @@
                 <a:ea typeface="Trebuchet MS" pitchFamily="34" charset="-122"/>
                 <a:cs typeface="Trebuchet MS" pitchFamily="34" charset="-120"/>
               </a:rPr>
-              <a:t>kaleidovision</a:t>
+              <a:t>neokaleido</a:t>
             </a:r>
             <a:endParaRPr lang="en-US" sz="1200" dirty="0"/>
           </a:p>
@@ -39080,7 +41048,7 @@
                 <a:ea typeface="Trebuchet MS" pitchFamily="34" charset="-122"/>
                 <a:cs typeface="Trebuchet MS" pitchFamily="34" charset="-120"/>
               </a:rPr>
-              <a:t>kaleidoscopy</a:t>
+              <a:t>microkaleidoscope</a:t>
             </a:r>
             <a:endParaRPr lang="en-US" sz="1200" dirty="0"/>
           </a:p>
@@ -39372,7 +41340,7 @@
                 <a:ea typeface="Calibri" pitchFamily="34" charset="-122"/>
                 <a:cs typeface="Calibri" pitchFamily="34" charset="-120"/>
               </a:rPr>
-              <a:t>Word Labs  •  wordlabs.app  •  Root: 'kaleido' = beautiful, shifting coloured forms</a:t>
+              <a:t>Word Labs  •  wordlabs.app  •  Root: 'kaleido' = beautiful, varied, shifting forms</a:t>
             </a:r>
             <a:endParaRPr lang="en-US" sz="800" dirty="0"/>
           </a:p>
@@ -39536,7 +41504,7 @@
                 <a:ea typeface="Calibri" pitchFamily="34" charset="-122"/>
                 <a:cs typeface="Calibri" pitchFamily="34" charset="-120"/>
               </a:rPr>
-              <a:t>The core part of a word carrying its basic meaning. For example, 'kaleido' means 'beautiful, shifting coloured forms'.</a:t>
+              <a:t>The core part of a word carrying its basic meaning. For example, 'kaleido' means 'beautiful, varied, shifting forms'.</a:t>
             </a:r>
             <a:endParaRPr lang="en-US" sz="1350" dirty="0"/>
           </a:p>
@@ -40156,7 +42124,7 @@
                 <a:ea typeface="Calibri" pitchFamily="34" charset="-122"/>
                 <a:cs typeface="Calibri" pitchFamily="34" charset="-120"/>
               </a:rPr>
-              <a:t>Word Labs  •  wordlabs.app  •  Root: 'kaleido' = beautiful, shifting coloured forms</a:t>
+              <a:t>Word Labs  •  wordlabs.app  •  Root: 'kaleido' = beautiful, varied, shifting forms</a:t>
             </a:r>
             <a:endParaRPr lang="en-US" sz="800" dirty="0"/>
           </a:p>
@@ -40268,7 +42236,7 @@
                 <a:ea typeface="Calibri" pitchFamily="34" charset="-122"/>
                 <a:cs typeface="Calibri" pitchFamily="34" charset="-120"/>
               </a:rPr>
-              <a:t>1.  The root 'kaleido' comes from Greek words meaning beautiful and form.</a:t>
+              <a:t>1.  The word 'kaleidoscopic' can describe something with rapidly shifting, colourful patterns.</a:t>
             </a:r>
             <a:endParaRPr lang="en-US" sz="1300" dirty="0"/>
           </a:p>
@@ -40407,7 +42375,7 @@
                 <a:ea typeface="Calibri" pitchFamily="34" charset="-122"/>
                 <a:cs typeface="Calibri" pitchFamily="34" charset="-120"/>
               </a:rPr>
-              <a:t>2.  A kaleidoscope is a flat screen that displays moving pictures.</a:t>
+              <a:t>2.  Words containing 'kaleido' are usually connected to the idea of changing, beautiful shapes.</a:t>
             </a:r>
             <a:endParaRPr lang="en-US" sz="1300" dirty="0"/>
           </a:p>
@@ -40430,11 +42398,11 @@
             </a:avLst>
           </a:prstGeom>
           <a:solidFill>
-            <a:srgbClr val="FEE2E2"/>
-          </a:solidFill>
-          <a:ln w="12700">
-            <a:solidFill>
-              <a:srgbClr val="DC2626"/>
+            <a:srgbClr val="DCFCE7"/>
+          </a:solidFill>
+          <a:ln w="12700">
+            <a:solidFill>
+              <a:srgbClr val="16A34A"/>
             </a:solidFill>
             <a:prstDash val="solid"/>
           </a:ln>
@@ -40467,13 +42435,13 @@
             <a:r>
               <a:rPr lang="en-US" sz="1100" b="1" dirty="0">
                 <a:solidFill>
-                  <a:srgbClr val="DC2626"/>
+                  <a:srgbClr val="16A34A"/>
                 </a:solidFill>
                 <a:latin typeface="Trebuchet MS" pitchFamily="34" charset="0"/>
                 <a:ea typeface="Trebuchet MS" pitchFamily="34" charset="-122"/>
                 <a:cs typeface="Trebuchet MS" pitchFamily="34" charset="-120"/>
               </a:rPr>
-              <a:t>FALSE</a:t>
+              <a:t>TRUE</a:t>
             </a:r>
             <a:endParaRPr lang="en-US" sz="1100" dirty="0"/>
           </a:p>
@@ -40546,7 +42514,7 @@
                 <a:ea typeface="Calibri" pitchFamily="34" charset="-122"/>
                 <a:cs typeface="Calibri" pitchFamily="34" charset="-120"/>
               </a:rPr>
-              <a:t>3.  The word 'kaleidoscopic' describes something with many rapidly changing colours and patterns.</a:t>
+              <a:t>3.  The morpheme 'kaleido' originated from a Latin word meaning dark.</a:t>
             </a:r>
             <a:endParaRPr lang="en-US" sz="1300" dirty="0"/>
           </a:p>
@@ -40569,11 +42537,11 @@
             </a:avLst>
           </a:prstGeom>
           <a:solidFill>
-            <a:srgbClr val="DCFCE7"/>
-          </a:solidFill>
-          <a:ln w="12700">
-            <a:solidFill>
-              <a:srgbClr val="16A34A"/>
+            <a:srgbClr val="FEE2E2"/>
+          </a:solidFill>
+          <a:ln w="12700">
+            <a:solidFill>
+              <a:srgbClr val="DC2626"/>
             </a:solidFill>
             <a:prstDash val="solid"/>
           </a:ln>
@@ -40606,13 +42574,13 @@
             <a:r>
               <a:rPr lang="en-US" sz="1100" b="1" dirty="0">
                 <a:solidFill>
-                  <a:srgbClr val="16A34A"/>
+                  <a:srgbClr val="DC2626"/>
                 </a:solidFill>
                 <a:latin typeface="Trebuchet MS" pitchFamily="34" charset="0"/>
                 <a:ea typeface="Trebuchet MS" pitchFamily="34" charset="-122"/>
                 <a:cs typeface="Trebuchet MS" pitchFamily="34" charset="-120"/>
               </a:rPr>
-              <a:t>TRUE</a:t>
+              <a:t>FALSE</a:t>
             </a:r>
             <a:endParaRPr lang="en-US" sz="1100" dirty="0"/>
           </a:p>
@@ -40685,7 +42653,7 @@
                 <a:ea typeface="Calibri" pitchFamily="34" charset="-122"/>
                 <a:cs typeface="Calibri" pitchFamily="34" charset="-120"/>
               </a:rPr>
-              <a:t>4.  Words containing 'kaleido' are often connected to colour, pattern, and beauty.</a:t>
+              <a:t>4.  The root 'kaleido' comes from Greek words meaning beautiful and form.</a:t>
             </a:r>
             <a:endParaRPr lang="en-US" sz="1300" dirty="0"/>
           </a:p>
@@ -40824,7 +42792,7 @@
                 <a:ea typeface="Calibri" pitchFamily="34" charset="-122"/>
                 <a:cs typeface="Calibri" pitchFamily="34" charset="-120"/>
               </a:rPr>
-              <a:t>5.  The root 'kaleido' comes from a Latin word meaning to spin.</a:t>
+              <a:t>5.  A kaleidoscope produces a single fixed image that never changes.</a:t>
             </a:r>
             <a:endParaRPr lang="en-US" sz="1300" dirty="0"/>
           </a:p>
@@ -41182,7 +43150,7 @@
                 <a:ea typeface="Calibri" pitchFamily="34" charset="-122"/>
                 <a:cs typeface="Calibri" pitchFamily="34" charset="-120"/>
               </a:rPr>
-              <a:t>Word Labs  •  wordlabs.app  •  Root: 'kaleido' = beautiful, shifting coloured forms</a:t>
+              <a:t>Word Labs  •  wordlabs.app  •  Root: 'kaleido' = beautiful, varied, shifting forms</a:t>
             </a:r>
             <a:endParaRPr lang="en-US" sz="800" dirty="0"/>
           </a:p>
@@ -41319,7 +43287,7 @@
                 <a:ea typeface="Trebuchet MS" pitchFamily="34" charset="-122"/>
                 <a:cs typeface="Trebuchet MS" pitchFamily="34" charset="-120"/>
               </a:rPr>
-              <a:t>beautiful, shifting coloured forms</a:t>
+              <a:t>beautiful, varied, shifting forms</a:t>
             </a:r>
             <a:endParaRPr lang="en-US" sz="2000" dirty="0"/>
           </a:p>
@@ -41661,7 +43629,7 @@
                 <a:ea typeface="Trebuchet MS" pitchFamily="34" charset="-122"/>
                 <a:cs typeface="Trebuchet MS" pitchFamily="34" charset="-120"/>
               </a:rPr>
-              <a:t>kaleidophone</a:t>
+              <a:t>kaleidoscopy</a:t>
             </a:r>
             <a:endParaRPr lang="en-US" sz="1300" dirty="0"/>
           </a:p>
@@ -41727,7 +43695,7 @@
                 <a:ea typeface="Trebuchet MS" pitchFamily="34" charset="-122"/>
                 <a:cs typeface="Trebuchet MS" pitchFamily="34" charset="-120"/>
               </a:rPr>
-              <a:t>kaleidograph</a:t>
+              <a:t>kaleidophonic</a:t>
             </a:r>
             <a:endParaRPr lang="en-US" sz="1300" dirty="0"/>
           </a:p>
@@ -41793,7 +43761,7 @@
                 <a:ea typeface="Trebuchet MS" pitchFamily="34" charset="-122"/>
                 <a:cs typeface="Trebuchet MS" pitchFamily="34" charset="-120"/>
               </a:rPr>
-              <a:t>kaleidoscape</a:t>
+              <a:t>kaleidograph</a:t>
             </a:r>
             <a:endParaRPr lang="en-US" sz="1300" dirty="0"/>
           </a:p>
@@ -41859,7 +43827,7 @@
                 <a:ea typeface="Trebuchet MS" pitchFamily="34" charset="-122"/>
                 <a:cs typeface="Trebuchet MS" pitchFamily="34" charset="-120"/>
               </a:rPr>
-              <a:t>kaleidovision</a:t>
+              <a:t>neokaleido</a:t>
             </a:r>
             <a:endParaRPr lang="en-US" sz="1300" dirty="0"/>
           </a:p>
@@ -42151,7 +44119,7 @@
                 <a:ea typeface="Calibri" pitchFamily="34" charset="-122"/>
                 <a:cs typeface="Calibri" pitchFamily="34" charset="-120"/>
               </a:rPr>
-              <a:t>Word Labs  •  wordlabs.app  •  Root: 'kaleido' = beautiful, shifting coloured forms</a:t>
+              <a:t>Word Labs  •  wordlabs.app  •  Root: 'kaleido' = beautiful, varied, shifting forms</a:t>
             </a:r>
             <a:endParaRPr lang="en-US" sz="800" dirty="0"/>
           </a:p>
@@ -42797,7 +44765,7 @@
                 <a:ea typeface="Trebuchet MS" pitchFamily="34" charset="-122"/>
                 <a:cs typeface="Trebuchet MS" pitchFamily="34" charset="-120"/>
               </a:rPr>
-              <a:t>micro-</a:t>
+              <a:t>neo-</a:t>
             </a:r>
             <a:endParaRPr lang="en-US" sz="1300" dirty="0"/>
           </a:p>
@@ -42950,7 +44918,7 @@
                 <a:ea typeface="Trebuchet MS" pitchFamily="34" charset="-122"/>
                 <a:cs typeface="Trebuchet MS" pitchFamily="34" charset="-120"/>
               </a:rPr>
-              <a:t>tele-</a:t>
+              <a:t>micro-</a:t>
             </a:r>
             <a:endParaRPr lang="en-US" sz="1300" dirty="0"/>
           </a:p>
@@ -43103,7 +45071,7 @@
                 <a:ea typeface="Trebuchet MS" pitchFamily="34" charset="-122"/>
                 <a:cs typeface="Trebuchet MS" pitchFamily="34" charset="-120"/>
               </a:rPr>
-              <a:t>neo-</a:t>
+              <a:t>pseudo-</a:t>
             </a:r>
             <a:endParaRPr lang="en-US" sz="1300" dirty="0"/>
           </a:p>
@@ -43192,7 +45160,7 @@
                 <a:ea typeface="Trebuchet MS" pitchFamily="34" charset="-122"/>
                 <a:cs typeface="Trebuchet MS" pitchFamily="34" charset="-120"/>
               </a:rPr>
-              <a:t>-graphic</a:t>
+              <a:t>-graph</a:t>
             </a:r>
             <a:endParaRPr lang="en-US" sz="1300" dirty="0"/>
           </a:p>
@@ -43925,7 +45893,7 @@
                 <a:ea typeface="Calibri" pitchFamily="34" charset="-122"/>
                 <a:cs typeface="Calibri" pitchFamily="34" charset="-120"/>
               </a:rPr>
-              <a:t>Word Labs  •  wordlabs.app  •  Root: 'kaleido' = beautiful, shifting coloured forms</a:t>
+              <a:t>Word Labs  •  wordlabs.app  •  Root: 'kaleido' = beautiful, varied, shifting forms</a:t>
             </a:r>
             <a:endParaRPr lang="en-US" sz="800" dirty="0"/>
           </a:p>
@@ -44103,7 +46071,7 @@
                 <a:ea typeface="Calibri" pitchFamily="34" charset="-122"/>
                 <a:cs typeface="Calibri" pitchFamily="34" charset="-120"/>
               </a:rPr>
-              <a:t>In a way that is full of constantly shifting, colourful patterns, like when lights dance across a ceiling.</a:t>
+              <a:t>In a way that involves constant, dazzling changes of colour, shape, or pattern, just like a kaleidoscope in motion.</a:t>
             </a:r>
             <a:endParaRPr lang="en-US" sz="1200" dirty="0"/>
           </a:p>
@@ -44242,7 +46210,7 @@
                 <a:ea typeface="Calibri" pitchFamily="34" charset="-122"/>
                 <a:cs typeface="Calibri" pitchFamily="34" charset="-120"/>
               </a:rPr>
-              <a:t>A scientific instrument that shows sound vibrations as beautiful, moving patterns of light.</a:t>
+              <a:t>The study or art of creating and observing the shifting, colourful patterns produced inside a kaleidoscope.</a:t>
             </a:r>
             <a:endParaRPr lang="en-US" sz="1200" dirty="0"/>
           </a:p>
@@ -44381,7 +46349,7 @@
                 <a:ea typeface="Calibri" pitchFamily="34" charset="-122"/>
                 <a:cs typeface="Calibri" pitchFamily="34" charset="-120"/>
               </a:rPr>
-              <a:t>A scene or view that is full of rapidly changing, colourful and varied elements.</a:t>
+              <a:t>A device or image that records or displays the complex, shifting patterns associated with a kaleidoscope.</a:t>
             </a:r>
             <a:endParaRPr lang="en-US" sz="1200" dirty="0"/>
           </a:p>
@@ -44454,7 +46422,7 @@
                 <a:ea typeface="Trebuchet MS" pitchFamily="34" charset="-122"/>
                 <a:cs typeface="Trebuchet MS" pitchFamily="34" charset="-120"/>
               </a:rPr>
-              <a:t>kaleidophone</a:t>
+              <a:t>kaleidoscopy</a:t>
             </a:r>
             <a:endParaRPr lang="en-US" sz="1200" dirty="0"/>
           </a:p>
@@ -44520,7 +46488,7 @@
                 <a:ea typeface="Calibri" pitchFamily="34" charset="-122"/>
                 <a:cs typeface="Calibri" pitchFamily="34" charset="-120"/>
               </a:rPr>
-              <a:t>A tube you look through that shows beautiful, ever-changing patterns of colour and shape as you turn it.</a:t>
+              <a:t>A tube you look through that shows beautiful, ever-changing coloured patterns made by reflections of pieces of glass or beads.</a:t>
             </a:r>
             <a:endParaRPr lang="en-US" sz="1200" dirty="0"/>
           </a:p>
@@ -44593,7 +46561,7 @@
                 <a:ea typeface="Trebuchet MS" pitchFamily="34" charset="-122"/>
                 <a:cs typeface="Trebuchet MS" pitchFamily="34" charset="-120"/>
               </a:rPr>
-              <a:t>kaleidograph</a:t>
+              <a:t>kaleidophonic</a:t>
             </a:r>
             <a:endParaRPr lang="en-US" sz="1200" dirty="0"/>
           </a:p>
@@ -44659,7 +46627,7 @@
                 <a:ea typeface="Calibri" pitchFamily="34" charset="-122"/>
                 <a:cs typeface="Calibri" pitchFamily="34" charset="-120"/>
               </a:rPr>
-              <a:t>A way of seeing or displaying images in shifting, multicoloured, patterned forms.</a:t>
+              <a:t>A modern or newly reimagined version of the kaleidoscope concept, often using digital technology to create shifting patterns.</a:t>
             </a:r>
             <a:endParaRPr lang="en-US" sz="1200" dirty="0"/>
           </a:p>
@@ -44732,7 +46700,7 @@
                 <a:ea typeface="Trebuchet MS" pitchFamily="34" charset="-122"/>
                 <a:cs typeface="Trebuchet MS" pitchFamily="34" charset="-120"/>
               </a:rPr>
-              <a:t>kaleidoscape</a:t>
+              <a:t>kaleidograph</a:t>
             </a:r>
             <a:endParaRPr lang="en-US" sz="1200" dirty="0"/>
           </a:p>
@@ -44798,7 +46766,7 @@
                 <a:ea typeface="Calibri" pitchFamily="34" charset="-122"/>
                 <a:cs typeface="Calibri" pitchFamily="34" charset="-120"/>
               </a:rPr>
-              <a:t>A device or method that records or draws kaleidoscopic, colourful patterns.</a:t>
+              <a:t>Relating to a rich, varied, and constantly shifting mixture of sounds, much like the shifting images of a kaleidoscope but for the ears.</a:t>
             </a:r>
             <a:endParaRPr lang="en-US" sz="1200" dirty="0"/>
           </a:p>
@@ -44871,7 +46839,7 @@
                 <a:ea typeface="Trebuchet MS" pitchFamily="34" charset="-122"/>
                 <a:cs typeface="Trebuchet MS" pitchFamily="34" charset="-120"/>
               </a:rPr>
-              <a:t>kaleidovision</a:t>
+              <a:t>neokaleido</a:t>
             </a:r>
             <a:endParaRPr lang="en-US" sz="1200" dirty="0"/>
           </a:p>
@@ -44937,7 +46905,7 @@
                 <a:ea typeface="Calibri" pitchFamily="34" charset="-122"/>
                 <a:cs typeface="Calibri" pitchFamily="34" charset="-120"/>
               </a:rPr>
-              <a:t>Describing something that keeps changing and has many brilliant colours, like the patterns inside a kaleidoscope.</a:t>
+              <a:t>Describing something that is full of rapidly changing, bright, and varied colours or patterns, like looking through a kaleidoscope.</a:t>
             </a:r>
             <a:endParaRPr lang="en-US" sz="1200" dirty="0"/>
           </a:p>
@@ -45229,7 +47197,7 @@
                 <a:ea typeface="Calibri" pitchFamily="34" charset="-122"/>
                 <a:cs typeface="Calibri" pitchFamily="34" charset="-120"/>
               </a:rPr>
-              <a:t>Word Labs  •  wordlabs.app  •  Root: 'kaleido' = beautiful, shifting coloured forms</a:t>
+              <a:t>Word Labs  •  wordlabs.app  •  Root: 'kaleido' = beautiful, varied, shifting forms</a:t>
             </a:r>
             <a:endParaRPr lang="en-US" sz="800" dirty="0"/>
           </a:p>
@@ -45432,7 +47400,7 @@
                 <a:ea typeface="Calibri" pitchFamily="34" charset="-122"/>
                 <a:cs typeface="Calibri" pitchFamily="34" charset="-120"/>
               </a:rPr>
-              <a:t>When Mia looked through the kaleidoscope, she gasped at the stunning bursts of colour swirling before her eyes.</a:t>
+              <a:t>When Maya looked through the kaleidoscope, she gasped at the swirling patterns of colour that shifted with every tiny turn.</a:t>
             </a:r>
             <a:endParaRPr lang="en-US" sz="1500" dirty="0"/>
           </a:p>
@@ -45596,7 +47564,7 @@
                 <a:ea typeface="Calibri" pitchFamily="34" charset="-122"/>
                 <a:cs typeface="Calibri" pitchFamily="34" charset="-120"/>
               </a:rPr>
-              <a:t>The carnival was kaleidoscopic, with spinning lights, bright costumes, and music filling every corner.</a:t>
+              <a:t>The dancer's costume was kaleidoscopic, blazing with reds, golds, and blues that seemed to change with every movement she made.</a:t>
             </a:r>
             <a:endParaRPr lang="en-US" sz="1500" dirty="0"/>
           </a:p>
@@ -45760,7 +47728,7 @@
                 <a:ea typeface="Calibri" pitchFamily="34" charset="-122"/>
                 <a:cs typeface="Calibri" pitchFamily="34" charset="-120"/>
               </a:rPr>
-              <a:t>Our art teacher said that nature can be kaleidoscopic, especially when sunlight shines through autumn leaves.</a:t>
+              <a:t>Our teacher described the rainforest canopy as kaleidoscopically alive, bursting with insects, birds, and shimmering light all at once.</a:t>
             </a:r>
             <a:endParaRPr lang="en-US" sz="1500" dirty="0"/>
           </a:p>
